--- a/docbase_demo.pptx
+++ b/docbase_demo.pptx
@@ -12,9 +12,10 @@
     <p:sldId id="260" r:id="rId6"/>
     <p:sldId id="261" r:id="rId7"/>
     <p:sldId id="262" r:id="rId8"/>
+    <p:sldId id="263" r:id="rId9"/>
   </p:sldIdLst>
   <p:notesMasterIdLst>
-    <p:notesMasterId r:id="rId9"/>
+    <p:notesMasterId r:id="rId10"/>
   </p:notesMasterIdLst>
   <p:sldSz cx="9144000" cy="5143500"/>
   <p:notesSz cx="5143500" cy="9144000"/>
@@ -1078,6 +1079,94 @@
 </p:notes>
 </file>
 
+<file path=ppt/notesSlides/notesSlide8.xml><?xml version="1.0" encoding="utf-8"?>
+<p:notes xmlns:a="http://schemas.openxmlformats.org/drawingml/2006/main" xmlns:r="http://schemas.openxmlformats.org/officeDocument/2006/relationships" xmlns:p="http://schemas.openxmlformats.org/presentationml/2006/main">
+  <p:cSld>
+    <p:spTree>
+      <p:nvGrpSpPr>
+        <p:cNvPr id="1" name=""/>
+        <p:cNvGrpSpPr/>
+        <p:nvPr/>
+      </p:nvGrpSpPr>
+      <p:grpSpPr>
+        <a:xfrm>
+          <a:off x="0" y="0"/>
+          <a:ext cx="0" cy="0"/>
+          <a:chOff x="0" y="0"/>
+          <a:chExt cx="0" cy="0"/>
+        </a:xfrm>
+      </p:grpSpPr>
+      <p:sp>
+        <p:nvSpPr>
+          <p:cNvPr id="2" name="Slide Image Placeholder 1"/>
+          <p:cNvSpPr>
+            <a:spLocks noGrp="1" noRot="1" noChangeAspect="1"/>
+          </p:cNvSpPr>
+          <p:nvPr>
+            <p:ph type="sldImg"/>
+          </p:nvPr>
+        </p:nvSpPr>
+        <p:spPr/>
+      </p:sp>
+      <p:sp>
+        <p:nvSpPr>
+          <p:cNvPr id="3" name="Notes Placeholder 2"/>
+          <p:cNvSpPr>
+            <a:spLocks noGrp="1"/>
+          </p:cNvSpPr>
+          <p:nvPr>
+            <p:ph type="body" idx="1"/>
+          </p:nvPr>
+        </p:nvSpPr>
+        <p:spPr/>
+        <p:txBody>
+          <a:bodyPr/>
+          <a:lstStyle/>
+          <a:p>
+            <a:r>
+              <a:rPr lang="en-US" dirty="0"/>
+              <a:t/>
+            </a:r>
+            <a:endParaRPr lang="en-US" dirty="0"/>
+          </a:p>
+        </p:txBody>
+      </p:sp>
+      <p:sp>
+        <p:nvSpPr>
+          <p:cNvPr id="4" name="Slide Number Placeholder 3"/>
+          <p:cNvSpPr>
+            <a:spLocks noGrp="1"/>
+          </p:cNvSpPr>
+          <p:nvPr>
+            <p:ph type="sldNum" sz="quarter" idx="10"/>
+          </p:nvPr>
+        </p:nvSpPr>
+        <p:spPr/>
+        <p:txBody>
+          <a:bodyPr/>
+          <a:lstStyle/>
+          <a:p>
+            <a:fld id="{F7021451-1387-4CA6-816F-3879F97B5CBC}" type="slidenum">
+              <a:rPr lang="en-US"/>
+              <a:t>8</a:t>
+            </a:fld>
+            <a:endParaRPr lang="en-US"/>
+          </a:p>
+        </p:txBody>
+      </p:sp>
+    </p:spTree>
+    <p:extLst>
+      <p:ext uri="{BB962C8B-B14F-4D97-AF65-F5344CB8AC3E}">
+        <p14:creationId xmlns:p14="http://schemas.microsoft.com/office/powerpoint/2010/main" val="1024086991"/>
+      </p:ext>
+    </p:extLst>
+  </p:cSld>
+  <p:clrMapOvr>
+    <a:masterClrMapping/>
+  </p:clrMapOvr>
+</p:notes>
+</file>
+
 <file path=ppt/slideLayouts/slideLayout1.xml><?xml version="1.0" encoding="utf-8"?>
 <p:sldLayout xmlns:a="http://schemas.openxmlformats.org/drawingml/2006/main" xmlns:r="http://schemas.openxmlformats.org/officeDocument/2006/relationships" xmlns:p="http://schemas.openxmlformats.org/presentationml/2006/main" preserve="1">
   <p:cSld name="DEFAULT">
@@ -1442,15 +1531,15 @@
         </p:nvSpPr>
         <p:spPr>
           <a:xfrm>
-            <a:off x="5486400" y="274320"/>
-            <a:ext cx="3474720" cy="3474720"/>
+            <a:off x="5760720" y="182880"/>
+            <a:ext cx="3291840" cy="3291840"/>
           </a:xfrm>
           <a:prstGeom prst="ellipse">
             <a:avLst/>
           </a:prstGeom>
           <a:solidFill>
             <a:srgbClr val="6366F1">
-              <a:alpha val="12000"/>
+              <a:alpha val="11000"/>
             </a:srgbClr>
           </a:solidFill>
           <a:ln w="12700">
@@ -1469,15 +1558,15 @@
         </p:nvSpPr>
         <p:spPr>
           <a:xfrm>
-            <a:off x="6217920" y="914400"/>
-            <a:ext cx="2286000" cy="2286000"/>
+            <a:off x="6583680" y="914400"/>
+            <a:ext cx="2103120" cy="2103120"/>
           </a:xfrm>
           <a:prstGeom prst="ellipse">
             <a:avLst/>
           </a:prstGeom>
           <a:solidFill>
             <a:srgbClr val="14B8A6">
-              <a:alpha val="10000"/>
+              <a:alpha val="12000"/>
             </a:srgbClr>
           </a:solidFill>
           <a:ln w="12700">
@@ -1496,8 +1585,8 @@
         </p:nvSpPr>
         <p:spPr>
           <a:xfrm>
-            <a:off x="347472" y="502920"/>
-            <a:ext cx="3657600" cy="256032"/>
+            <a:off x="347472" y="457200"/>
+            <a:ext cx="4572000" cy="228600"/>
           </a:xfrm>
           <a:prstGeom prst="rect">
             <a:avLst/>
@@ -1532,24 +1621,63 @@
         </p:nvSpPr>
         <p:spPr>
           <a:xfrm>
-            <a:off x="347472" y="868680"/>
-            <a:ext cx="5486400" cy="2286000"/>
-          </a:xfrm>
-          <a:prstGeom prst="rect">
-            <a:avLst/>
-          </a:prstGeom>
-          <a:noFill/>
-          <a:ln/>
-        </p:spPr>
-        <p:txBody>
-          <a:bodyPr wrap="square" lIns="0" tIns="0" rIns="0" bIns="0" rtlCol="0" anchor="t"/>
+            <a:off x="347472" y="749808"/>
+            <a:ext cx="5029200" cy="960120"/>
+          </a:xfrm>
+          <a:prstGeom prst="rect">
+            <a:avLst/>
+          </a:prstGeom>
+          <a:noFill/>
+          <a:ln/>
+        </p:spPr>
+        <p:txBody>
+          <a:bodyPr wrap="square" lIns="0" tIns="0" rIns="0" bIns="0" rtlCol="0" anchor="ctr"/>
+          <a:lstStyle/>
+          <a:p>
+            <a:pPr indent="0" marL="0">
+              <a:buNone/>
+            </a:pPr>
+            <a:r>
+              <a:rPr lang="en-US" sz="6200" b="1" dirty="0">
+                <a:solidFill>
+                  <a:srgbClr val="F1F5F9"/>
+                </a:solidFill>
+                <a:latin typeface="Calibri" pitchFamily="34" charset="0"/>
+                <a:ea typeface="Calibri" pitchFamily="34" charset="-122"/>
+                <a:cs typeface="Calibri" pitchFamily="34" charset="-120"/>
+              </a:rPr>
+              <a:t>docbase</a:t>
+            </a:r>
+            <a:endParaRPr lang="en-US" sz="6200" dirty="0"/>
+          </a:p>
+        </p:txBody>
+      </p:sp>
+      <p:sp>
+        <p:nvSpPr>
+          <p:cNvPr id="7" name="Text 5"/>
+          <p:cNvSpPr/>
+          <p:nvPr/>
+        </p:nvSpPr>
+        <p:spPr>
+          <a:xfrm>
+            <a:off x="347472" y="1783080"/>
+            <a:ext cx="5212080" cy="804672"/>
+          </a:xfrm>
+          <a:prstGeom prst="rect">
+            <a:avLst/>
+          </a:prstGeom>
+          <a:noFill/>
+          <a:ln/>
+        </p:spPr>
+        <p:txBody>
+          <a:bodyPr wrap="square" lIns="0" tIns="0" rIns="0" bIns="0" rtlCol="0" anchor="ctr"/>
           <a:lstStyle/>
           <a:p>
             <a:pPr algn="l" indent="0" marL="0">
               <a:buNone/>
             </a:pPr>
             <a:r>
-              <a:rPr lang="en-US" sz="3400" b="1" dirty="0">
+              <a:rPr lang="en-US" sz="1450" dirty="0">
                 <a:solidFill>
                   <a:srgbClr val="F1F5F9"/>
                 </a:solidFill>
@@ -1557,16 +1685,16 @@
                 <a:ea typeface="Calibri" pitchFamily="34" charset="-122"/>
                 <a:cs typeface="Calibri" pitchFamily="34" charset="-120"/>
               </a:rPr>
-              <a:t>Grounded AI twins.</a:t>
-            </a:r>
-            <a:endParaRPr lang="en-US" sz="3400" dirty="0"/>
+              <a:t>You index your knowledge. Visitors ask questions.</a:t>
+            </a:r>
+            <a:endParaRPr lang="en-US" sz="1450" dirty="0"/>
           </a:p>
           <a:p>
             <a:pPr algn="l" indent="0" marL="0">
               <a:buNone/>
             </a:pPr>
             <a:r>
-              <a:rPr lang="en-US" sz="3400" b="1" dirty="0">
+              <a:rPr lang="en-US" sz="1450" dirty="0">
                 <a:solidFill>
                   <a:srgbClr val="F1F5F9"/>
                 </a:solidFill>
@@ -1574,55 +1702,38 @@
                 <a:ea typeface="Calibri" pitchFamily="34" charset="-122"/>
                 <a:cs typeface="Calibri" pitchFamily="34" charset="-120"/>
               </a:rPr>
-              <a:t>Approved knowledge.</a:t>
-            </a:r>
-            <a:endParaRPr lang="en-US" sz="3400" dirty="0"/>
-          </a:p>
+              <a:t>Answers stay tied to what you approved — not the open internet.</a:t>
+            </a:r>
+            <a:endParaRPr lang="en-US" sz="1450" dirty="0"/>
+          </a:p>
+        </p:txBody>
+      </p:sp>
+      <p:sp>
+        <p:nvSpPr>
+          <p:cNvPr id="8" name="Text 6"/>
+          <p:cNvSpPr/>
+          <p:nvPr/>
+        </p:nvSpPr>
+        <p:spPr>
+          <a:xfrm>
+            <a:off x="347472" y="2670048"/>
+            <a:ext cx="5029200" cy="685800"/>
+          </a:xfrm>
+          <a:prstGeom prst="rect">
+            <a:avLst/>
+          </a:prstGeom>
+          <a:noFill/>
+          <a:ln/>
+        </p:spPr>
+        <p:txBody>
+          <a:bodyPr wrap="square" lIns="0" tIns="0" rIns="0" bIns="0" rtlCol="0" anchor="ctr"/>
+          <a:lstStyle/>
           <a:p>
             <a:pPr algn="l" indent="0" marL="0">
               <a:buNone/>
             </a:pPr>
             <a:r>
-              <a:rPr lang="en-US" sz="3400" b="1" dirty="0">
-                <a:solidFill>
-                  <a:srgbClr val="F1F5F9"/>
-                </a:solidFill>
-                <a:latin typeface="Calibri" pitchFamily="34" charset="0"/>
-                <a:ea typeface="Calibri" pitchFamily="34" charset="-122"/>
-                <a:cs typeface="Calibri" pitchFamily="34" charset="-120"/>
-              </a:rPr>
-              <a:t>No raw code leaks.</a:t>
-            </a:r>
-            <a:endParaRPr lang="en-US" sz="3400" dirty="0"/>
-          </a:p>
-        </p:txBody>
-      </p:sp>
-      <p:sp>
-        <p:nvSpPr>
-          <p:cNvPr id="7" name="Text 5"/>
-          <p:cNvSpPr/>
-          <p:nvPr/>
-        </p:nvSpPr>
-        <p:spPr>
-          <a:xfrm>
-            <a:off x="347472" y="3291840"/>
-            <a:ext cx="5486400" cy="502920"/>
-          </a:xfrm>
-          <a:prstGeom prst="rect">
-            <a:avLst/>
-          </a:prstGeom>
-          <a:noFill/>
-          <a:ln/>
-        </p:spPr>
-        <p:txBody>
-          <a:bodyPr wrap="square" lIns="0" tIns="0" rIns="0" bIns="0" rtlCol="0" anchor="ctr"/>
-          <a:lstStyle/>
-          <a:p>
-            <a:pPr algn="l" indent="0" marL="0">
-              <a:buNone/>
-            </a:pPr>
-            <a:r>
-              <a:rPr lang="en-US" sz="1500" i="1" dirty="0">
+              <a:rPr lang="en-US" sz="1100" dirty="0">
                 <a:solidFill>
                   <a:srgbClr val="94A3B8"/>
                 </a:solidFill>
@@ -1630,48 +1741,9 @@
                 <a:ea typeface="Calibri" pitchFamily="34" charset="-122"/>
                 <a:cs typeface="Calibri" pitchFamily="34" charset="-120"/>
               </a:rPr>
-              <a:t>Grounded answers from your real work.</a:t>
-            </a:r>
-            <a:endParaRPr lang="en-US" sz="1500" dirty="0"/>
-          </a:p>
-        </p:txBody>
-      </p:sp>
-      <p:sp>
-        <p:nvSpPr>
-          <p:cNvPr id="8" name="Text 6"/>
-          <p:cNvSpPr/>
-          <p:nvPr/>
-        </p:nvSpPr>
-        <p:spPr>
-          <a:xfrm>
-            <a:off x="347472" y="3794760"/>
-            <a:ext cx="5486400" cy="502920"/>
-          </a:xfrm>
-          <a:prstGeom prst="rect">
-            <a:avLst/>
-          </a:prstGeom>
-          <a:noFill/>
-          <a:ln/>
-        </p:spPr>
-        <p:txBody>
-          <a:bodyPr wrap="square" lIns="0" tIns="0" rIns="0" bIns="0" rtlCol="0" anchor="ctr"/>
-          <a:lstStyle/>
-          <a:p>
-            <a:pPr algn="l" indent="0" marL="0">
-              <a:buNone/>
-            </a:pPr>
-            <a:r>
-              <a:rPr lang="en-US" sz="1200" dirty="0">
-                <a:solidFill>
-                  <a:srgbClr val="94A3B8"/>
-                </a:solidFill>
-                <a:latin typeface="Calibri" pitchFamily="34" charset="0"/>
-                <a:ea typeface="Calibri" pitchFamily="34" charset="-122"/>
-                <a:cs typeface="Calibri" pitchFamily="34" charset="-120"/>
-              </a:rPr>
-              <a:t>Visitors chat — answers stay tied to what you indexed, not the open internet.</a:t>
-            </a:r>
-            <a:endParaRPr lang="en-US" sz="1200" dirty="0"/>
+              <a:t>A multi-tenant RAG platform with hybrid retrieval, a synchronous LLM-as-judge quality gate, and a full production deployment on AWS.</a:t>
+            </a:r>
+            <a:endParaRPr lang="en-US" sz="1100" dirty="0"/>
           </a:p>
         </p:txBody>
       </p:sp>
@@ -1683,15 +1755,15 @@
         </p:nvSpPr>
         <p:spPr>
           <a:xfrm>
-            <a:off x="347472" y="4462272"/>
-            <a:ext cx="1965960" cy="347472"/>
+            <a:off x="347472" y="4370832"/>
+            <a:ext cx="1572768" cy="347472"/>
           </a:xfrm>
           <a:prstGeom prst="rect">
             <a:avLst/>
           </a:prstGeom>
           <a:solidFill>
             <a:srgbClr val="818CF8">
-              <a:alpha val="15000"/>
+              <a:alpha val="16000"/>
             </a:srgbClr>
           </a:solidFill>
           <a:ln w="12700">
@@ -1710,8 +1782,8 @@
         </p:nvSpPr>
         <p:spPr>
           <a:xfrm>
-            <a:off x="347472" y="4462272"/>
-            <a:ext cx="1965960" cy="347472"/>
+            <a:off x="347472" y="4370832"/>
+            <a:ext cx="1572768" cy="347472"/>
           </a:xfrm>
           <a:prstGeom prst="rect">
             <a:avLst/>
@@ -1727,14 +1799,14 @@
               <a:buNone/>
             </a:pPr>
             <a:r>
-              <a:rPr lang="en-US" sz="1000" b="1" dirty="0">
+              <a:rPr lang="en-US" sz="950" b="1" dirty="0">
                 <a:solidFill>
                   <a:srgbClr val="818CF8"/>
                 </a:solidFill>
               </a:rPr>
-              <a:t>Multi-tenant twins</a:t>
-            </a:r>
-            <a:endParaRPr lang="en-US" sz="1000" dirty="0"/>
+              <a:t>Hybrid RAG</a:t>
+            </a:r>
+            <a:endParaRPr lang="en-US" sz="950" dirty="0"/>
           </a:p>
         </p:txBody>
       </p:sp>
@@ -1746,15 +1818,15 @@
         </p:nvSpPr>
         <p:spPr>
           <a:xfrm>
-            <a:off x="2468880" y="4462272"/>
-            <a:ext cx="1965960" cy="347472"/>
+            <a:off x="1993392" y="4370832"/>
+            <a:ext cx="1572768" cy="347472"/>
           </a:xfrm>
           <a:prstGeom prst="rect">
             <a:avLst/>
           </a:prstGeom>
           <a:solidFill>
             <a:srgbClr val="14B8A6">
-              <a:alpha val="15000"/>
+              <a:alpha val="16000"/>
             </a:srgbClr>
           </a:solidFill>
           <a:ln w="12700">
@@ -1773,8 +1845,8 @@
         </p:nvSpPr>
         <p:spPr>
           <a:xfrm>
-            <a:off x="2468880" y="4462272"/>
-            <a:ext cx="1965960" cy="347472"/>
+            <a:off x="1993392" y="4370832"/>
+            <a:ext cx="1572768" cy="347472"/>
           </a:xfrm>
           <a:prstGeom prst="rect">
             <a:avLst/>
@@ -1790,14 +1862,14 @@
               <a:buNone/>
             </a:pPr>
             <a:r>
-              <a:rPr lang="en-US" sz="1000" b="1" dirty="0">
+              <a:rPr lang="en-US" sz="950" b="1" dirty="0">
                 <a:solidFill>
                   <a:srgbClr val="14B8A6"/>
                 </a:solidFill>
               </a:rPr>
-              <a:t>pgvector + RAG</a:t>
-            </a:r>
-            <a:endParaRPr lang="en-US" sz="1000" dirty="0"/>
+              <a:t>LLM-as-judge</a:t>
+            </a:r>
+            <a:endParaRPr lang="en-US" sz="950" dirty="0"/>
           </a:p>
         </p:txBody>
       </p:sp>
@@ -1809,15 +1881,78 @@
         </p:nvSpPr>
         <p:spPr>
           <a:xfrm>
-            <a:off x="4590288" y="4462272"/>
-            <a:ext cx="1965960" cy="347472"/>
+            <a:off x="3639312" y="4370832"/>
+            <a:ext cx="1572768" cy="347472"/>
+          </a:xfrm>
+          <a:prstGeom prst="rect">
+            <a:avLst/>
+          </a:prstGeom>
+          <a:solidFill>
+            <a:srgbClr val="6366F1">
+              <a:alpha val="16000"/>
+            </a:srgbClr>
+          </a:solidFill>
+          <a:ln w="12700">
+            <a:solidFill>
+              <a:srgbClr val="6366F1"/>
+            </a:solidFill>
+            <a:prstDash val="solid"/>
+          </a:ln>
+        </p:spPr>
+      </p:sp>
+      <p:sp>
+        <p:nvSpPr>
+          <p:cNvPr id="14" name="Text 12"/>
+          <p:cNvSpPr/>
+          <p:nvPr/>
+        </p:nvSpPr>
+        <p:spPr>
+          <a:xfrm>
+            <a:off x="3639312" y="4370832"/>
+            <a:ext cx="1572768" cy="347472"/>
+          </a:xfrm>
+          <a:prstGeom prst="rect">
+            <a:avLst/>
+          </a:prstGeom>
+          <a:noFill/>
+          <a:ln/>
+        </p:spPr>
+        <p:txBody>
+          <a:bodyPr wrap="square" lIns="0" tIns="0" rIns="0" bIns="0" rtlCol="0" anchor="ctr"/>
+          <a:lstStyle/>
+          <a:p>
+            <a:pPr algn="ctr" indent="0" marL="0">
+              <a:buNone/>
+            </a:pPr>
+            <a:r>
+              <a:rPr lang="en-US" sz="950" b="1" dirty="0">
+                <a:solidFill>
+                  <a:srgbClr val="6366F1"/>
+                </a:solidFill>
+              </a:rPr>
+              <a:t>Multi-tenant</a:t>
+            </a:r>
+            <a:endParaRPr lang="en-US" sz="950" dirty="0"/>
+          </a:p>
+        </p:txBody>
+      </p:sp>
+      <p:sp>
+        <p:nvSpPr>
+          <p:cNvPr id="15" name="Shape 13"/>
+          <p:cNvSpPr/>
+          <p:nvPr/>
+        </p:nvSpPr>
+        <p:spPr>
+          <a:xfrm>
+            <a:off x="5285232" y="4370832"/>
+            <a:ext cx="1572768" cy="347472"/>
           </a:xfrm>
           <a:prstGeom prst="rect">
             <a:avLst/>
           </a:prstGeom>
           <a:solidFill>
             <a:srgbClr val="F59E0B">
-              <a:alpha val="15000"/>
+              <a:alpha val="16000"/>
             </a:srgbClr>
           </a:solidFill>
           <a:ln w="12700">
@@ -1830,14 +1965,14 @@
       </p:sp>
       <p:sp>
         <p:nvSpPr>
-          <p:cNvPr id="14" name="Text 12"/>
-          <p:cNvSpPr/>
-          <p:nvPr/>
-        </p:nvSpPr>
-        <p:spPr>
-          <a:xfrm>
-            <a:off x="4590288" y="4462272"/>
-            <a:ext cx="1965960" cy="347472"/>
+          <p:cNvPr id="16" name="Text 14"/>
+          <p:cNvSpPr/>
+          <p:nvPr/>
+        </p:nvSpPr>
+        <p:spPr>
+          <a:xfrm>
+            <a:off x="5285232" y="4370832"/>
+            <a:ext cx="1572768" cy="347472"/>
           </a:xfrm>
           <a:prstGeom prst="rect">
             <a:avLst/>
@@ -1853,14 +1988,77 @@
               <a:buNone/>
             </a:pPr>
             <a:r>
-              <a:rPr lang="en-US" sz="1000" b="1" dirty="0">
+              <a:rPr lang="en-US" sz="950" b="1" dirty="0">
                 <a:solidFill>
                   <a:srgbClr val="F59E0B"/>
                 </a:solidFill>
               </a:rPr>
-              <a:t>LLM-as-judge gate</a:t>
-            </a:r>
-            <a:endParaRPr lang="en-US" sz="1000" dirty="0"/>
+              <a:t>Terraform + GH Actions</a:t>
+            </a:r>
+            <a:endParaRPr lang="en-US" sz="950" dirty="0"/>
+          </a:p>
+        </p:txBody>
+      </p:sp>
+      <p:sp>
+        <p:nvSpPr>
+          <p:cNvPr id="17" name="Shape 15"/>
+          <p:cNvSpPr/>
+          <p:nvPr/>
+        </p:nvSpPr>
+        <p:spPr>
+          <a:xfrm>
+            <a:off x="6931152" y="4370832"/>
+            <a:ext cx="1572768" cy="347472"/>
+          </a:xfrm>
+          <a:prstGeom prst="rect">
+            <a:avLst/>
+          </a:prstGeom>
+          <a:solidFill>
+            <a:srgbClr val="F43F5E">
+              <a:alpha val="16000"/>
+            </a:srgbClr>
+          </a:solidFill>
+          <a:ln w="12700">
+            <a:solidFill>
+              <a:srgbClr val="F43F5E"/>
+            </a:solidFill>
+            <a:prstDash val="solid"/>
+          </a:ln>
+        </p:spPr>
+      </p:sp>
+      <p:sp>
+        <p:nvSpPr>
+          <p:cNvPr id="18" name="Text 16"/>
+          <p:cNvSpPr/>
+          <p:nvPr/>
+        </p:nvSpPr>
+        <p:spPr>
+          <a:xfrm>
+            <a:off x="6931152" y="4370832"/>
+            <a:ext cx="1572768" cy="347472"/>
+          </a:xfrm>
+          <a:prstGeom prst="rect">
+            <a:avLst/>
+          </a:prstGeom>
+          <a:noFill/>
+          <a:ln/>
+        </p:spPr>
+        <p:txBody>
+          <a:bodyPr wrap="square" lIns="0" tIns="0" rIns="0" bIns="0" rtlCol="0" anchor="ctr"/>
+          <a:lstStyle/>
+          <a:p>
+            <a:pPr algn="ctr" indent="0" marL="0">
+              <a:buNone/>
+            </a:pPr>
+            <a:r>
+              <a:rPr lang="en-US" sz="950" b="1" dirty="0">
+                <a:solidFill>
+                  <a:srgbClr val="F43F5E"/>
+                </a:solidFill>
+              </a:rPr>
+              <a:t>AWS</a:t>
+            </a:r>
+            <a:endParaRPr lang="en-US" sz="950" dirty="0"/>
           </a:p>
         </p:txBody>
       </p:sp>
@@ -1930,7 +2128,7 @@
         <p:spPr>
           <a:xfrm>
             <a:off x="457200" y="182880"/>
-            <a:ext cx="8229600" cy="256032"/>
+            <a:ext cx="8229600" cy="237744"/>
           </a:xfrm>
           <a:prstGeom prst="rect">
             <a:avLst/>
@@ -1965,8 +2163,8 @@
         </p:nvSpPr>
         <p:spPr>
           <a:xfrm>
-            <a:off x="457200" y="475488"/>
-            <a:ext cx="8229600" cy="1051560"/>
+            <a:off x="457200" y="457200"/>
+            <a:ext cx="8229600" cy="749808"/>
           </a:xfrm>
           <a:prstGeom prst="rect">
             <a:avLst/>
@@ -1982,7 +2180,7 @@
               <a:buNone/>
             </a:pPr>
             <a:r>
-              <a:rPr lang="en-US" sz="2800" b="1" dirty="0">
+              <a:rPr lang="en-US" sz="2400" b="1" dirty="0">
                 <a:solidFill>
                   <a:srgbClr val="111827"/>
                 </a:solidFill>
@@ -1990,26 +2188,9 @@
                 <a:ea typeface="Calibri" pitchFamily="34" charset="-122"/>
                 <a:cs typeface="Calibri" pitchFamily="34" charset="-120"/>
               </a:rPr>
-              <a:t>Knowledge lives everywhere.</a:t>
-            </a:r>
-            <a:endParaRPr lang="en-US" sz="2800" dirty="0"/>
-          </a:p>
-          <a:p>
-            <a:pPr algn="l" indent="0" marL="0">
-              <a:buNone/>
-            </a:pPr>
-            <a:r>
-              <a:rPr lang="en-US" sz="2800" b="1" dirty="0">
-                <a:solidFill>
-                  <a:srgbClr val="111827"/>
-                </a:solidFill>
-                <a:latin typeface="Calibri" pitchFamily="34" charset="0"/>
-                <a:ea typeface="Calibri" pitchFamily="34" charset="-122"/>
-                <a:cs typeface="Calibri" pitchFamily="34" charset="-120"/>
-              </a:rPr>
-              <a:t>Answers need to stay grounded.</a:t>
-            </a:r>
-            <a:endParaRPr lang="en-US" sz="2800" dirty="0"/>
+              <a:t>Your knowledge is stuck behind a conversation you're not in.</a:t>
+            </a:r>
+            <a:endParaRPr lang="en-US" sz="2400" dirty="0"/>
           </a:p>
         </p:txBody>
       </p:sp>
@@ -2021,8 +2202,8 @@
         </p:nvSpPr>
         <p:spPr>
           <a:xfrm>
-            <a:off x="347472" y="1691640"/>
-            <a:ext cx="2697480" cy="2651760"/>
+            <a:off x="347472" y="1325880"/>
+            <a:ext cx="2697480" cy="2487168"/>
           </a:xfrm>
           <a:prstGeom prst="rect">
             <a:avLst/>
@@ -2037,9 +2218,9 @@
             <a:prstDash val="solid"/>
           </a:ln>
           <a:effectLst>
-            <a:outerShdw sx="100000" sy="100000" kx="0" ky="0" algn="bl" rotWithShape="0" blurRad="127000" dist="38100" dir="8100000">
+            <a:outerShdw sx="100000" sy="100000" kx="0" ky="0" algn="bl" rotWithShape="0" blurRad="101600" dist="25400" dir="8100000">
               <a:srgbClr val="000000">
-                <a:alpha val="22000"/>
+                <a:alpha val="18000"/>
               </a:srgbClr>
             </a:outerShdw>
           </a:effectLst>
@@ -2053,8 +2234,8 @@
         </p:nvSpPr>
         <p:spPr>
           <a:xfrm>
-            <a:off x="347472" y="1691640"/>
-            <a:ext cx="45720" cy="2651760"/>
+            <a:off x="347472" y="1325880"/>
+            <a:ext cx="45720" cy="2487168"/>
           </a:xfrm>
           <a:prstGeom prst="rect">
             <a:avLst/>
@@ -2078,7 +2259,7 @@
         </p:nvSpPr>
         <p:spPr>
           <a:xfrm>
-            <a:off x="484632" y="1874520"/>
+            <a:off x="475488" y="1417320"/>
             <a:ext cx="2450592" cy="566928"/>
           </a:xfrm>
           <a:prstGeom prst="rect">
@@ -2088,14 +2269,14 @@
           <a:ln/>
         </p:spPr>
         <p:txBody>
-          <a:bodyPr wrap="square" lIns="0" tIns="0" rIns="0" bIns="0" rtlCol="0" anchor="ctr"/>
-          <a:lstStyle/>
-          <a:p>
-            <a:pPr indent="0" marL="0">
-              <a:buNone/>
-            </a:pPr>
-            <a:r>
-              <a:rPr lang="en-US" sz="1250" b="1" dirty="0">
+          <a:bodyPr wrap="square" lIns="0" tIns="0" rIns="0" bIns="0" rtlCol="0" anchor="t"/>
+          <a:lstStyle/>
+          <a:p>
+            <a:pPr indent="0" marL="0">
+              <a:buNone/>
+            </a:pPr>
+            <a:r>
+              <a:rPr lang="en-US" sz="1100" b="1" dirty="0">
                 <a:solidFill>
                   <a:srgbClr val="F1F5F9"/>
                 </a:solidFill>
@@ -2103,9 +2284,9 @@
                 <a:ea typeface="Calibri" pitchFamily="34" charset="-122"/>
                 <a:cs typeface="Calibri" pitchFamily="34" charset="-120"/>
               </a:rPr>
-              <a:t>Scattered, heterogeneous sources</a:t>
-            </a:r>
-            <a:endParaRPr lang="en-US" sz="1250" dirty="0"/>
+              <a:t>People who need your knowledge can't access it interactively</a:t>
+            </a:r>
+            <a:endParaRPr lang="en-US" sz="1100" dirty="0"/>
           </a:p>
         </p:txBody>
       </p:sp>
@@ -2117,8 +2298,8 @@
         </p:nvSpPr>
         <p:spPr>
           <a:xfrm>
-            <a:off x="484632" y="2487168"/>
-            <a:ext cx="2450592" cy="1600200"/>
+            <a:off x="475488" y="2029968"/>
+            <a:ext cx="2450592" cy="1664208"/>
           </a:xfrm>
           <a:prstGeom prst="rect">
             <a:avLst/>
@@ -2134,7 +2315,7 @@
               <a:buNone/>
             </a:pPr>
             <a:r>
-              <a:rPr lang="en-US" sz="1050" dirty="0">
+              <a:rPr lang="en-US" sz="950" dirty="0">
                 <a:solidFill>
                   <a:srgbClr val="94A3B8"/>
                 </a:solidFill>
@@ -2142,9 +2323,9 @@
                 <a:ea typeface="Calibri" pitchFamily="34" charset="-122"/>
                 <a:cs typeface="Calibri" pitchFamily="34" charset="-120"/>
               </a:rPr>
-              <a:t>Drive folders, PDFs, resumes, product docs — knowledge lives in many places with no unified conversational surface.</a:t>
-            </a:r>
-            <a:endParaRPr lang="en-US" sz="1050" dirty="0"/>
+              <a:t>Recruiters, clients, and stakeholders get a static PDF or a calendar booking link. There's no way for them to explore your work, ask follow-up questions, or find the answer they need — without you being present.</a:t>
+            </a:r>
+            <a:endParaRPr lang="en-US" sz="950" dirty="0"/>
           </a:p>
         </p:txBody>
       </p:sp>
@@ -2156,8 +2337,8 @@
         </p:nvSpPr>
         <p:spPr>
           <a:xfrm>
-            <a:off x="3200400" y="1691640"/>
-            <a:ext cx="2697480" cy="2651760"/>
+            <a:off x="3200400" y="1325880"/>
+            <a:ext cx="2697480" cy="2487168"/>
           </a:xfrm>
           <a:prstGeom prst="rect">
             <a:avLst/>
@@ -2172,9 +2353,9 @@
             <a:prstDash val="solid"/>
           </a:ln>
           <a:effectLst>
-            <a:outerShdw sx="100000" sy="100000" kx="0" ky="0" algn="bl" rotWithShape="0" blurRad="127000" dist="38100" dir="8100000">
+            <a:outerShdw sx="100000" sy="100000" kx="0" ky="0" algn="bl" rotWithShape="0" blurRad="101600" dist="25400" dir="8100000">
               <a:srgbClr val="000000">
-                <a:alpha val="22000"/>
+                <a:alpha val="18000"/>
               </a:srgbClr>
             </a:outerShdw>
           </a:effectLst>
@@ -2188,8 +2369,8 @@
         </p:nvSpPr>
         <p:spPr>
           <a:xfrm>
-            <a:off x="3200400" y="1691640"/>
-            <a:ext cx="45720" cy="2651760"/>
+            <a:off x="3200400" y="1325880"/>
+            <a:ext cx="45720" cy="2487168"/>
           </a:xfrm>
           <a:prstGeom prst="rect">
             <a:avLst/>
@@ -2213,7 +2394,7 @@
         </p:nvSpPr>
         <p:spPr>
           <a:xfrm>
-            <a:off x="3337560" y="1874520"/>
+            <a:off x="3328416" y="1417320"/>
             <a:ext cx="2450592" cy="566928"/>
           </a:xfrm>
           <a:prstGeom prst="rect">
@@ -2223,14 +2404,14 @@
           <a:ln/>
         </p:spPr>
         <p:txBody>
-          <a:bodyPr wrap="square" lIns="0" tIns="0" rIns="0" bIns="0" rtlCol="0" anchor="ctr"/>
-          <a:lstStyle/>
-          <a:p>
-            <a:pPr indent="0" marL="0">
-              <a:buNone/>
-            </a:pPr>
-            <a:r>
-              <a:rPr lang="en-US" sz="1250" b="1" dirty="0">
+          <a:bodyPr wrap="square" lIns="0" tIns="0" rIns="0" bIns="0" rtlCol="0" anchor="t"/>
+          <a:lstStyle/>
+          <a:p>
+            <a:pPr indent="0" marL="0">
+              <a:buNone/>
+            </a:pPr>
+            <a:r>
+              <a:rPr lang="en-US" sz="1100" b="1" dirty="0">
                 <a:solidFill>
                   <a:srgbClr val="F1F5F9"/>
                 </a:solidFill>
@@ -2238,9 +2419,9 @@
                 <a:ea typeface="Calibri" pitchFamily="34" charset="-122"/>
                 <a:cs typeface="Calibri" pitchFamily="34" charset="-120"/>
               </a:rPr>
-              <a:t>Chatbots that leak or hallucinate</a:t>
-            </a:r>
-            <a:endParaRPr lang="en-US" sz="1250" dirty="0"/>
+              <a:t>Uploading to ChatGPT doesn't solve the sharing problem</a:t>
+            </a:r>
+            <a:endParaRPr lang="en-US" sz="1100" dirty="0"/>
           </a:p>
         </p:txBody>
       </p:sp>
@@ -2252,8 +2433,8 @@
         </p:nvSpPr>
         <p:spPr>
           <a:xfrm>
-            <a:off x="3337560" y="2487168"/>
-            <a:ext cx="2450592" cy="1600200"/>
+            <a:off x="3328416" y="2029968"/>
+            <a:ext cx="2450592" cy="1664208"/>
           </a:xfrm>
           <a:prstGeom prst="rect">
             <a:avLst/>
@@ -2269,7 +2450,7 @@
               <a:buNone/>
             </a:pPr>
             <a:r>
-              <a:rPr lang="en-US" sz="1050" dirty="0">
+              <a:rPr lang="en-US" sz="950" dirty="0">
                 <a:solidFill>
                   <a:srgbClr val="94A3B8"/>
                 </a:solidFill>
@@ -2277,9 +2458,9 @@
                 <a:ea typeface="Calibri" pitchFamily="34" charset="-122"/>
                 <a:cs typeface="Calibri" pitchFamily="34" charset="-120"/>
               </a:rPr>
-              <a:t>Generic AI chatbots leak filenames, invented facts, and raw secrets. Users can't trust the answers or trace them to sources.</a:t>
-            </a:r>
-            <a:endParaRPr lang="en-US" sz="1050" dirty="0"/>
+              <a:t>That conversation is yours alone. It ends when you close the tab. There's no public URL, no persistent agent, no persona. It's a one-off, single-user interaction — not something you can share with 50 people simultaneously.</a:t>
+            </a:r>
+            <a:endParaRPr lang="en-US" sz="950" dirty="0"/>
           </a:p>
         </p:txBody>
       </p:sp>
@@ -2291,8 +2472,8 @@
         </p:nvSpPr>
         <p:spPr>
           <a:xfrm>
-            <a:off x="6053328" y="1691640"/>
-            <a:ext cx="2697480" cy="2651760"/>
+            <a:off x="6053328" y="1325880"/>
+            <a:ext cx="2697480" cy="2487168"/>
           </a:xfrm>
           <a:prstGeom prst="rect">
             <a:avLst/>
@@ -2307,9 +2488,9 @@
             <a:prstDash val="solid"/>
           </a:ln>
           <a:effectLst>
-            <a:outerShdw sx="100000" sy="100000" kx="0" ky="0" algn="bl" rotWithShape="0" blurRad="127000" dist="38100" dir="8100000">
+            <a:outerShdw sx="100000" sy="100000" kx="0" ky="0" algn="bl" rotWithShape="0" blurRad="101600" dist="25400" dir="8100000">
               <a:srgbClr val="000000">
-                <a:alpha val="22000"/>
+                <a:alpha val="18000"/>
               </a:srgbClr>
             </a:outerShdw>
           </a:effectLst>
@@ -2323,8 +2504,8 @@
         </p:nvSpPr>
         <p:spPr>
           <a:xfrm>
-            <a:off x="6053328" y="1691640"/>
-            <a:ext cx="45720" cy="2651760"/>
+            <a:off x="6053328" y="1325880"/>
+            <a:ext cx="45720" cy="2487168"/>
           </a:xfrm>
           <a:prstGeom prst="rect">
             <a:avLst/>
@@ -2348,7 +2529,7 @@
         </p:nvSpPr>
         <p:spPr>
           <a:xfrm>
-            <a:off x="6190488" y="1874520"/>
+            <a:off x="6181344" y="1417320"/>
             <a:ext cx="2450592" cy="566928"/>
           </a:xfrm>
           <a:prstGeom prst="rect">
@@ -2358,14 +2539,14 @@
           <a:ln/>
         </p:spPr>
         <p:txBody>
-          <a:bodyPr wrap="square" lIns="0" tIns="0" rIns="0" bIns="0" rtlCol="0" anchor="ctr"/>
-          <a:lstStyle/>
-          <a:p>
-            <a:pPr indent="0" marL="0">
-              <a:buNone/>
-            </a:pPr>
-            <a:r>
-              <a:rPr lang="en-US" sz="1250" b="1" dirty="0">
+          <a:bodyPr wrap="square" lIns="0" tIns="0" rIns="0" bIns="0" rtlCol="0" anchor="t"/>
+          <a:lstStyle/>
+          <a:p>
+            <a:pPr indent="0" marL="0">
+              <a:buNone/>
+            </a:pPr>
+            <a:r>
+              <a:rPr lang="en-US" sz="1100" b="1" dirty="0">
                 <a:solidFill>
                   <a:srgbClr val="F1F5F9"/>
                 </a:solidFill>
@@ -2373,9 +2554,9 @@
                 <a:ea typeface="Calibri" pitchFamily="34" charset="-122"/>
                 <a:cs typeface="Calibri" pitchFamily="34" charset="-120"/>
               </a:rPr>
-              <a:t>No safe sharing model</a:t>
-            </a:r>
-            <a:endParaRPr lang="en-US" sz="1250" dirty="0"/>
+              <a:t>No middle ground between "share everything" and "build it yourself"</a:t>
+            </a:r>
+            <a:endParaRPr lang="en-US" sz="1100" dirty="0"/>
           </a:p>
         </p:txBody>
       </p:sp>
@@ -2387,8 +2568,8 @@
         </p:nvSpPr>
         <p:spPr>
           <a:xfrm>
-            <a:off x="6190488" y="2487168"/>
-            <a:ext cx="2450592" cy="1600200"/>
+            <a:off x="6181344" y="2029968"/>
+            <a:ext cx="2450592" cy="1664208"/>
           </a:xfrm>
           <a:prstGeom prst="rect">
             <a:avLst/>
@@ -2404,7 +2585,7 @@
               <a:buNone/>
             </a:pPr>
             <a:r>
-              <a:rPr lang="en-US" sz="1050" dirty="0">
+              <a:rPr lang="en-US" sz="950" dirty="0">
                 <a:solidFill>
                   <a:srgbClr val="94A3B8"/>
                 </a:solidFill>
@@ -2412,9 +2593,9 @@
                 <a:ea typeface="Calibri" pitchFamily="34" charset="-122"/>
                 <a:cs typeface="Calibri" pitchFamily="34" charset="-120"/>
               </a:rPr>
-              <a:t>Owners want to share knowledge publicly without exposing raw code, credentials, or internal implementation details.</a:t>
-            </a:r>
-            <a:endParaRPr lang="en-US" sz="1050" dirty="0"/>
+              <a:t>Platform AI (Notion, Drive) is locked to one tool and can't be published as a standalone experience. Building your own RAG pipeline — embeddings, retrieval, API, frontend, auth, deployment — is 4–8 weeks of infrastructure work.</a:t>
+            </a:r>
+            <a:endParaRPr lang="en-US" sz="950" dirty="0"/>
           </a:p>
         </p:txBody>
       </p:sp>
@@ -2426,31 +2607,34 @@
         </p:nvSpPr>
         <p:spPr>
           <a:xfrm>
-            <a:off x="457200" y="4572000"/>
-            <a:ext cx="8229600" cy="347472"/>
-          </a:xfrm>
-          <a:prstGeom prst="rect">
-            <a:avLst/>
-          </a:prstGeom>
-          <a:noFill/>
-          <a:ln/>
-        </p:spPr>
-        <p:txBody>
-          <a:bodyPr wrap="square" lIns="0" tIns="0" rIns="0" bIns="0" rtlCol="0" anchor="ctr"/>
-          <a:lstStyle/>
-          <a:p>
-            <a:pPr indent="0" marL="0">
-              <a:buNone/>
-            </a:pPr>
-            <a:r>
-              <a:rPr lang="en-US" sz="1200" b="1" i="1" dirty="0">
+            <a:off x="457200" y="3913632"/>
+            <a:ext cx="8229600" cy="777240"/>
+          </a:xfrm>
+          <a:prstGeom prst="rect">
+            <a:avLst/>
+          </a:prstGeom>
+          <a:noFill/>
+          <a:ln/>
+        </p:spPr>
+        <p:txBody>
+          <a:bodyPr wrap="square" lIns="0" tIns="0" rIns="0" bIns="0" rtlCol="0" anchor="ctr"/>
+          <a:lstStyle/>
+          <a:p>
+            <a:pPr algn="l" indent="0" marL="0">
+              <a:buNone/>
+            </a:pPr>
+            <a:r>
+              <a:rPr lang="en-US" sz="1150" b="1" i="1" dirty="0">
                 <a:solidFill>
                   <a:srgbClr val="6366F1"/>
                 </a:solidFill>
-              </a:rPr>
-              <a:t>The gap: a grounded, on-policy, traceable conversational layer — over your own knowledge.</a:t>
-            </a:r>
-            <a:endParaRPr lang="en-US" sz="1200" dirty="0"/>
+                <a:latin typeface="Calibri" pitchFamily="34" charset="0"/>
+                <a:ea typeface="Calibri" pitchFamily="34" charset="-122"/>
+                <a:cs typeface="Calibri" pitchFamily="34" charset="-120"/>
+              </a:rPr>
+              <a:t>docbase closes that gap: attach your documents, get a public URL, let people ask questions. The knowledge is yours. The answers are grounded. The experience is theirs — without you writing a line of infrastructure.</a:t>
+            </a:r>
+            <a:endParaRPr lang="en-US" sz="1150" dirty="0"/>
           </a:p>
         </p:txBody>
       </p:sp>
@@ -2520,7 +2704,7 @@
         <p:spPr>
           <a:xfrm>
             <a:off x="457200" y="182880"/>
-            <a:ext cx="8229600" cy="256032"/>
+            <a:ext cx="8229600" cy="237744"/>
           </a:xfrm>
           <a:prstGeom prst="rect">
             <a:avLst/>
@@ -2541,7 +2725,7 @@
                   <a:srgbClr val="14B8A6"/>
                 </a:solidFill>
               </a:rPr>
-              <a:t>THE SOLUTION</a:t>
+              <a:t>THE PRODUCT</a:t>
             </a:r>
             <a:endParaRPr lang="en-US" sz="900" dirty="0"/>
           </a:p>
@@ -2555,8 +2739,8 @@
         </p:nvSpPr>
         <p:spPr>
           <a:xfrm>
-            <a:off x="457200" y="475488"/>
-            <a:ext cx="8229600" cy="1097280"/>
+            <a:off x="457200" y="457200"/>
+            <a:ext cx="8229600" cy="658368"/>
           </a:xfrm>
           <a:prstGeom prst="rect">
             <a:avLst/>
@@ -2572,7 +2756,7 @@
               <a:buNone/>
             </a:pPr>
             <a:r>
-              <a:rPr lang="en-US" sz="2800" b="1" dirty="0">
+              <a:rPr lang="en-US" sz="2200" b="1" dirty="0">
                 <a:solidFill>
                   <a:srgbClr val="F1F5F9"/>
                 </a:solidFill>
@@ -2580,60 +2764,46 @@
                 <a:ea typeface="Calibri" pitchFamily="34" charset="-122"/>
                 <a:cs typeface="Calibri" pitchFamily="34" charset="-120"/>
               </a:rPr>
-              <a:t>docbase — grounded AI twins</a:t>
-            </a:r>
-            <a:endParaRPr lang="en-US" sz="2800" dirty="0"/>
-          </a:p>
+              <a:t>docbase — an AI agent that knows exactly what you've chosen to share</a:t>
+            </a:r>
+            <a:endParaRPr lang="en-US" sz="2200" dirty="0"/>
+          </a:p>
+        </p:txBody>
+      </p:sp>
+      <p:sp>
+        <p:nvSpPr>
+          <p:cNvPr id="5" name="Text 3"/>
+          <p:cNvSpPr/>
+          <p:nvPr/>
+        </p:nvSpPr>
+        <p:spPr>
+          <a:xfrm>
+            <a:off x="457200" y="1152144"/>
+            <a:ext cx="8229600" cy="502920"/>
+          </a:xfrm>
+          <a:prstGeom prst="rect">
+            <a:avLst/>
+          </a:prstGeom>
+          <a:noFill/>
+          <a:ln/>
+        </p:spPr>
+        <p:txBody>
+          <a:bodyPr wrap="square" lIns="0" tIns="0" rIns="0" bIns="0" rtlCol="0" anchor="ctr"/>
+          <a:lstStyle/>
           <a:p>
             <a:pPr algn="l" indent="0" marL="0">
               <a:buNone/>
             </a:pPr>
             <a:r>
-              <a:rPr lang="en-US" sz="2800" b="1" dirty="0">
-                <a:solidFill>
-                  <a:srgbClr val="F1F5F9"/>
-                </a:solidFill>
-                <a:latin typeface="Calibri" pitchFamily="34" charset="0"/>
-                <a:ea typeface="Calibri" pitchFamily="34" charset="-122"/>
-                <a:cs typeface="Calibri" pitchFamily="34" charset="-120"/>
-              </a:rPr>
-              <a:t>over approved knowledge.</a:t>
-            </a:r>
-            <a:endParaRPr lang="en-US" sz="2800" dirty="0"/>
-          </a:p>
-        </p:txBody>
-      </p:sp>
-      <p:sp>
-        <p:nvSpPr>
-          <p:cNvPr id="5" name="Text 3"/>
-          <p:cNvSpPr/>
-          <p:nvPr/>
-        </p:nvSpPr>
-        <p:spPr>
-          <a:xfrm>
-            <a:off x="457200" y="1691640"/>
-            <a:ext cx="4023360" cy="292608"/>
-          </a:xfrm>
-          <a:prstGeom prst="rect">
-            <a:avLst/>
-          </a:prstGeom>
-          <a:noFill/>
-          <a:ln/>
-        </p:spPr>
-        <p:txBody>
-          <a:bodyPr wrap="square" lIns="0" tIns="0" rIns="0" bIns="0" rtlCol="0" anchor="ctr"/>
-          <a:lstStyle/>
-          <a:p>
-            <a:pPr indent="0" marL="0">
-              <a:buNone/>
-            </a:pPr>
-            <a:r>
-              <a:rPr lang="en-US" sz="1100" b="1" dirty="0">
-                <a:solidFill>
-                  <a:srgbClr val="14B8A6"/>
-                </a:solidFill>
-              </a:rPr>
-              <a:t>Core domain model</a:t>
+              <a:rPr lang="en-US" sz="1100" dirty="0">
+                <a:solidFill>
+                  <a:srgbClr val="94A3B8"/>
+                </a:solidFill>
+                <a:latin typeface="Calibri" pitchFamily="34" charset="0"/>
+                <a:ea typeface="Calibri" pitchFamily="34" charset="-122"/>
+                <a:cs typeface="Calibri" pitchFamily="34" charset="-120"/>
+              </a:rPr>
+              <a:t>You attach your documents. A twin answers questions about them. Visitors get a conversational interface over your knowledge from a public URL — with answers tied only to what you indexed.</a:t>
             </a:r>
             <a:endParaRPr lang="en-US" sz="1100" dirty="0"/>
           </a:p>
@@ -2647,8 +2817,8 @@
         </p:nvSpPr>
         <p:spPr>
           <a:xfrm>
-            <a:off x="457200" y="2029968"/>
-            <a:ext cx="3977640" cy="457200"/>
+            <a:off x="347472" y="1755648"/>
+            <a:ext cx="4041648" cy="749808"/>
           </a:xfrm>
           <a:prstGeom prst="rect">
             <a:avLst/>
@@ -2666,14 +2836,39 @@
       </p:sp>
       <p:sp>
         <p:nvSpPr>
-          <p:cNvPr id="7" name="Text 5"/>
-          <p:cNvSpPr/>
-          <p:nvPr/>
-        </p:nvSpPr>
-        <p:spPr>
-          <a:xfrm>
-            <a:off x="548640" y="2066544"/>
-            <a:ext cx="1828800" cy="201168"/>
+          <p:cNvPr id="7" name="Shape 5"/>
+          <p:cNvSpPr/>
+          <p:nvPr/>
+        </p:nvSpPr>
+        <p:spPr>
+          <a:xfrm>
+            <a:off x="347472" y="1755648"/>
+            <a:ext cx="45720" cy="749808"/>
+          </a:xfrm>
+          <a:prstGeom prst="rect">
+            <a:avLst/>
+          </a:prstGeom>
+          <a:solidFill>
+            <a:srgbClr val="14B8A6"/>
+          </a:solidFill>
+          <a:ln w="12700">
+            <a:solidFill>
+              <a:srgbClr val="14B8A6"/>
+            </a:solidFill>
+            <a:prstDash val="solid"/>
+          </a:ln>
+        </p:spPr>
+      </p:sp>
+      <p:sp>
+        <p:nvSpPr>
+          <p:cNvPr id="8" name="Text 6"/>
+          <p:cNvSpPr/>
+          <p:nvPr/>
+        </p:nvSpPr>
+        <p:spPr>
+          <a:xfrm>
+            <a:off x="475488" y="1819656"/>
+            <a:ext cx="1097280" cy="219456"/>
           </a:xfrm>
           <a:prstGeom prst="rect">
             <a:avLst/>
@@ -2691,13 +2886,13 @@
             <a:r>
               <a:rPr lang="en-US" sz="1100" b="1" dirty="0">
                 <a:solidFill>
-                  <a:srgbClr val="F1F5F9"/>
-                </a:solidFill>
-                <a:latin typeface="Calibri" pitchFamily="34" charset="0"/>
-                <a:ea typeface="Calibri" pitchFamily="34" charset="-122"/>
-                <a:cs typeface="Calibri" pitchFamily="34" charset="-120"/>
-              </a:rPr>
-              <a:t>User</a:t>
+                  <a:srgbClr val="14B8A6"/>
+                </a:solidFill>
+                <a:latin typeface="Calibri" pitchFamily="34" charset="0"/>
+                <a:ea typeface="Calibri" pitchFamily="34" charset="-122"/>
+                <a:cs typeface="Calibri" pitchFamily="34" charset="-120"/>
+              </a:rPr>
+              <a:t>Twin</a:t>
             </a:r>
             <a:endParaRPr lang="en-US" sz="1100" dirty="0"/>
           </a:p>
@@ -2705,30 +2900,30 @@
       </p:sp>
       <p:sp>
         <p:nvSpPr>
-          <p:cNvPr id="8" name="Text 6"/>
-          <p:cNvSpPr/>
-          <p:nvPr/>
-        </p:nvSpPr>
-        <p:spPr>
-          <a:xfrm>
-            <a:off x="548640" y="2267712"/>
-            <a:ext cx="3474720" cy="164592"/>
-          </a:xfrm>
-          <a:prstGeom prst="rect">
-            <a:avLst/>
-          </a:prstGeom>
-          <a:noFill/>
-          <a:ln/>
-        </p:spPr>
-        <p:txBody>
-          <a:bodyPr wrap="square" lIns="0" tIns="0" rIns="0" bIns="0" rtlCol="0" anchor="ctr"/>
-          <a:lstStyle/>
-          <a:p>
-            <a:pPr indent="0" marL="0">
-              <a:buNone/>
-            </a:pPr>
-            <a:r>
-              <a:rPr lang="en-US" sz="900" dirty="0">
+          <p:cNvPr id="9" name="Text 7"/>
+          <p:cNvSpPr/>
+          <p:nvPr/>
+        </p:nvSpPr>
+        <p:spPr>
+          <a:xfrm>
+            <a:off x="475488" y="2066544"/>
+            <a:ext cx="3822192" cy="384048"/>
+          </a:xfrm>
+          <a:prstGeom prst="rect">
+            <a:avLst/>
+          </a:prstGeom>
+          <a:noFill/>
+          <a:ln/>
+        </p:spPr>
+        <p:txBody>
+          <a:bodyPr wrap="square" lIns="0" tIns="0" rIns="0" bIns="0" rtlCol="0" anchor="ctr"/>
+          <a:lstStyle/>
+          <a:p>
+            <a:pPr indent="0" marL="0">
+              <a:buNone/>
+            </a:pPr>
+            <a:r>
+              <a:rPr lang="en-US" sz="950" dirty="0">
                 <a:solidFill>
                   <a:srgbClr val="94A3B8"/>
                 </a:solidFill>
@@ -2736,22 +2931,22 @@
                 <a:ea typeface="Calibri" pitchFamily="34" charset="-122"/>
                 <a:cs typeface="Calibri" pitchFamily="34" charset="-120"/>
               </a:rPr>
-              <a:t>Authenticated owner</a:t>
-            </a:r>
-            <a:endParaRPr lang="en-US" sz="900" dirty="0"/>
-          </a:p>
-        </p:txBody>
-      </p:sp>
-      <p:sp>
-        <p:nvSpPr>
-          <p:cNvPr id="9" name="Shape 7"/>
-          <p:cNvSpPr/>
-          <p:nvPr/>
-        </p:nvSpPr>
-        <p:spPr>
-          <a:xfrm>
-            <a:off x="658368" y="2578608"/>
-            <a:ext cx="3776472" cy="457200"/>
+              <a:t>An AI agent with a name, a persona, and a defined knowledge boundary. Answers only from what you indexed.</a:t>
+            </a:r>
+            <a:endParaRPr lang="en-US" sz="950" dirty="0"/>
+          </a:p>
+        </p:txBody>
+      </p:sp>
+      <p:sp>
+        <p:nvSpPr>
+          <p:cNvPr id="10" name="Shape 8"/>
+          <p:cNvSpPr/>
+          <p:nvPr/>
+        </p:nvSpPr>
+        <p:spPr>
+          <a:xfrm>
+            <a:off x="4572000" y="1755648"/>
+            <a:ext cx="4041648" cy="749808"/>
           </a:xfrm>
           <a:prstGeom prst="rect">
             <a:avLst/>
@@ -2769,14 +2964,39 @@
       </p:sp>
       <p:sp>
         <p:nvSpPr>
-          <p:cNvPr id="10" name="Text 8"/>
-          <p:cNvSpPr/>
-          <p:nvPr/>
-        </p:nvSpPr>
-        <p:spPr>
-          <a:xfrm>
-            <a:off x="749808" y="2615184"/>
-            <a:ext cx="1828800" cy="201168"/>
+          <p:cNvPr id="11" name="Shape 9"/>
+          <p:cNvSpPr/>
+          <p:nvPr/>
+        </p:nvSpPr>
+        <p:spPr>
+          <a:xfrm>
+            <a:off x="4572000" y="1755648"/>
+            <a:ext cx="45720" cy="749808"/>
+          </a:xfrm>
+          <a:prstGeom prst="rect">
+            <a:avLst/>
+          </a:prstGeom>
+          <a:solidFill>
+            <a:srgbClr val="14B8A6"/>
+          </a:solidFill>
+          <a:ln w="12700">
+            <a:solidFill>
+              <a:srgbClr val="14B8A6"/>
+            </a:solidFill>
+            <a:prstDash val="solid"/>
+          </a:ln>
+        </p:spPr>
+      </p:sp>
+      <p:sp>
+        <p:nvSpPr>
+          <p:cNvPr id="12" name="Text 10"/>
+          <p:cNvSpPr/>
+          <p:nvPr/>
+        </p:nvSpPr>
+        <p:spPr>
+          <a:xfrm>
+            <a:off x="4700016" y="1819656"/>
+            <a:ext cx="1097280" cy="219456"/>
           </a:xfrm>
           <a:prstGeom prst="rect">
             <a:avLst/>
@@ -2794,13 +3014,13 @@
             <a:r>
               <a:rPr lang="en-US" sz="1100" b="1" dirty="0">
                 <a:solidFill>
-                  <a:srgbClr val="F1F5F9"/>
-                </a:solidFill>
-                <a:latin typeface="Calibri" pitchFamily="34" charset="0"/>
-                <a:ea typeface="Calibri" pitchFamily="34" charset="-122"/>
-                <a:cs typeface="Calibri" pitchFamily="34" charset="-120"/>
-              </a:rPr>
-              <a:t>Workspace</a:t>
+                  <a:srgbClr val="14B8A6"/>
+                </a:solidFill>
+                <a:latin typeface="Calibri" pitchFamily="34" charset="0"/>
+                <a:ea typeface="Calibri" pitchFamily="34" charset="-122"/>
+                <a:cs typeface="Calibri" pitchFamily="34" charset="-120"/>
+              </a:rPr>
+              <a:t>Source</a:t>
             </a:r>
             <a:endParaRPr lang="en-US" sz="1100" dirty="0"/>
           </a:p>
@@ -2808,30 +3028,30 @@
       </p:sp>
       <p:sp>
         <p:nvSpPr>
-          <p:cNvPr id="11" name="Text 9"/>
-          <p:cNvSpPr/>
-          <p:nvPr/>
-        </p:nvSpPr>
-        <p:spPr>
-          <a:xfrm>
-            <a:off x="749808" y="2816352"/>
-            <a:ext cx="3474720" cy="164592"/>
-          </a:xfrm>
-          <a:prstGeom prst="rect">
-            <a:avLst/>
-          </a:prstGeom>
-          <a:noFill/>
-          <a:ln/>
-        </p:spPr>
-        <p:txBody>
-          <a:bodyPr wrap="square" lIns="0" tIns="0" rIns="0" bIns="0" rtlCol="0" anchor="ctr"/>
-          <a:lstStyle/>
-          <a:p>
-            <a:pPr indent="0" marL="0">
-              <a:buNone/>
-            </a:pPr>
-            <a:r>
-              <a:rPr lang="en-US" sz="900" dirty="0">
+          <p:cNvPr id="13" name="Text 11"/>
+          <p:cNvSpPr/>
+          <p:nvPr/>
+        </p:nvSpPr>
+        <p:spPr>
+          <a:xfrm>
+            <a:off x="4700016" y="2066544"/>
+            <a:ext cx="3822192" cy="384048"/>
+          </a:xfrm>
+          <a:prstGeom prst="rect">
+            <a:avLst/>
+          </a:prstGeom>
+          <a:noFill/>
+          <a:ln/>
+        </p:spPr>
+        <p:txBody>
+          <a:bodyPr wrap="square" lIns="0" tIns="0" rIns="0" bIns="0" rtlCol="0" anchor="ctr"/>
+          <a:lstStyle/>
+          <a:p>
+            <a:pPr indent="0" marL="0">
+              <a:buNone/>
+            </a:pPr>
+            <a:r>
+              <a:rPr lang="en-US" sz="950" dirty="0">
                 <a:solidFill>
                   <a:srgbClr val="94A3B8"/>
                 </a:solidFill>
@@ -2839,22 +3059,22 @@
                 <a:ea typeface="Calibri" pitchFamily="34" charset="-122"/>
                 <a:cs typeface="Calibri" pitchFamily="34" charset="-120"/>
               </a:rPr>
-              <a:t>Groups twins; share surfaces</a:t>
-            </a:r>
-            <a:endParaRPr lang="en-US" sz="900" dirty="0"/>
-          </a:p>
-        </p:txBody>
-      </p:sp>
-      <p:sp>
-        <p:nvSpPr>
-          <p:cNvPr id="12" name="Shape 10"/>
-          <p:cNvSpPr/>
-          <p:nvPr/>
-        </p:nvSpPr>
-        <p:spPr>
-          <a:xfrm>
-            <a:off x="859536" y="3127248"/>
-            <a:ext cx="3575304" cy="457200"/>
+              <a:t>What you attach: Google Drive files, PDFs, markdown docs, website URLs, manual notes.</a:t>
+            </a:r>
+            <a:endParaRPr lang="en-US" sz="950" dirty="0"/>
+          </a:p>
+        </p:txBody>
+      </p:sp>
+      <p:sp>
+        <p:nvSpPr>
+          <p:cNvPr id="14" name="Shape 12"/>
+          <p:cNvSpPr/>
+          <p:nvPr/>
+        </p:nvSpPr>
+        <p:spPr>
+          <a:xfrm>
+            <a:off x="347472" y="2596896"/>
+            <a:ext cx="4041648" cy="749808"/>
           </a:xfrm>
           <a:prstGeom prst="rect">
             <a:avLst/>
@@ -2872,14 +3092,39 @@
       </p:sp>
       <p:sp>
         <p:nvSpPr>
-          <p:cNvPr id="13" name="Text 11"/>
-          <p:cNvSpPr/>
-          <p:nvPr/>
-        </p:nvSpPr>
-        <p:spPr>
-          <a:xfrm>
-            <a:off x="950976" y="3163824"/>
-            <a:ext cx="1828800" cy="201168"/>
+          <p:cNvPr id="15" name="Shape 13"/>
+          <p:cNvSpPr/>
+          <p:nvPr/>
+        </p:nvSpPr>
+        <p:spPr>
+          <a:xfrm>
+            <a:off x="347472" y="2596896"/>
+            <a:ext cx="45720" cy="749808"/>
+          </a:xfrm>
+          <a:prstGeom prst="rect">
+            <a:avLst/>
+          </a:prstGeom>
+          <a:solidFill>
+            <a:srgbClr val="14B8A6"/>
+          </a:solidFill>
+          <a:ln w="12700">
+            <a:solidFill>
+              <a:srgbClr val="14B8A6"/>
+            </a:solidFill>
+            <a:prstDash val="solid"/>
+          </a:ln>
+        </p:spPr>
+      </p:sp>
+      <p:sp>
+        <p:nvSpPr>
+          <p:cNvPr id="16" name="Text 14"/>
+          <p:cNvSpPr/>
+          <p:nvPr/>
+        </p:nvSpPr>
+        <p:spPr>
+          <a:xfrm>
+            <a:off x="475488" y="2660904"/>
+            <a:ext cx="1097280" cy="219456"/>
           </a:xfrm>
           <a:prstGeom prst="rect">
             <a:avLst/>
@@ -2897,13 +3142,13 @@
             <a:r>
               <a:rPr lang="en-US" sz="1100" b="1" dirty="0">
                 <a:solidFill>
-                  <a:srgbClr val="F1F5F9"/>
-                </a:solidFill>
-                <a:latin typeface="Calibri" pitchFamily="34" charset="0"/>
-                <a:ea typeface="Calibri" pitchFamily="34" charset="-122"/>
-                <a:cs typeface="Calibri" pitchFamily="34" charset="-120"/>
-              </a:rPr>
-              <a:t>Twin</a:t>
+                  <a:srgbClr val="14B8A6"/>
+                </a:solidFill>
+                <a:latin typeface="Calibri" pitchFamily="34" charset="0"/>
+                <a:ea typeface="Calibri" pitchFamily="34" charset="-122"/>
+                <a:cs typeface="Calibri" pitchFamily="34" charset="-120"/>
+              </a:rPr>
+              <a:t>Workspace</a:t>
             </a:r>
             <a:endParaRPr lang="en-US" sz="1100" dirty="0"/>
           </a:p>
@@ -2911,30 +3156,30 @@
       </p:sp>
       <p:sp>
         <p:nvSpPr>
-          <p:cNvPr id="14" name="Text 12"/>
-          <p:cNvSpPr/>
-          <p:nvPr/>
-        </p:nvSpPr>
-        <p:spPr>
-          <a:xfrm>
-            <a:off x="950976" y="3364992"/>
-            <a:ext cx="3474720" cy="164592"/>
-          </a:xfrm>
-          <a:prstGeom prst="rect">
-            <a:avLst/>
-          </a:prstGeom>
-          <a:noFill/>
-          <a:ln/>
-        </p:spPr>
-        <p:txBody>
-          <a:bodyPr wrap="square" lIns="0" tIns="0" rIns="0" bIns="0" rtlCol="0" anchor="ctr"/>
-          <a:lstStyle/>
-          <a:p>
-            <a:pPr indent="0" marL="0">
-              <a:buNone/>
-            </a:pPr>
-            <a:r>
-              <a:rPr lang="en-US" sz="900" dirty="0">
+          <p:cNvPr id="17" name="Text 15"/>
+          <p:cNvSpPr/>
+          <p:nvPr/>
+        </p:nvSpPr>
+        <p:spPr>
+          <a:xfrm>
+            <a:off x="475488" y="2907792"/>
+            <a:ext cx="3822192" cy="384048"/>
+          </a:xfrm>
+          <a:prstGeom prst="rect">
+            <a:avLst/>
+          </a:prstGeom>
+          <a:noFill/>
+          <a:ln/>
+        </p:spPr>
+        <p:txBody>
+          <a:bodyPr wrap="square" lIns="0" tIns="0" rIns="0" bIns="0" rtlCol="0" anchor="ctr"/>
+          <a:lstStyle/>
+          <a:p>
+            <a:pPr indent="0" marL="0">
+              <a:buNone/>
+            </a:pPr>
+            <a:r>
+              <a:rPr lang="en-US" sz="950" dirty="0">
                 <a:solidFill>
                   <a:srgbClr val="94A3B8"/>
                 </a:solidFill>
@@ -2942,22 +3187,22 @@
                 <a:ea typeface="Calibri" pitchFamily="34" charset="-122"/>
                 <a:cs typeface="Calibri" pitchFamily="34" charset="-120"/>
               </a:rPr>
-              <a:t>Named agent with persona + policy</a:t>
-            </a:r>
-            <a:endParaRPr lang="en-US" sz="900" dirty="0"/>
-          </a:p>
-        </p:txBody>
-      </p:sp>
-      <p:sp>
-        <p:nvSpPr>
-          <p:cNvPr id="15" name="Shape 13"/>
-          <p:cNvSpPr/>
-          <p:nvPr/>
-        </p:nvSpPr>
-        <p:spPr>
-          <a:xfrm>
-            <a:off x="1060704" y="3675888"/>
-            <a:ext cx="3374136" cy="457200"/>
+              <a:t>Groups multiple twins. Routes questions to the right twin — or aggregates across all of them.</a:t>
+            </a:r>
+            <a:endParaRPr lang="en-US" sz="950" dirty="0"/>
+          </a:p>
+        </p:txBody>
+      </p:sp>
+      <p:sp>
+        <p:nvSpPr>
+          <p:cNvPr id="18" name="Shape 16"/>
+          <p:cNvSpPr/>
+          <p:nvPr/>
+        </p:nvSpPr>
+        <p:spPr>
+          <a:xfrm>
+            <a:off x="4572000" y="2596896"/>
+            <a:ext cx="4041648" cy="749808"/>
           </a:xfrm>
           <a:prstGeom prst="rect">
             <a:avLst/>
@@ -2975,14 +3220,39 @@
       </p:sp>
       <p:sp>
         <p:nvSpPr>
-          <p:cNvPr id="16" name="Text 14"/>
-          <p:cNvSpPr/>
-          <p:nvPr/>
-        </p:nvSpPr>
-        <p:spPr>
-          <a:xfrm>
-            <a:off x="1152144" y="3712464"/>
-            <a:ext cx="1828800" cy="201168"/>
+          <p:cNvPr id="19" name="Shape 17"/>
+          <p:cNvSpPr/>
+          <p:nvPr/>
+        </p:nvSpPr>
+        <p:spPr>
+          <a:xfrm>
+            <a:off x="4572000" y="2596896"/>
+            <a:ext cx="45720" cy="749808"/>
+          </a:xfrm>
+          <a:prstGeom prst="rect">
+            <a:avLst/>
+          </a:prstGeom>
+          <a:solidFill>
+            <a:srgbClr val="14B8A6"/>
+          </a:solidFill>
+          <a:ln w="12700">
+            <a:solidFill>
+              <a:srgbClr val="14B8A6"/>
+            </a:solidFill>
+            <a:prstDash val="solid"/>
+          </a:ln>
+        </p:spPr>
+      </p:sp>
+      <p:sp>
+        <p:nvSpPr>
+          <p:cNvPr id="20" name="Text 18"/>
+          <p:cNvSpPr/>
+          <p:nvPr/>
+        </p:nvSpPr>
+        <p:spPr>
+          <a:xfrm>
+            <a:off x="4700016" y="2660904"/>
+            <a:ext cx="1097280" cy="219456"/>
           </a:xfrm>
           <a:prstGeom prst="rect">
             <a:avLst/>
@@ -3000,13 +3270,13 @@
             <a:r>
               <a:rPr lang="en-US" sz="1100" b="1" dirty="0">
                 <a:solidFill>
-                  <a:srgbClr val="F1F5F9"/>
-                </a:solidFill>
-                <a:latin typeface="Calibri" pitchFamily="34" charset="0"/>
-                <a:ea typeface="Calibri" pitchFamily="34" charset="-122"/>
-                <a:cs typeface="Calibri" pitchFamily="34" charset="-120"/>
-              </a:rPr>
-              <a:t>Source</a:t>
+                  <a:srgbClr val="14B8A6"/>
+                </a:solidFill>
+                <a:latin typeface="Calibri" pitchFamily="34" charset="0"/>
+                <a:ea typeface="Calibri" pitchFamily="34" charset="-122"/>
+                <a:cs typeface="Calibri" pitchFamily="34" charset="-120"/>
+              </a:rPr>
+              <a:t>Chunks</a:t>
             </a:r>
             <a:endParaRPr lang="en-US" sz="1100" dirty="0"/>
           </a:p>
@@ -3014,30 +3284,30 @@
       </p:sp>
       <p:sp>
         <p:nvSpPr>
-          <p:cNvPr id="17" name="Text 15"/>
-          <p:cNvSpPr/>
-          <p:nvPr/>
-        </p:nvSpPr>
-        <p:spPr>
-          <a:xfrm>
-            <a:off x="1152144" y="3913632"/>
-            <a:ext cx="3474720" cy="164592"/>
-          </a:xfrm>
-          <a:prstGeom prst="rect">
-            <a:avLst/>
-          </a:prstGeom>
-          <a:noFill/>
-          <a:ln/>
-        </p:spPr>
-        <p:txBody>
-          <a:bodyPr wrap="square" lIns="0" tIns="0" rIns="0" bIns="0" rtlCol="0" anchor="ctr"/>
-          <a:lstStyle/>
-          <a:p>
-            <a:pPr indent="0" marL="0">
-              <a:buNone/>
-            </a:pPr>
-            <a:r>
-              <a:rPr lang="en-US" sz="900" dirty="0">
+          <p:cNvPr id="21" name="Text 19"/>
+          <p:cNvSpPr/>
+          <p:nvPr/>
+        </p:nvSpPr>
+        <p:spPr>
+          <a:xfrm>
+            <a:off x="4700016" y="2907792"/>
+            <a:ext cx="3822192" cy="384048"/>
+          </a:xfrm>
+          <a:prstGeom prst="rect">
+            <a:avLst/>
+          </a:prstGeom>
+          <a:noFill/>
+          <a:ln/>
+        </p:spPr>
+        <p:txBody>
+          <a:bodyPr wrap="square" lIns="0" tIns="0" rIns="0" bIns="0" rtlCol="0" anchor="ctr"/>
+          <a:lstStyle/>
+          <a:p>
+            <a:pPr indent="0" marL="0">
+              <a:buNone/>
+            </a:pPr>
+            <a:r>
+              <a:rPr lang="en-US" sz="950" dirty="0">
                 <a:solidFill>
                   <a:srgbClr val="94A3B8"/>
                 </a:solidFill>
@@ -3045,28 +3315,28 @@
                 <a:ea typeface="Calibri" pitchFamily="34" charset="-122"/>
                 <a:cs typeface="Calibri" pitchFamily="34" charset="-120"/>
               </a:rPr>
-              <a:t>Drive, PDF, URL, Markdown, notes</a:t>
-            </a:r>
-            <a:endParaRPr lang="en-US" sz="900" dirty="0"/>
-          </a:p>
-        </p:txBody>
-      </p:sp>
-      <p:sp>
-        <p:nvSpPr>
-          <p:cNvPr id="18" name="Shape 16"/>
-          <p:cNvSpPr/>
-          <p:nvPr/>
-        </p:nvSpPr>
-        <p:spPr>
-          <a:xfrm>
-            <a:off x="1060704" y="4224528"/>
-            <a:ext cx="3374136" cy="457200"/>
-          </a:xfrm>
-          <a:prstGeom prst="rect">
-            <a:avLst/>
-          </a:prstGeom>
-          <a:solidFill>
-            <a:srgbClr val="1E1E2E"/>
+              <a:t>How sources are processed: split, vector-embedded, stored for retrieval. Visitors never see chunks — they see answers.</a:t>
+            </a:r>
+            <a:endParaRPr lang="en-US" sz="950" dirty="0"/>
+          </a:p>
+        </p:txBody>
+      </p:sp>
+      <p:sp>
+        <p:nvSpPr>
+          <p:cNvPr id="22" name="Shape 20"/>
+          <p:cNvSpPr/>
+          <p:nvPr/>
+        </p:nvSpPr>
+        <p:spPr>
+          <a:xfrm>
+            <a:off x="347472" y="3511296"/>
+            <a:ext cx="4041648" cy="457200"/>
+          </a:xfrm>
+          <a:prstGeom prst="rect">
+            <a:avLst/>
+          </a:prstGeom>
+          <a:solidFill>
+            <a:srgbClr val="13131A"/>
           </a:solidFill>
           <a:ln w="12700">
             <a:solidFill>
@@ -3078,69 +3348,69 @@
       </p:sp>
       <p:sp>
         <p:nvSpPr>
-          <p:cNvPr id="19" name="Text 17"/>
-          <p:cNvSpPr/>
-          <p:nvPr/>
-        </p:nvSpPr>
-        <p:spPr>
-          <a:xfrm>
-            <a:off x="1152144" y="4261104"/>
-            <a:ext cx="1828800" cy="201168"/>
-          </a:xfrm>
-          <a:prstGeom prst="rect">
-            <a:avLst/>
-          </a:prstGeom>
-          <a:noFill/>
-          <a:ln/>
-        </p:spPr>
-        <p:txBody>
-          <a:bodyPr wrap="square" lIns="0" tIns="0" rIns="0" bIns="0" rtlCol="0" anchor="ctr"/>
-          <a:lstStyle/>
-          <a:p>
-            <a:pPr indent="0" marL="0">
-              <a:buNone/>
-            </a:pPr>
-            <a:r>
-              <a:rPr lang="en-US" sz="1100" b="1" dirty="0">
-                <a:solidFill>
-                  <a:srgbClr val="F1F5F9"/>
-                </a:solidFill>
-                <a:latin typeface="Calibri" pitchFamily="34" charset="0"/>
-                <a:ea typeface="Calibri" pitchFamily="34" charset="-122"/>
-                <a:cs typeface="Calibri" pitchFamily="34" charset="-120"/>
-              </a:rPr>
-              <a:t>Chunks (pgvector)</a:t>
-            </a:r>
-            <a:endParaRPr lang="en-US" sz="1100" dirty="0"/>
-          </a:p>
-        </p:txBody>
-      </p:sp>
-      <p:sp>
-        <p:nvSpPr>
-          <p:cNvPr id="20" name="Text 18"/>
-          <p:cNvSpPr/>
-          <p:nvPr/>
-        </p:nvSpPr>
-        <p:spPr>
-          <a:xfrm>
-            <a:off x="1152144" y="4462272"/>
-            <a:ext cx="3474720" cy="164592"/>
-          </a:xfrm>
-          <a:prstGeom prst="rect">
-            <a:avLst/>
-          </a:prstGeom>
-          <a:noFill/>
-          <a:ln/>
-        </p:spPr>
-        <p:txBody>
-          <a:bodyPr wrap="square" lIns="0" tIns="0" rIns="0" bIns="0" rtlCol="0" anchor="ctr"/>
-          <a:lstStyle/>
-          <a:p>
-            <a:pPr indent="0" marL="0">
-              <a:buNone/>
-            </a:pPr>
-            <a:r>
-              <a:rPr lang="en-US" sz="900" dirty="0">
+          <p:cNvPr id="23" name="Text 21"/>
+          <p:cNvSpPr/>
+          <p:nvPr/>
+        </p:nvSpPr>
+        <p:spPr>
+          <a:xfrm>
+            <a:off x="457200" y="3566160"/>
+            <a:ext cx="1097280" cy="182880"/>
+          </a:xfrm>
+          <a:prstGeom prst="rect">
+            <a:avLst/>
+          </a:prstGeom>
+          <a:noFill/>
+          <a:ln/>
+        </p:spPr>
+        <p:txBody>
+          <a:bodyPr wrap="square" lIns="0" tIns="0" rIns="0" bIns="0" rtlCol="0" anchor="ctr"/>
+          <a:lstStyle/>
+          <a:p>
+            <a:pPr indent="0" marL="0">
+              <a:buNone/>
+            </a:pPr>
+            <a:r>
+              <a:rPr lang="en-US" sz="1000" b="1" dirty="0">
+                <a:solidFill>
+                  <a:srgbClr val="818CF8"/>
+                </a:solidFill>
+                <a:latin typeface="Calibri" pitchFamily="34" charset="0"/>
+                <a:ea typeface="Calibri" pitchFamily="34" charset="-122"/>
+                <a:cs typeface="Calibri" pitchFamily="34" charset="-120"/>
+              </a:rPr>
+              <a:t>/t/:slug</a:t>
+            </a:r>
+            <a:endParaRPr lang="en-US" sz="1000" dirty="0"/>
+          </a:p>
+        </p:txBody>
+      </p:sp>
+      <p:sp>
+        <p:nvSpPr>
+          <p:cNvPr id="24" name="Text 22"/>
+          <p:cNvSpPr/>
+          <p:nvPr/>
+        </p:nvSpPr>
+        <p:spPr>
+          <a:xfrm>
+            <a:off x="1609344" y="3566160"/>
+            <a:ext cx="2651760" cy="347472"/>
+          </a:xfrm>
+          <a:prstGeom prst="rect">
+            <a:avLst/>
+          </a:prstGeom>
+          <a:noFill/>
+          <a:ln/>
+        </p:spPr>
+        <p:txBody>
+          <a:bodyPr wrap="square" lIns="0" tIns="0" rIns="0" bIns="0" rtlCol="0" anchor="ctr"/>
+          <a:lstStyle/>
+          <a:p>
+            <a:pPr indent="0" marL="0">
+              <a:buNone/>
+            </a:pPr>
+            <a:r>
+              <a:rPr lang="en-US" sz="1000" dirty="0">
                 <a:solidFill>
                   <a:srgbClr val="94A3B8"/>
                 </a:solidFill>
@@ -3148,58 +3418,22 @@
                 <a:ea typeface="Calibri" pitchFamily="34" charset="-122"/>
                 <a:cs typeface="Calibri" pitchFamily="34" charset="-120"/>
               </a:rPr>
-              <a:t>Indexed, policy-filtered knowledge</a:t>
-            </a:r>
-            <a:endParaRPr lang="en-US" sz="900" dirty="0"/>
-          </a:p>
-        </p:txBody>
-      </p:sp>
-      <p:sp>
-        <p:nvSpPr>
-          <p:cNvPr id="21" name="Text 19"/>
-          <p:cNvSpPr/>
-          <p:nvPr/>
-        </p:nvSpPr>
-        <p:spPr>
-          <a:xfrm>
-            <a:off x="4846320" y="1691640"/>
-            <a:ext cx="3840480" cy="292608"/>
-          </a:xfrm>
-          <a:prstGeom prst="rect">
-            <a:avLst/>
-          </a:prstGeom>
-          <a:noFill/>
-          <a:ln/>
-        </p:spPr>
-        <p:txBody>
-          <a:bodyPr wrap="square" lIns="0" tIns="0" rIns="0" bIns="0" rtlCol="0" anchor="ctr"/>
-          <a:lstStyle/>
-          <a:p>
-            <a:pPr indent="0" marL="0">
-              <a:buNone/>
-            </a:pPr>
-            <a:r>
-              <a:rPr lang="en-US" sz="1100" b="1" dirty="0">
-                <a:solidFill>
-                  <a:srgbClr val="818CF8"/>
-                </a:solidFill>
-              </a:rPr>
-              <a:t>What owners expose</a:t>
-            </a:r>
-            <a:endParaRPr lang="en-US" sz="1100" dirty="0"/>
-          </a:p>
-        </p:txBody>
-      </p:sp>
-      <p:sp>
-        <p:nvSpPr>
-          <p:cNvPr id="22" name="Shape 20"/>
-          <p:cNvSpPr/>
-          <p:nvPr/>
-        </p:nvSpPr>
-        <p:spPr>
-          <a:xfrm>
-            <a:off x="4846320" y="2029968"/>
-            <a:ext cx="3840480" cy="749808"/>
+              <a:t>Public twin page — visitors chat with one twin's indexed knowledge.</a:t>
+            </a:r>
+            <a:endParaRPr lang="en-US" sz="1000" dirty="0"/>
+          </a:p>
+        </p:txBody>
+      </p:sp>
+      <p:sp>
+        <p:nvSpPr>
+          <p:cNvPr id="25" name="Shape 23"/>
+          <p:cNvSpPr/>
+          <p:nvPr/>
+        </p:nvSpPr>
+        <p:spPr>
+          <a:xfrm>
+            <a:off x="4572000" y="3511296"/>
+            <a:ext cx="4041648" cy="457200"/>
           </a:xfrm>
           <a:prstGeom prst="rect">
             <a:avLst/>
@@ -3213,117 +3447,7 @@
             </a:solidFill>
             <a:prstDash val="solid"/>
           </a:ln>
-          <a:effectLst>
-            <a:outerShdw sx="100000" sy="100000" kx="0" ky="0" algn="bl" rotWithShape="0" blurRad="127000" dist="38100" dir="8100000">
-              <a:srgbClr val="000000">
-                <a:alpha val="22000"/>
-              </a:srgbClr>
-            </a:outerShdw>
-          </a:effectLst>
-        </p:spPr>
-      </p:sp>
-      <p:sp>
-        <p:nvSpPr>
-          <p:cNvPr id="23" name="Shape 21"/>
-          <p:cNvSpPr/>
-          <p:nvPr/>
-        </p:nvSpPr>
-        <p:spPr>
-          <a:xfrm>
-            <a:off x="4846320" y="2029968"/>
-            <a:ext cx="45720" cy="749808"/>
-          </a:xfrm>
-          <a:prstGeom prst="rect">
-            <a:avLst/>
-          </a:prstGeom>
-          <a:solidFill>
-            <a:srgbClr val="818CF8"/>
-          </a:solidFill>
-          <a:ln w="12700">
-            <a:solidFill>
-              <a:srgbClr val="818CF8"/>
-            </a:solidFill>
-            <a:prstDash val="solid"/>
-          </a:ln>
-        </p:spPr>
-      </p:sp>
-      <p:sp>
-        <p:nvSpPr>
-          <p:cNvPr id="24" name="Text 22"/>
-          <p:cNvSpPr/>
-          <p:nvPr/>
-        </p:nvSpPr>
-        <p:spPr>
-          <a:xfrm>
-            <a:off x="4983480" y="2093976"/>
-            <a:ext cx="1645920" cy="201168"/>
-          </a:xfrm>
-          <a:prstGeom prst="rect">
-            <a:avLst/>
-          </a:prstGeom>
-          <a:noFill/>
-          <a:ln/>
-        </p:spPr>
-        <p:txBody>
-          <a:bodyPr wrap="square" lIns="0" tIns="0" rIns="0" bIns="0" rtlCol="0" anchor="ctr"/>
-          <a:lstStyle/>
-          <a:p>
-            <a:pPr indent="0" marL="0">
-              <a:buNone/>
-            </a:pPr>
-            <a:r>
-              <a:rPr lang="en-US" sz="950" b="1" dirty="0">
-                <a:solidFill>
-                  <a:srgbClr val="14B8A6"/>
-                </a:solidFill>
-                <a:latin typeface="Calibri" pitchFamily="34" charset="0"/>
-                <a:ea typeface="Calibri" pitchFamily="34" charset="-122"/>
-                <a:cs typeface="Calibri" pitchFamily="34" charset="-120"/>
-              </a:rPr>
-              <a:t>/t/:slug</a:t>
-            </a:r>
-            <a:endParaRPr lang="en-US" sz="950" dirty="0"/>
-          </a:p>
-        </p:txBody>
-      </p:sp>
-      <p:sp>
-        <p:nvSpPr>
-          <p:cNvPr id="25" name="Text 23"/>
-          <p:cNvSpPr/>
-          <p:nvPr/>
-        </p:nvSpPr>
-        <p:spPr>
-          <a:xfrm>
-            <a:off x="4983480" y="2295144"/>
-            <a:ext cx="3566160" cy="182880"/>
-          </a:xfrm>
-          <a:prstGeom prst="rect">
-            <a:avLst/>
-          </a:prstGeom>
-          <a:noFill/>
-          <a:ln/>
-        </p:spPr>
-        <p:txBody>
-          <a:bodyPr wrap="square" lIns="0" tIns="0" rIns="0" bIns="0" rtlCol="0" anchor="ctr"/>
-          <a:lstStyle/>
-          <a:p>
-            <a:pPr indent="0" marL="0">
-              <a:buNone/>
-            </a:pPr>
-            <a:r>
-              <a:rPr lang="en-US" sz="1100" b="1" dirty="0">
-                <a:solidFill>
-                  <a:srgbClr val="F1F5F9"/>
-                </a:solidFill>
-                <a:latin typeface="Calibri" pitchFamily="34" charset="0"/>
-                <a:ea typeface="Calibri" pitchFamily="34" charset="-122"/>
-                <a:cs typeface="Calibri" pitchFamily="34" charset="-120"/>
-              </a:rPr>
-              <a:t>Public twin page</a:t>
-            </a:r>
-            <a:endParaRPr lang="en-US" sz="1100" dirty="0"/>
-          </a:p>
-        </p:txBody>
+        </p:spPr>
       </p:sp>
       <p:sp>
         <p:nvSpPr>
@@ -3333,24 +3457,63 @@
         </p:nvSpPr>
         <p:spPr>
           <a:xfrm>
-            <a:off x="4983480" y="2487168"/>
-            <a:ext cx="3566160" cy="219456"/>
-          </a:xfrm>
-          <a:prstGeom prst="rect">
-            <a:avLst/>
-          </a:prstGeom>
-          <a:noFill/>
-          <a:ln/>
-        </p:spPr>
-        <p:txBody>
-          <a:bodyPr wrap="square" lIns="0" tIns="0" rIns="0" bIns="0" rtlCol="0" anchor="ctr"/>
-          <a:lstStyle/>
-          <a:p>
-            <a:pPr indent="0" marL="0">
-              <a:buNone/>
-            </a:pPr>
-            <a:r>
-              <a:rPr lang="en-US" sz="950" dirty="0">
+            <a:off x="4681728" y="3566160"/>
+            <a:ext cx="1097280" cy="182880"/>
+          </a:xfrm>
+          <a:prstGeom prst="rect">
+            <a:avLst/>
+          </a:prstGeom>
+          <a:noFill/>
+          <a:ln/>
+        </p:spPr>
+        <p:txBody>
+          <a:bodyPr wrap="square" lIns="0" tIns="0" rIns="0" bIns="0" rtlCol="0" anchor="ctr"/>
+          <a:lstStyle/>
+          <a:p>
+            <a:pPr indent="0" marL="0">
+              <a:buNone/>
+            </a:pPr>
+            <a:r>
+              <a:rPr lang="en-US" sz="1000" b="1" dirty="0">
+                <a:solidFill>
+                  <a:srgbClr val="818CF8"/>
+                </a:solidFill>
+                <a:latin typeface="Calibri" pitchFamily="34" charset="0"/>
+                <a:ea typeface="Calibri" pitchFamily="34" charset="-122"/>
+                <a:cs typeface="Calibri" pitchFamily="34" charset="-120"/>
+              </a:rPr>
+              <a:t>/w/:slug</a:t>
+            </a:r>
+            <a:endParaRPr lang="en-US" sz="1000" dirty="0"/>
+          </a:p>
+        </p:txBody>
+      </p:sp>
+      <p:sp>
+        <p:nvSpPr>
+          <p:cNvPr id="27" name="Text 25"/>
+          <p:cNvSpPr/>
+          <p:nvPr/>
+        </p:nvSpPr>
+        <p:spPr>
+          <a:xfrm>
+            <a:off x="5833872" y="3566160"/>
+            <a:ext cx="2651760" cy="347472"/>
+          </a:xfrm>
+          <a:prstGeom prst="rect">
+            <a:avLst/>
+          </a:prstGeom>
+          <a:noFill/>
+          <a:ln/>
+        </p:spPr>
+        <p:txBody>
+          <a:bodyPr wrap="square" lIns="0" tIns="0" rIns="0" bIns="0" rtlCol="0" anchor="ctr"/>
+          <a:lstStyle/>
+          <a:p>
+            <a:pPr indent="0" marL="0">
+              <a:buNone/>
+            </a:pPr>
+            <a:r>
+              <a:rPr lang="en-US" sz="1000" dirty="0">
                 <a:solidFill>
                   <a:srgbClr val="94A3B8"/>
                 </a:solidFill>
@@ -3358,391 +3521,46 @@
                 <a:ea typeface="Calibri" pitchFamily="34" charset="-122"/>
                 <a:cs typeface="Calibri" pitchFamily="34" charset="-120"/>
               </a:rPr>
-              <a:t>Anonymous chat against one twin's indexed knowledge</a:t>
-            </a:r>
-            <a:endParaRPr lang="en-US" sz="950" dirty="0"/>
-          </a:p>
-        </p:txBody>
-      </p:sp>
-      <p:sp>
-        <p:nvSpPr>
-          <p:cNvPr id="27" name="Shape 25"/>
-          <p:cNvSpPr/>
-          <p:nvPr/>
-        </p:nvSpPr>
-        <p:spPr>
-          <a:xfrm>
-            <a:off x="4846320" y="2898648"/>
-            <a:ext cx="3840480" cy="749808"/>
-          </a:xfrm>
-          <a:prstGeom prst="rect">
-            <a:avLst/>
-          </a:prstGeom>
-          <a:solidFill>
-            <a:srgbClr val="13131A"/>
-          </a:solidFill>
-          <a:ln w="12700">
-            <a:solidFill>
-              <a:srgbClr val="2D2D3F"/>
-            </a:solidFill>
-            <a:prstDash val="solid"/>
-          </a:ln>
-          <a:effectLst>
-            <a:outerShdw sx="100000" sy="100000" kx="0" ky="0" algn="bl" rotWithShape="0" blurRad="127000" dist="38100" dir="8100000">
-              <a:srgbClr val="000000">
-                <a:alpha val="22000"/>
-              </a:srgbClr>
-            </a:outerShdw>
-          </a:effectLst>
-        </p:spPr>
-      </p:sp>
-      <p:sp>
-        <p:nvSpPr>
-          <p:cNvPr id="28" name="Shape 26"/>
-          <p:cNvSpPr/>
-          <p:nvPr/>
-        </p:nvSpPr>
-        <p:spPr>
-          <a:xfrm>
-            <a:off x="4846320" y="2898648"/>
-            <a:ext cx="45720" cy="749808"/>
-          </a:xfrm>
-          <a:prstGeom prst="rect">
-            <a:avLst/>
-          </a:prstGeom>
-          <a:solidFill>
-            <a:srgbClr val="818CF8"/>
-          </a:solidFill>
-          <a:ln w="12700">
-            <a:solidFill>
-              <a:srgbClr val="818CF8"/>
-            </a:solidFill>
-            <a:prstDash val="solid"/>
-          </a:ln>
-        </p:spPr>
-      </p:sp>
-      <p:sp>
-        <p:nvSpPr>
-          <p:cNvPr id="29" name="Text 27"/>
-          <p:cNvSpPr/>
-          <p:nvPr/>
-        </p:nvSpPr>
-        <p:spPr>
-          <a:xfrm>
-            <a:off x="4983480" y="2962656"/>
-            <a:ext cx="1645920" cy="201168"/>
-          </a:xfrm>
-          <a:prstGeom prst="rect">
-            <a:avLst/>
-          </a:prstGeom>
-          <a:noFill/>
-          <a:ln/>
-        </p:spPr>
-        <p:txBody>
-          <a:bodyPr wrap="square" lIns="0" tIns="0" rIns="0" bIns="0" rtlCol="0" anchor="ctr"/>
-          <a:lstStyle/>
-          <a:p>
-            <a:pPr indent="0" marL="0">
-              <a:buNone/>
-            </a:pPr>
-            <a:r>
-              <a:rPr lang="en-US" sz="950" b="1" dirty="0">
-                <a:solidFill>
-                  <a:srgbClr val="14B8A6"/>
-                </a:solidFill>
-                <a:latin typeface="Calibri" pitchFamily="34" charset="0"/>
-                <a:ea typeface="Calibri" pitchFamily="34" charset="-122"/>
-                <a:cs typeface="Calibri" pitchFamily="34" charset="-120"/>
-              </a:rPr>
-              <a:t>/w/:slug</a:t>
-            </a:r>
-            <a:endParaRPr lang="en-US" sz="950" dirty="0"/>
-          </a:p>
-        </p:txBody>
-      </p:sp>
-      <p:sp>
-        <p:nvSpPr>
-          <p:cNvPr id="30" name="Text 28"/>
-          <p:cNvSpPr/>
-          <p:nvPr/>
-        </p:nvSpPr>
-        <p:spPr>
-          <a:xfrm>
-            <a:off x="4983480" y="3163824"/>
-            <a:ext cx="3566160" cy="182880"/>
-          </a:xfrm>
-          <a:prstGeom prst="rect">
-            <a:avLst/>
-          </a:prstGeom>
-          <a:noFill/>
-          <a:ln/>
-        </p:spPr>
-        <p:txBody>
-          <a:bodyPr wrap="square" lIns="0" tIns="0" rIns="0" bIns="0" rtlCol="0" anchor="ctr"/>
-          <a:lstStyle/>
-          <a:p>
-            <a:pPr indent="0" marL="0">
-              <a:buNone/>
-            </a:pPr>
-            <a:r>
-              <a:rPr lang="en-US" sz="1100" b="1" dirty="0">
-                <a:solidFill>
-                  <a:srgbClr val="F1F5F9"/>
-                </a:solidFill>
-                <a:latin typeface="Calibri" pitchFamily="34" charset="0"/>
-                <a:ea typeface="Calibri" pitchFamily="34" charset="-122"/>
-                <a:cs typeface="Calibri" pitchFamily="34" charset="-120"/>
-              </a:rPr>
-              <a:t>Workspace chat</a:t>
-            </a:r>
-            <a:endParaRPr lang="en-US" sz="1100" dirty="0"/>
-          </a:p>
-        </p:txBody>
-      </p:sp>
-      <p:sp>
-        <p:nvSpPr>
-          <p:cNvPr id="31" name="Text 29"/>
-          <p:cNvSpPr/>
-          <p:nvPr/>
-        </p:nvSpPr>
-        <p:spPr>
-          <a:xfrm>
-            <a:off x="4983480" y="3355848"/>
-            <a:ext cx="3566160" cy="219456"/>
-          </a:xfrm>
-          <a:prstGeom prst="rect">
-            <a:avLst/>
-          </a:prstGeom>
-          <a:noFill/>
-          <a:ln/>
-        </p:spPr>
-        <p:txBody>
-          <a:bodyPr wrap="square" lIns="0" tIns="0" rIns="0" bIns="0" rtlCol="0" anchor="ctr"/>
-          <a:lstStyle/>
-          <a:p>
-            <a:pPr indent="0" marL="0">
-              <a:buNone/>
-            </a:pPr>
-            <a:r>
-              <a:rPr lang="en-US" sz="950" dirty="0">
-                <a:solidFill>
-                  <a:srgbClr val="94A3B8"/>
-                </a:solidFill>
-                <a:latin typeface="Calibri" pitchFamily="34" charset="0"/>
-                <a:ea typeface="Calibri" pitchFamily="34" charset="-122"/>
-                <a:cs typeface="Calibri" pitchFamily="34" charset="-120"/>
-              </a:rPr>
-              <a:t>Routed or aggregate across all twins</a:t>
-            </a:r>
-            <a:endParaRPr lang="en-US" sz="950" dirty="0"/>
-          </a:p>
-        </p:txBody>
-      </p:sp>
-      <p:sp>
-        <p:nvSpPr>
-          <p:cNvPr id="32" name="Shape 30"/>
-          <p:cNvSpPr/>
-          <p:nvPr/>
-        </p:nvSpPr>
-        <p:spPr>
-          <a:xfrm>
-            <a:off x="4846320" y="3767328"/>
-            <a:ext cx="3840480" cy="749808"/>
-          </a:xfrm>
-          <a:prstGeom prst="rect">
-            <a:avLst/>
-          </a:prstGeom>
-          <a:solidFill>
-            <a:srgbClr val="13131A"/>
-          </a:solidFill>
-          <a:ln w="12700">
-            <a:solidFill>
-              <a:srgbClr val="2D2D3F"/>
-            </a:solidFill>
-            <a:prstDash val="solid"/>
-          </a:ln>
-          <a:effectLst>
-            <a:outerShdw sx="100000" sy="100000" kx="0" ky="0" algn="bl" rotWithShape="0" blurRad="127000" dist="38100" dir="8100000">
-              <a:srgbClr val="000000">
-                <a:alpha val="22000"/>
-              </a:srgbClr>
-            </a:outerShdw>
-          </a:effectLst>
-        </p:spPr>
-      </p:sp>
-      <p:sp>
-        <p:nvSpPr>
-          <p:cNvPr id="33" name="Shape 31"/>
-          <p:cNvSpPr/>
-          <p:nvPr/>
-        </p:nvSpPr>
-        <p:spPr>
-          <a:xfrm>
-            <a:off x="4846320" y="3767328"/>
-            <a:ext cx="45720" cy="749808"/>
-          </a:xfrm>
-          <a:prstGeom prst="rect">
-            <a:avLst/>
-          </a:prstGeom>
-          <a:solidFill>
-            <a:srgbClr val="818CF8"/>
-          </a:solidFill>
-          <a:ln w="12700">
-            <a:solidFill>
-              <a:srgbClr val="818CF8"/>
-            </a:solidFill>
-            <a:prstDash val="solid"/>
-          </a:ln>
-        </p:spPr>
-      </p:sp>
-      <p:sp>
-        <p:nvSpPr>
-          <p:cNvPr id="34" name="Text 32"/>
-          <p:cNvSpPr/>
-          <p:nvPr/>
-        </p:nvSpPr>
-        <p:spPr>
-          <a:xfrm>
-            <a:off x="4983480" y="3831336"/>
-            <a:ext cx="1645920" cy="201168"/>
-          </a:xfrm>
-          <a:prstGeom prst="rect">
-            <a:avLst/>
-          </a:prstGeom>
-          <a:noFill/>
-          <a:ln/>
-        </p:spPr>
-        <p:txBody>
-          <a:bodyPr wrap="square" lIns="0" tIns="0" rIns="0" bIns="0" rtlCol="0" anchor="ctr"/>
-          <a:lstStyle/>
-          <a:p>
-            <a:pPr indent="0" marL="0">
-              <a:buNone/>
-            </a:pPr>
-            <a:r>
-              <a:rPr lang="en-US" sz="950" b="1" dirty="0">
-                <a:solidFill>
-                  <a:srgbClr val="14B8A6"/>
-                </a:solidFill>
-                <a:latin typeface="Calibri" pitchFamily="34" charset="0"/>
-                <a:ea typeface="Calibri" pitchFamily="34" charset="-122"/>
-                <a:cs typeface="Calibri" pitchFamily="34" charset="-120"/>
-              </a:rPr>
-              <a:t>embed</a:t>
-            </a:r>
-            <a:endParaRPr lang="en-US" sz="950" dirty="0"/>
-          </a:p>
-        </p:txBody>
-      </p:sp>
-      <p:sp>
-        <p:nvSpPr>
-          <p:cNvPr id="35" name="Text 33"/>
-          <p:cNvSpPr/>
-          <p:nvPr/>
-        </p:nvSpPr>
-        <p:spPr>
-          <a:xfrm>
-            <a:off x="4983480" y="4032504"/>
-            <a:ext cx="3566160" cy="182880"/>
-          </a:xfrm>
-          <a:prstGeom prst="rect">
-            <a:avLst/>
-          </a:prstGeom>
-          <a:noFill/>
-          <a:ln/>
-        </p:spPr>
-        <p:txBody>
-          <a:bodyPr wrap="square" lIns="0" tIns="0" rIns="0" bIns="0" rtlCol="0" anchor="ctr"/>
-          <a:lstStyle/>
-          <a:p>
-            <a:pPr indent="0" marL="0">
-              <a:buNone/>
-            </a:pPr>
-            <a:r>
-              <a:rPr lang="en-US" sz="1100" b="1" dirty="0">
-                <a:solidFill>
-                  <a:srgbClr val="F1F5F9"/>
-                </a:solidFill>
-                <a:latin typeface="Calibri" pitchFamily="34" charset="0"/>
-                <a:ea typeface="Calibri" pitchFamily="34" charset="-122"/>
-                <a:cs typeface="Calibri" pitchFamily="34" charset="-120"/>
-              </a:rPr>
-              <a:t>Embed widget</a:t>
-            </a:r>
-            <a:endParaRPr lang="en-US" sz="1100" dirty="0"/>
-          </a:p>
-        </p:txBody>
-      </p:sp>
-      <p:sp>
-        <p:nvSpPr>
-          <p:cNvPr id="36" name="Text 34"/>
-          <p:cNvSpPr/>
-          <p:nvPr/>
-        </p:nvSpPr>
-        <p:spPr>
-          <a:xfrm>
-            <a:off x="4983480" y="4224528"/>
-            <a:ext cx="3566160" cy="219456"/>
-          </a:xfrm>
-          <a:prstGeom prst="rect">
-            <a:avLst/>
-          </a:prstGeom>
-          <a:noFill/>
-          <a:ln/>
-        </p:spPr>
-        <p:txBody>
-          <a:bodyPr wrap="square" lIns="0" tIns="0" rIns="0" bIns="0" rtlCol="0" anchor="ctr"/>
-          <a:lstStyle/>
-          <a:p>
-            <a:pPr indent="0" marL="0">
-              <a:buNone/>
-            </a:pPr>
-            <a:r>
-              <a:rPr lang="en-US" sz="950" dirty="0">
-                <a:solidFill>
-                  <a:srgbClr val="94A3B8"/>
-                </a:solidFill>
-                <a:latin typeface="Calibri" pitchFamily="34" charset="0"/>
-                <a:ea typeface="Calibri" pitchFamily="34" charset="-122"/>
-                <a:cs typeface="Calibri" pitchFamily="34" charset="-120"/>
-              </a:rPr>
-              <a:t>Floating chat panel in any external page</a:t>
-            </a:r>
-            <a:endParaRPr lang="en-US" sz="950" dirty="0"/>
-          </a:p>
-        </p:txBody>
-      </p:sp>
-      <p:sp>
-        <p:nvSpPr>
-          <p:cNvPr id="37" name="Text 35"/>
-          <p:cNvSpPr/>
-          <p:nvPr/>
-        </p:nvSpPr>
-        <p:spPr>
-          <a:xfrm>
-            <a:off x="457200" y="4617720"/>
-            <a:ext cx="8229600" cy="347472"/>
-          </a:xfrm>
-          <a:prstGeom prst="rect">
-            <a:avLst/>
-          </a:prstGeom>
-          <a:noFill/>
-          <a:ln/>
-        </p:spPr>
-        <p:txBody>
-          <a:bodyPr wrap="square" lIns="0" tIns="0" rIns="0" bIns="0" rtlCol="0" anchor="ctr"/>
-          <a:lstStyle/>
-          <a:p>
-            <a:pPr indent="0" marL="0">
+              <a:t>Workspace chat — questions route to the right twin or aggregate across all.</a:t>
+            </a:r>
+            <a:endParaRPr lang="en-US" sz="1000" dirty="0"/>
+          </a:p>
+        </p:txBody>
+      </p:sp>
+      <p:sp>
+        <p:nvSpPr>
+          <p:cNvPr id="28" name="Text 26"/>
+          <p:cNvSpPr/>
+          <p:nvPr/>
+        </p:nvSpPr>
+        <p:spPr>
+          <a:xfrm>
+            <a:off x="457200" y="4059936"/>
+            <a:ext cx="8229600" cy="566928"/>
+          </a:xfrm>
+          <a:prstGeom prst="rect">
+            <a:avLst/>
+          </a:prstGeom>
+          <a:noFill/>
+          <a:ln/>
+        </p:spPr>
+        <p:txBody>
+          <a:bodyPr wrap="square" lIns="0" tIns="0" rIns="0" bIns="0" rtlCol="0" anchor="ctr"/>
+          <a:lstStyle/>
+          <a:p>
+            <a:pPr algn="l" indent="0" marL="0">
               <a:buNone/>
             </a:pPr>
             <a:r>
               <a:rPr lang="en-US" sz="1050" i="1" dirty="0">
                 <a:solidFill>
-                  <a:srgbClr val="94A3B8"/>
-                </a:solidFill>
-              </a:rPr>
-              <a:t>Public pages: calm, minimal — no technical internals visible to visitors. The conversation is the hero.</a:t>
+                  <a:srgbClr val="818CF8"/>
+                </a:solidFill>
+                <a:latin typeface="Calibri" pitchFamily="34" charset="0"/>
+                <a:ea typeface="Calibri" pitchFamily="34" charset="-122"/>
+                <a:cs typeface="Calibri" pitchFamily="34" charset="-120"/>
+              </a:rPr>
+              <a:t>Design decision: The Twin is the top-level abstraction — not the document, not the folder. Attach 10 different sources to one twin and it behaves as one coherent agent with one answer scope and one persona.</a:t>
             </a:r>
             <a:endParaRPr lang="en-US" sz="1050" dirty="0"/>
           </a:p>
@@ -3814,7 +3632,7 @@
         <p:spPr>
           <a:xfrm>
             <a:off x="457200" y="182880"/>
-            <a:ext cx="8229600" cy="256032"/>
+            <a:ext cx="8229600" cy="237744"/>
           </a:xfrm>
           <a:prstGeom prst="rect">
             <a:avLst/>
@@ -3835,7 +3653,7 @@
                   <a:srgbClr val="6366F1"/>
                 </a:solidFill>
               </a:rPr>
-              <a:t>ARCHITECTURE &amp; ORCHESTRATION</a:t>
+              <a:t>THE RAG PIPELINE</a:t>
             </a:r>
             <a:endParaRPr lang="en-US" sz="900" dirty="0"/>
           </a:p>
@@ -3849,8 +3667,8 @@
         </p:nvSpPr>
         <p:spPr>
           <a:xfrm>
-            <a:off x="457200" y="475488"/>
-            <a:ext cx="8229600" cy="594360"/>
+            <a:off x="457200" y="457200"/>
+            <a:ext cx="8229600" cy="566928"/>
           </a:xfrm>
           <a:prstGeom prst="rect">
             <a:avLst/>
@@ -3866,7 +3684,7 @@
               <a:buNone/>
             </a:pPr>
             <a:r>
-              <a:rPr lang="en-US" sz="2500" b="1" dirty="0">
+              <a:rPr lang="en-US" sz="2200" b="1" dirty="0">
                 <a:solidFill>
                   <a:srgbClr val="111827"/>
                 </a:solidFill>
@@ -3874,9 +3692,9 @@
                 <a:ea typeface="Calibri" pitchFamily="34" charset="-122"/>
                 <a:cs typeface="Calibri" pitchFamily="34" charset="-120"/>
               </a:rPr>
-              <a:t>Branching orchestration — not a single LLM call.</a:t>
-            </a:r>
-            <a:endParaRPr lang="en-US" sz="2500" dirty="0"/>
+              <a:t>How a question becomes a grounded answer — not a guess</a:t>
+            </a:r>
+            <a:endParaRPr lang="en-US" sz="2200" dirty="0"/>
           </a:p>
         </p:txBody>
       </p:sp>
@@ -3888,8 +3706,8 @@
         </p:nvSpPr>
         <p:spPr>
           <a:xfrm>
-            <a:off x="347472" y="1207008"/>
-            <a:ext cx="4069080" cy="749808"/>
+            <a:off x="347472" y="1170432"/>
+            <a:ext cx="4160520" cy="713232"/>
           </a:xfrm>
           <a:prstGeom prst="rect">
             <a:avLst/>
@@ -3904,9 +3722,9 @@
             <a:prstDash val="solid"/>
           </a:ln>
           <a:effectLst>
-            <a:outerShdw sx="100000" sy="100000" kx="0" ky="0" algn="bl" rotWithShape="0" blurRad="127000" dist="38100" dir="8100000">
+            <a:outerShdw sx="100000" sy="100000" kx="0" ky="0" algn="bl" rotWithShape="0" blurRad="101600" dist="25400" dir="8100000">
               <a:srgbClr val="000000">
-                <a:alpha val="22000"/>
+                <a:alpha val="18000"/>
               </a:srgbClr>
             </a:outerShdw>
           </a:effectLst>
@@ -3920,8 +3738,8 @@
         </p:nvSpPr>
         <p:spPr>
           <a:xfrm>
-            <a:off x="347472" y="1207008"/>
-            <a:ext cx="45720" cy="749808"/>
+            <a:off x="347472" y="1170432"/>
+            <a:ext cx="45720" cy="713232"/>
           </a:xfrm>
           <a:prstGeom prst="rect">
             <a:avLst/>
@@ -3945,24 +3763,24 @@
         </p:nvSpPr>
         <p:spPr>
           <a:xfrm>
-            <a:off x="475488" y="1280160"/>
-            <a:ext cx="3840480" cy="237744"/>
-          </a:xfrm>
-          <a:prstGeom prst="rect">
-            <a:avLst/>
-          </a:prstGeom>
-          <a:noFill/>
-          <a:ln/>
-        </p:spPr>
-        <p:txBody>
-          <a:bodyPr wrap="square" lIns="0" tIns="0" rIns="0" bIns="0" rtlCol="0" anchor="ctr"/>
-          <a:lstStyle/>
-          <a:p>
-            <a:pPr indent="0" marL="0">
-              <a:buNone/>
-            </a:pPr>
-            <a:r>
-              <a:rPr lang="en-US" sz="1200" b="1" dirty="0">
+            <a:off x="475488" y="1225296"/>
+            <a:ext cx="3913632" cy="219456"/>
+          </a:xfrm>
+          <a:prstGeom prst="rect">
+            <a:avLst/>
+          </a:prstGeom>
+          <a:noFill/>
+          <a:ln/>
+        </p:spPr>
+        <p:txBody>
+          <a:bodyPr wrap="square" lIns="0" tIns="0" rIns="0" bIns="0" rtlCol="0" anchor="ctr"/>
+          <a:lstStyle/>
+          <a:p>
+            <a:pPr indent="0" marL="0">
+              <a:buNone/>
+            </a:pPr>
+            <a:r>
+              <a:rPr lang="en-US" sz="1100" b="1" dirty="0">
                 <a:solidFill>
                   <a:srgbClr val="111827"/>
                 </a:solidFill>
@@ -3970,9 +3788,9 @@
                 <a:ea typeface="Calibri" pitchFamily="34" charset="-122"/>
                 <a:cs typeface="Calibri" pitchFamily="34" charset="-120"/>
               </a:rPr>
-              <a:t>1. Langfuse trace</a:t>
-            </a:r>
-            <a:endParaRPr lang="en-US" sz="1200" dirty="0"/>
+              <a:t>1. Query + Langfuse trace</a:t>
+            </a:r>
+            <a:endParaRPr lang="en-US" sz="1100" dirty="0"/>
           </a:p>
         </p:txBody>
       </p:sp>
@@ -3984,24 +3802,24 @@
         </p:nvSpPr>
         <p:spPr>
           <a:xfrm>
-            <a:off x="475488" y="1554480"/>
-            <a:ext cx="3840480" cy="329184"/>
-          </a:xfrm>
-          <a:prstGeom prst="rect">
-            <a:avLst/>
-          </a:prstGeom>
-          <a:noFill/>
-          <a:ln/>
-        </p:spPr>
-        <p:txBody>
-          <a:bodyPr wrap="square" lIns="0" tIns="0" rIns="0" bIns="0" rtlCol="0" anchor="ctr"/>
-          <a:lstStyle/>
-          <a:p>
-            <a:pPr indent="0" marL="0">
-              <a:buNone/>
-            </a:pPr>
-            <a:r>
-              <a:rPr lang="en-US" sz="950" dirty="0">
+            <a:off x="475488" y="1472184"/>
+            <a:ext cx="3913632" cy="384048"/>
+          </a:xfrm>
+          <a:prstGeom prst="rect">
+            <a:avLst/>
+          </a:prstGeom>
+          <a:noFill/>
+          <a:ln/>
+        </p:spPr>
+        <p:txBody>
+          <a:bodyPr wrap="square" lIns="0" tIns="0" rIns="0" bIns="0" rtlCol="0" anchor="ctr"/>
+          <a:lstStyle/>
+          <a:p>
+            <a:pPr indent="0" marL="0">
+              <a:buNone/>
+            </a:pPr>
+            <a:r>
+              <a:rPr lang="en-US" sz="880" dirty="0">
                 <a:solidFill>
                   <a:srgbClr val="6B7280"/>
                 </a:solidFill>
@@ -4009,9 +3827,9 @@
                 <a:ea typeface="Calibri" pitchFamily="34" charset="-122"/>
                 <a:cs typeface="Calibri" pitchFamily="34" charset="-120"/>
               </a:rPr>
-              <a:t>Observability when keys configured</a:t>
-            </a:r>
-            <a:endParaRPr lang="en-US" sz="950" dirty="0"/>
+              <a:t>Logged immediately with a trace ID. A request_id flows from HTTP into every downstream log event. Every request is observable from the first millisecond.</a:t>
+            </a:r>
+            <a:endParaRPr lang="en-US" sz="880" dirty="0"/>
           </a:p>
         </p:txBody>
       </p:sp>
@@ -4023,14 +3841,14 @@
         </p:nvSpPr>
         <p:spPr>
           <a:xfrm>
-            <a:off x="2377440" y="1956816"/>
-            <a:ext cx="0" cy="118872"/>
+            <a:off x="2423160" y="1883664"/>
+            <a:ext cx="0" cy="54864"/>
           </a:xfrm>
           <a:prstGeom prst="line">
             <a:avLst/>
           </a:prstGeom>
           <a:noFill/>
-          <a:ln w="19050">
+          <a:ln w="12700">
             <a:solidFill>
               <a:srgbClr val="CBD5E1"/>
             </a:solidFill>
@@ -4046,8 +3864,8 @@
         </p:nvSpPr>
         <p:spPr>
           <a:xfrm>
-            <a:off x="347472" y="2075688"/>
-            <a:ext cx="4069080" cy="749808"/>
+            <a:off x="347472" y="1938528"/>
+            <a:ext cx="4160520" cy="713232"/>
           </a:xfrm>
           <a:prstGeom prst="rect">
             <a:avLst/>
@@ -4062,9 +3880,9 @@
             <a:prstDash val="solid"/>
           </a:ln>
           <a:effectLst>
-            <a:outerShdw sx="100000" sy="100000" kx="0" ky="0" algn="bl" rotWithShape="0" blurRad="127000" dist="38100" dir="8100000">
+            <a:outerShdw sx="100000" sy="100000" kx="0" ky="0" algn="bl" rotWithShape="0" blurRad="101600" dist="25400" dir="8100000">
               <a:srgbClr val="000000">
-                <a:alpha val="22000"/>
+                <a:alpha val="18000"/>
               </a:srgbClr>
             </a:outerShdw>
           </a:effectLst>
@@ -4078,8 +3896,8 @@
         </p:nvSpPr>
         <p:spPr>
           <a:xfrm>
-            <a:off x="347472" y="2075688"/>
-            <a:ext cx="45720" cy="749808"/>
+            <a:off x="347472" y="1938528"/>
+            <a:ext cx="45720" cy="713232"/>
           </a:xfrm>
           <a:prstGeom prst="rect">
             <a:avLst/>
@@ -4103,24 +3921,24 @@
         </p:nvSpPr>
         <p:spPr>
           <a:xfrm>
-            <a:off x="475488" y="2148840"/>
-            <a:ext cx="3840480" cy="237744"/>
-          </a:xfrm>
-          <a:prstGeom prst="rect">
-            <a:avLst/>
-          </a:prstGeom>
-          <a:noFill/>
-          <a:ln/>
-        </p:spPr>
-        <p:txBody>
-          <a:bodyPr wrap="square" lIns="0" tIns="0" rIns="0" bIns="0" rtlCol="0" anchor="ctr"/>
-          <a:lstStyle/>
-          <a:p>
-            <a:pPr indent="0" marL="0">
-              <a:buNone/>
-            </a:pPr>
-            <a:r>
-              <a:rPr lang="en-US" sz="1200" b="1" dirty="0">
+            <a:off x="475488" y="1993392"/>
+            <a:ext cx="3913632" cy="219456"/>
+          </a:xfrm>
+          <a:prstGeom prst="rect">
+            <a:avLst/>
+          </a:prstGeom>
+          <a:noFill/>
+          <a:ln/>
+        </p:spPr>
+        <p:txBody>
+          <a:bodyPr wrap="square" lIns="0" tIns="0" rIns="0" bIns="0" rtlCol="0" anchor="ctr"/>
+          <a:lstStyle/>
+          <a:p>
+            <a:pPr indent="0" marL="0">
+              <a:buNone/>
+            </a:pPr>
+            <a:r>
+              <a:rPr lang="en-US" sz="1100" b="1" dirty="0">
                 <a:solidFill>
                   <a:srgbClr val="111827"/>
                 </a:solidFill>
@@ -4128,9 +3946,9 @@
                 <a:ea typeface="Calibri" pitchFamily="34" charset="-122"/>
                 <a:cs typeface="Calibri" pitchFamily="34" charset="-120"/>
               </a:rPr>
-              <a:t>2. Intent / query analysis</a:t>
-            </a:r>
-            <a:endParaRPr lang="en-US" sz="1200" dirty="0"/>
+              <a:t>2. Intent classification</a:t>
+            </a:r>
+            <a:endParaRPr lang="en-US" sz="1100" dirty="0"/>
           </a:p>
         </p:txBody>
       </p:sp>
@@ -4142,24 +3960,24 @@
         </p:nvSpPr>
         <p:spPr>
           <a:xfrm>
-            <a:off x="475488" y="2423160"/>
-            <a:ext cx="3840480" cy="329184"/>
-          </a:xfrm>
-          <a:prstGeom prst="rect">
-            <a:avLst/>
-          </a:prstGeom>
-          <a:noFill/>
-          <a:ln/>
-        </p:spPr>
-        <p:txBody>
-          <a:bodyPr wrap="square" lIns="0" tIns="0" rIns="0" bIns="0" rtlCol="0" anchor="ctr"/>
-          <a:lstStyle/>
-          <a:p>
-            <a:pPr indent="0" marL="0">
-              <a:buNone/>
-            </a:pPr>
-            <a:r>
-              <a:rPr lang="en-US" sz="950" dirty="0">
+            <a:off x="475488" y="2240280"/>
+            <a:ext cx="3913632" cy="384048"/>
+          </a:xfrm>
+          <a:prstGeom prst="rect">
+            <a:avLst/>
+          </a:prstGeom>
+          <a:noFill/>
+          <a:ln/>
+        </p:spPr>
+        <p:txBody>
+          <a:bodyPr wrap="square" lIns="0" tIns="0" rIns="0" bIns="0" rtlCol="0" anchor="ctr"/>
+          <a:lstStyle/>
+          <a:p>
+            <a:pPr indent="0" marL="0">
+              <a:buNone/>
+            </a:pPr>
+            <a:r>
+              <a:rPr lang="en-US" sz="880" dirty="0">
                 <a:solidFill>
                   <a:srgbClr val="6B7280"/>
                 </a:solidFill>
@@ -4167,9 +3985,9 @@
                 <a:ea typeface="Calibri" pitchFamily="34" charset="-122"/>
                 <a:cs typeface="Calibri" pitchFamily="34" charset="-120"/>
               </a:rPr>
-              <a:t>Retrieval boosts + routing hints</a:t>
-            </a:r>
-            <a:endParaRPr lang="en-US" sz="950" dirty="0"/>
+              <a:t>Lightweight LLM call (temperature=0, max_tokens=150). Classifies specific vs general; returns expanded query for better semantic recall. Regex fallback fires if LLM fails — retrieval is never blocked.</a:t>
+            </a:r>
+            <a:endParaRPr lang="en-US" sz="880" dirty="0"/>
           </a:p>
         </p:txBody>
       </p:sp>
@@ -4181,14 +3999,14 @@
         </p:nvSpPr>
         <p:spPr>
           <a:xfrm>
-            <a:off x="2377440" y="2825496"/>
-            <a:ext cx="0" cy="118872"/>
+            <a:off x="2423160" y="2651760"/>
+            <a:ext cx="0" cy="54864"/>
           </a:xfrm>
           <a:prstGeom prst="line">
             <a:avLst/>
           </a:prstGeom>
           <a:noFill/>
-          <a:ln w="19050">
+          <a:ln w="12700">
             <a:solidFill>
               <a:srgbClr val="CBD5E1"/>
             </a:solidFill>
@@ -4204,8 +4022,8 @@
         </p:nvSpPr>
         <p:spPr>
           <a:xfrm>
-            <a:off x="347472" y="2944368"/>
-            <a:ext cx="4069080" cy="749808"/>
+            <a:off x="347472" y="2706624"/>
+            <a:ext cx="4160520" cy="713232"/>
           </a:xfrm>
           <a:prstGeom prst="rect">
             <a:avLst/>
@@ -4220,9 +4038,9 @@
             <a:prstDash val="solid"/>
           </a:ln>
           <a:effectLst>
-            <a:outerShdw sx="100000" sy="100000" kx="0" ky="0" algn="bl" rotWithShape="0" blurRad="127000" dist="38100" dir="8100000">
+            <a:outerShdw sx="100000" sy="100000" kx="0" ky="0" algn="bl" rotWithShape="0" blurRad="101600" dist="25400" dir="8100000">
               <a:srgbClr val="000000">
-                <a:alpha val="22000"/>
+                <a:alpha val="18000"/>
               </a:srgbClr>
             </a:outerShdw>
           </a:effectLst>
@@ -4236,8 +4054,8 @@
         </p:nvSpPr>
         <p:spPr>
           <a:xfrm>
-            <a:off x="347472" y="2944368"/>
-            <a:ext cx="45720" cy="749808"/>
+            <a:off x="347472" y="2706624"/>
+            <a:ext cx="45720" cy="713232"/>
           </a:xfrm>
           <a:prstGeom prst="rect">
             <a:avLst/>
@@ -4261,24 +4079,24 @@
         </p:nvSpPr>
         <p:spPr>
           <a:xfrm>
-            <a:off x="475488" y="3017520"/>
-            <a:ext cx="3840480" cy="237744"/>
-          </a:xfrm>
-          <a:prstGeom prst="rect">
-            <a:avLst/>
-          </a:prstGeom>
-          <a:noFill/>
-          <a:ln/>
-        </p:spPr>
-        <p:txBody>
-          <a:bodyPr wrap="square" lIns="0" tIns="0" rIns="0" bIns="0" rtlCol="0" anchor="ctr"/>
-          <a:lstStyle/>
-          <a:p>
-            <a:pPr indent="0" marL="0">
-              <a:buNone/>
-            </a:pPr>
-            <a:r>
-              <a:rPr lang="en-US" sz="1200" b="1" dirty="0">
+            <a:off x="475488" y="2761488"/>
+            <a:ext cx="3913632" cy="219456"/>
+          </a:xfrm>
+          <a:prstGeom prst="rect">
+            <a:avLst/>
+          </a:prstGeom>
+          <a:noFill/>
+          <a:ln/>
+        </p:spPr>
+        <p:txBody>
+          <a:bodyPr wrap="square" lIns="0" tIns="0" rIns="0" bIns="0" rtlCol="0" anchor="ctr"/>
+          <a:lstStyle/>
+          <a:p>
+            <a:pPr indent="0" marL="0">
+              <a:buNone/>
+            </a:pPr>
+            <a:r>
+              <a:rPr lang="en-US" sz="1100" b="1" dirty="0">
                 <a:solidFill>
                   <a:srgbClr val="111827"/>
                 </a:solidFill>
@@ -4286,9 +4104,9 @@
                 <a:ea typeface="Calibri" pitchFamily="34" charset="-122"/>
                 <a:cs typeface="Calibri" pitchFamily="34" charset="-120"/>
               </a:rPr>
-              <a:t>3. Retrieve</a:t>
-            </a:r>
-            <a:endParaRPr lang="en-US" sz="1200" dirty="0"/>
+              <a:t>3. Hybrid retrieval</a:t>
+            </a:r>
+            <a:endParaRPr lang="en-US" sz="1100" dirty="0"/>
           </a:p>
         </p:txBody>
       </p:sp>
@@ -4300,24 +4118,24 @@
         </p:nvSpPr>
         <p:spPr>
           <a:xfrm>
-            <a:off x="475488" y="3291840"/>
-            <a:ext cx="3840480" cy="329184"/>
-          </a:xfrm>
-          <a:prstGeom prst="rect">
-            <a:avLst/>
-          </a:prstGeom>
-          <a:noFill/>
-          <a:ln/>
-        </p:spPr>
-        <p:txBody>
-          <a:bodyPr wrap="square" lIns="0" tIns="0" rIns="0" bIns="0" rtlCol="0" anchor="ctr"/>
-          <a:lstStyle/>
-          <a:p>
-            <a:pPr indent="0" marL="0">
-              <a:buNone/>
-            </a:pPr>
-            <a:r>
-              <a:rPr lang="en-US" sz="950" dirty="0">
+            <a:off x="475488" y="3008376"/>
+            <a:ext cx="3913632" cy="384048"/>
+          </a:xfrm>
+          <a:prstGeom prst="rect">
+            <a:avLst/>
+          </a:prstGeom>
+          <a:noFill/>
+          <a:ln/>
+        </p:spPr>
+        <p:txBody>
+          <a:bodyPr wrap="square" lIns="0" tIns="0" rIns="0" bIns="0" rtlCol="0" anchor="ctr"/>
+          <a:lstStyle/>
+          <a:p>
+            <a:pPr indent="0" marL="0">
+              <a:buNone/>
+            </a:pPr>
+            <a:r>
+              <a:rPr lang="en-US" sz="880" dirty="0">
                 <a:solidFill>
                   <a:srgbClr val="6B7280"/>
                 </a:solidFill>
@@ -4325,9 +4143,9 @@
                 <a:ea typeface="Calibri" pitchFamily="34" charset="-122"/>
                 <a:cs typeface="Calibri" pitchFamily="34" charset="-120"/>
               </a:rPr>
-              <a:t>Twin packet | workspace aggregate | routed twin (pgvector + lexical)</a:t>
-            </a:r>
-            <a:endParaRPr lang="en-US" sz="950" dirty="0"/>
+              <a:t>Two parallel searches merged and deduped: pgvector cosine similarity (semantic) + PostgreSQL full-text search (exact names/titles). Memory Brief chunks prepended with score boost. Deduped by chunk ID, highest score wins.</a:t>
+            </a:r>
+            <a:endParaRPr lang="en-US" sz="880" dirty="0"/>
           </a:p>
         </p:txBody>
       </p:sp>
@@ -4339,14 +4157,14 @@
         </p:nvSpPr>
         <p:spPr>
           <a:xfrm>
-            <a:off x="2377440" y="3694176"/>
-            <a:ext cx="0" cy="118872"/>
+            <a:off x="2423160" y="3419856"/>
+            <a:ext cx="0" cy="54864"/>
           </a:xfrm>
           <a:prstGeom prst="line">
             <a:avLst/>
           </a:prstGeom>
           <a:noFill/>
-          <a:ln w="19050">
+          <a:ln w="12700">
             <a:solidFill>
               <a:srgbClr val="CBD5E1"/>
             </a:solidFill>
@@ -4362,8 +4180,8 @@
         </p:nvSpPr>
         <p:spPr>
           <a:xfrm>
-            <a:off x="347472" y="3813048"/>
-            <a:ext cx="4069080" cy="749808"/>
+            <a:off x="347472" y="3474720"/>
+            <a:ext cx="4160520" cy="713232"/>
           </a:xfrm>
           <a:prstGeom prst="rect">
             <a:avLst/>
@@ -4378,9 +4196,9 @@
             <a:prstDash val="solid"/>
           </a:ln>
           <a:effectLst>
-            <a:outerShdw sx="100000" sy="100000" kx="0" ky="0" algn="bl" rotWithShape="0" blurRad="127000" dist="38100" dir="8100000">
+            <a:outerShdw sx="100000" sy="100000" kx="0" ky="0" algn="bl" rotWithShape="0" blurRad="101600" dist="25400" dir="8100000">
               <a:srgbClr val="000000">
-                <a:alpha val="22000"/>
+                <a:alpha val="18000"/>
               </a:srgbClr>
             </a:outerShdw>
           </a:effectLst>
@@ -4394,8 +4212,8 @@
         </p:nvSpPr>
         <p:spPr>
           <a:xfrm>
-            <a:off x="347472" y="3813048"/>
-            <a:ext cx="45720" cy="749808"/>
+            <a:off x="347472" y="3474720"/>
+            <a:ext cx="45720" cy="713232"/>
           </a:xfrm>
           <a:prstGeom prst="rect">
             <a:avLst/>
@@ -4419,24 +4237,24 @@
         </p:nvSpPr>
         <p:spPr>
           <a:xfrm>
-            <a:off x="475488" y="3886200"/>
-            <a:ext cx="3840480" cy="237744"/>
-          </a:xfrm>
-          <a:prstGeom prst="rect">
-            <a:avLst/>
-          </a:prstGeom>
-          <a:noFill/>
-          <a:ln/>
-        </p:spPr>
-        <p:txBody>
-          <a:bodyPr wrap="square" lIns="0" tIns="0" rIns="0" bIns="0" rtlCol="0" anchor="ctr"/>
-          <a:lstStyle/>
-          <a:p>
-            <a:pPr indent="0" marL="0">
-              <a:buNone/>
-            </a:pPr>
-            <a:r>
-              <a:rPr lang="en-US" sz="1200" b="1" dirty="0">
+            <a:off x="475488" y="3529584"/>
+            <a:ext cx="3913632" cy="219456"/>
+          </a:xfrm>
+          <a:prstGeom prst="rect">
+            <a:avLst/>
+          </a:prstGeom>
+          <a:noFill/>
+          <a:ln/>
+        </p:spPr>
+        <p:txBody>
+          <a:bodyPr wrap="square" lIns="0" tIns="0" rIns="0" bIns="0" rtlCol="0" anchor="ctr"/>
+          <a:lstStyle/>
+          <a:p>
+            <a:pPr indent="0" marL="0">
+              <a:buNone/>
+            </a:pPr>
+            <a:r>
+              <a:rPr lang="en-US" sz="1100" b="1" dirty="0">
                 <a:solidFill>
                   <a:srgbClr val="111827"/>
                 </a:solidFill>
@@ -4444,9 +4262,9 @@
                 <a:ea typeface="Calibri" pitchFamily="34" charset="-122"/>
                 <a:cs typeface="Calibri" pitchFamily="34" charset="-120"/>
               </a:rPr>
-              <a:t>4. Generate</a:t>
-            </a:r>
-            <a:endParaRPr lang="en-US" sz="1200" dirty="0"/>
+              <a:t>4. Answer generation</a:t>
+            </a:r>
+            <a:endParaRPr lang="en-US" sz="1100" dirty="0"/>
           </a:p>
         </p:txBody>
       </p:sp>
@@ -4458,24 +4276,24 @@
         </p:nvSpPr>
         <p:spPr>
           <a:xfrm>
-            <a:off x="475488" y="4160520"/>
-            <a:ext cx="3840480" cy="329184"/>
-          </a:xfrm>
-          <a:prstGeom prst="rect">
-            <a:avLst/>
-          </a:prstGeom>
-          <a:noFill/>
-          <a:ln/>
-        </p:spPr>
-        <p:txBody>
-          <a:bodyPr wrap="square" lIns="0" tIns="0" rIns="0" bIns="0" rtlCol="0" anchor="ctr"/>
-          <a:lstStyle/>
-          <a:p>
-            <a:pPr indent="0" marL="0">
-              <a:buNone/>
-            </a:pPr>
-            <a:r>
-              <a:rPr lang="en-US" sz="950" dirty="0">
+            <a:off x="475488" y="3776472"/>
+            <a:ext cx="3913632" cy="384048"/>
+          </a:xfrm>
+          <a:prstGeom prst="rect">
+            <a:avLst/>
+          </a:prstGeom>
+          <a:noFill/>
+          <a:ln/>
+        </p:spPr>
+        <p:txBody>
+          <a:bodyPr wrap="square" lIns="0" tIns="0" rIns="0" bIns="0" rtlCol="0" anchor="ctr"/>
+          <a:lstStyle/>
+          <a:p>
+            <a:pPr indent="0" marL="0">
+              <a:buNone/>
+            </a:pPr>
+            <a:r>
+              <a:rPr lang="en-US" sz="880" dirty="0">
                 <a:solidFill>
                   <a:srgbClr val="6B7280"/>
                 </a:solidFill>
@@ -4483,9 +4301,9 @@
                 <a:ea typeface="Calibri" pitchFamily="34" charset="-122"/>
                 <a:cs typeface="Calibri" pitchFamily="34" charset="-120"/>
               </a:rPr>
-              <a:t>generate_answer / generate_workspace_answer — persona + Memory Brief + chunks</a:t>
-            </a:r>
-            <a:endParaRPr lang="en-US" sz="950" dirty="0"/>
+              <a:t>Fixed prompt structure: Role → Owner notes → Memory Brief → Retrieved chunks → Rules. All ingested content sanitised before reaching the LLM. Injection patterns stripped. Model speaks from knowledge — not as an assistant managing a library.</a:t>
+            </a:r>
+            <a:endParaRPr lang="en-US" sz="880" dirty="0"/>
           </a:p>
         </p:txBody>
       </p:sp>
@@ -4497,8 +4315,8 @@
         </p:nvSpPr>
         <p:spPr>
           <a:xfrm>
-            <a:off x="4846320" y="1207008"/>
-            <a:ext cx="3931920" cy="749808"/>
+            <a:off x="4846320" y="1170432"/>
+            <a:ext cx="3931920" cy="713232"/>
           </a:xfrm>
           <a:prstGeom prst="rect">
             <a:avLst/>
@@ -4513,9 +4331,9 @@
             <a:prstDash val="solid"/>
           </a:ln>
           <a:effectLst>
-            <a:outerShdw sx="100000" sy="100000" kx="0" ky="0" algn="bl" rotWithShape="0" blurRad="127000" dist="38100" dir="8100000">
+            <a:outerShdw sx="100000" sy="100000" kx="0" ky="0" algn="bl" rotWithShape="0" blurRad="101600" dist="25400" dir="8100000">
               <a:srgbClr val="000000">
-                <a:alpha val="22000"/>
+                <a:alpha val="18000"/>
               </a:srgbClr>
             </a:outerShdw>
           </a:effectLst>
@@ -4529,8 +4347,8 @@
         </p:nvSpPr>
         <p:spPr>
           <a:xfrm>
-            <a:off x="4846320" y="1207008"/>
-            <a:ext cx="45720" cy="749808"/>
+            <a:off x="4846320" y="1170432"/>
+            <a:ext cx="45720" cy="713232"/>
           </a:xfrm>
           <a:prstGeom prst="rect">
             <a:avLst/>
@@ -4554,24 +4372,24 @@
         </p:nvSpPr>
         <p:spPr>
           <a:xfrm>
-            <a:off x="4974336" y="1280160"/>
-            <a:ext cx="3657600" cy="237744"/>
-          </a:xfrm>
-          <a:prstGeom prst="rect">
-            <a:avLst/>
-          </a:prstGeom>
-          <a:noFill/>
-          <a:ln/>
-        </p:spPr>
-        <p:txBody>
-          <a:bodyPr wrap="square" lIns="0" tIns="0" rIns="0" bIns="0" rtlCol="0" anchor="ctr"/>
-          <a:lstStyle/>
-          <a:p>
-            <a:pPr indent="0" marL="0">
-              <a:buNone/>
-            </a:pPr>
-            <a:r>
-              <a:rPr lang="en-US" sz="1200" b="1" dirty="0">
+            <a:off x="4974336" y="1225296"/>
+            <a:ext cx="3694176" cy="219456"/>
+          </a:xfrm>
+          <a:prstGeom prst="rect">
+            <a:avLst/>
+          </a:prstGeom>
+          <a:noFill/>
+          <a:ln/>
+        </p:spPr>
+        <p:txBody>
+          <a:bodyPr wrap="square" lIns="0" tIns="0" rIns="0" bIns="0" rtlCol="0" anchor="ctr"/>
+          <a:lstStyle/>
+          <a:p>
+            <a:pPr indent="0" marL="0">
+              <a:buNone/>
+            </a:pPr>
+            <a:r>
+              <a:rPr lang="en-US" sz="1100" b="1" dirty="0">
                 <a:solidFill>
                   <a:srgbClr val="111827"/>
                 </a:solidFill>
@@ -4579,9 +4397,9 @@
                 <a:ea typeface="Calibri" pitchFamily="34" charset="-122"/>
                 <a:cs typeface="Calibri" pitchFamily="34" charset="-120"/>
               </a:rPr>
-              <a:t>5. Verify</a:t>
-            </a:r>
-            <a:endParaRPr lang="en-US" sz="1200" dirty="0"/>
+              <a:t>5. Evidence verification</a:t>
+            </a:r>
+            <a:endParaRPr lang="en-US" sz="1100" dirty="0"/>
           </a:p>
         </p:txBody>
       </p:sp>
@@ -4593,24 +4411,24 @@
         </p:nvSpPr>
         <p:spPr>
           <a:xfrm>
-            <a:off x="4974336" y="1554480"/>
-            <a:ext cx="3657600" cy="329184"/>
-          </a:xfrm>
-          <a:prstGeom prst="rect">
-            <a:avLst/>
-          </a:prstGeom>
-          <a:noFill/>
-          <a:ln/>
-        </p:spPr>
-        <p:txBody>
-          <a:bodyPr wrap="square" lIns="0" tIns="0" rIns="0" bIns="0" rtlCol="0" anchor="ctr"/>
-          <a:lstStyle/>
-          <a:p>
-            <a:pPr indent="0" marL="0">
-              <a:buNone/>
-            </a:pPr>
-            <a:r>
-              <a:rPr lang="en-US" sz="950" dirty="0">
+            <a:off x="4974336" y="1472184"/>
+            <a:ext cx="3694176" cy="384048"/>
+          </a:xfrm>
+          <a:prstGeom prst="rect">
+            <a:avLst/>
+          </a:prstGeom>
+          <a:noFill/>
+          <a:ln/>
+        </p:spPr>
+        <p:txBody>
+          <a:bodyPr wrap="square" lIns="0" tIns="0" rIns="0" bIns="0" rtlCol="0" anchor="ctr"/>
+          <a:lstStyle/>
+          <a:p>
+            <a:pPr indent="0" marL="0">
+              <a:buNone/>
+            </a:pPr>
+            <a:r>
+              <a:rPr lang="en-US" sz="880" dirty="0">
                 <a:solidFill>
                   <a:srgbClr val="6B7280"/>
                 </a:solidFill>
@@ -4618,9 +4436,9 @@
                 <a:ea typeface="Calibri" pitchFamily="34" charset="-122"/>
                 <a:cs typeface="Calibri" pitchFamily="34" charset="-120"/>
               </a:rPr>
-              <a:t>Grounded references, workspace section discipline, bounded-negative phrasing</a:t>
-            </a:r>
-            <a:endParaRPr lang="en-US" sz="950" dirty="0"/>
+              <a:t>Synchronous. Checks that the answer references real indexed content. On failure: bounded regeneration with explicit feedback injected into the retry prompt — before anything is persisted.</a:t>
+            </a:r>
+            <a:endParaRPr lang="en-US" sz="880" dirty="0"/>
           </a:p>
         </p:txBody>
       </p:sp>
@@ -4632,14 +4450,14 @@
         </p:nvSpPr>
         <p:spPr>
           <a:xfrm>
-            <a:off x="6812280" y="1956816"/>
-            <a:ext cx="0" cy="118872"/>
+            <a:off x="6812280" y="1883664"/>
+            <a:ext cx="0" cy="54864"/>
           </a:xfrm>
           <a:prstGeom prst="line">
             <a:avLst/>
           </a:prstGeom>
           <a:noFill/>
-          <a:ln w="19050">
+          <a:ln w="12700">
             <a:solidFill>
               <a:srgbClr val="CBD5E1"/>
             </a:solidFill>
@@ -4655,8 +4473,8 @@
         </p:nvSpPr>
         <p:spPr>
           <a:xfrm>
-            <a:off x="4846320" y="2075688"/>
-            <a:ext cx="3931920" cy="749808"/>
+            <a:off x="4846320" y="1938528"/>
+            <a:ext cx="3931920" cy="713232"/>
           </a:xfrm>
           <a:prstGeom prst="rect">
             <a:avLst/>
@@ -4671,9 +4489,9 @@
             <a:prstDash val="solid"/>
           </a:ln>
           <a:effectLst>
-            <a:outerShdw sx="100000" sy="100000" kx="0" ky="0" algn="bl" rotWithShape="0" blurRad="127000" dist="38100" dir="8100000">
+            <a:outerShdw sx="100000" sy="100000" kx="0" ky="0" algn="bl" rotWithShape="0" blurRad="101600" dist="25400" dir="8100000">
               <a:srgbClr val="000000">
-                <a:alpha val="22000"/>
+                <a:alpha val="18000"/>
               </a:srgbClr>
             </a:outerShdw>
           </a:effectLst>
@@ -4687,8 +4505,8 @@
         </p:nvSpPr>
         <p:spPr>
           <a:xfrm>
-            <a:off x="4846320" y="2075688"/>
-            <a:ext cx="45720" cy="749808"/>
+            <a:off x="4846320" y="1938528"/>
+            <a:ext cx="45720" cy="713232"/>
           </a:xfrm>
           <a:prstGeom prst="rect">
             <a:avLst/>
@@ -4712,24 +4530,24 @@
         </p:nvSpPr>
         <p:spPr>
           <a:xfrm>
-            <a:off x="4974336" y="2148840"/>
-            <a:ext cx="3657600" cy="237744"/>
-          </a:xfrm>
-          <a:prstGeom prst="rect">
-            <a:avLst/>
-          </a:prstGeom>
-          <a:noFill/>
-          <a:ln/>
-        </p:spPr>
-        <p:txBody>
-          <a:bodyPr wrap="square" lIns="0" tIns="0" rIns="0" bIns="0" rtlCol="0" anchor="ctr"/>
-          <a:lstStyle/>
-          <a:p>
-            <a:pPr indent="0" marL="0">
-              <a:buNone/>
-            </a:pPr>
-            <a:r>
-              <a:rPr lang="en-US" sz="1200" b="1" dirty="0">
+            <a:off x="4974336" y="1993392"/>
+            <a:ext cx="3694176" cy="219456"/>
+          </a:xfrm>
+          <a:prstGeom prst="rect">
+            <a:avLst/>
+          </a:prstGeom>
+          <a:noFill/>
+          <a:ln/>
+        </p:spPr>
+        <p:txBody>
+          <a:bodyPr wrap="square" lIns="0" tIns="0" rIns="0" bIns="0" rtlCol="0" anchor="ctr"/>
+          <a:lstStyle/>
+          <a:p>
+            <a:pPr indent="0" marL="0">
+              <a:buNone/>
+            </a:pPr>
+            <a:r>
+              <a:rPr lang="en-US" sz="1100" b="1" dirty="0">
                 <a:solidFill>
                   <a:srgbClr val="111827"/>
                 </a:solidFill>
@@ -4739,7 +4557,7 @@
               </a:rPr>
               <a:t>6. Active quality gate</a:t>
             </a:r>
-            <a:endParaRPr lang="en-US" sz="1200" dirty="0"/>
+            <a:endParaRPr lang="en-US" sz="1100" dirty="0"/>
           </a:p>
         </p:txBody>
       </p:sp>
@@ -4751,24 +4569,24 @@
         </p:nvSpPr>
         <p:spPr>
           <a:xfrm>
-            <a:off x="4974336" y="2423160"/>
-            <a:ext cx="3657600" cy="329184"/>
-          </a:xfrm>
-          <a:prstGeom prst="rect">
-            <a:avLst/>
-          </a:prstGeom>
-          <a:noFill/>
-          <a:ln/>
-        </p:spPr>
-        <p:txBody>
-          <a:bodyPr wrap="square" lIns="0" tIns="0" rIns="0" bIns="0" rtlCol="0" anchor="ctr"/>
-          <a:lstStyle/>
-          <a:p>
-            <a:pPr indent="0" marL="0">
-              <a:buNone/>
-            </a:pPr>
-            <a:r>
-              <a:rPr lang="en-US" sz="950" dirty="0">
+            <a:off x="4974336" y="2240280"/>
+            <a:ext cx="3694176" cy="384048"/>
+          </a:xfrm>
+          <a:prstGeom prst="rect">
+            <a:avLst/>
+          </a:prstGeom>
+          <a:noFill/>
+          <a:ln/>
+        </p:spPr>
+        <p:txBody>
+          <a:bodyPr wrap="square" lIns="0" tIns="0" rIns="0" bIns="0" rtlCol="0" anchor="ctr"/>
+          <a:lstStyle/>
+          <a:p>
+            <a:pPr indent="0" marL="0">
+              <a:buNone/>
+            </a:pPr>
+            <a:r>
+              <a:rPr lang="en-US" sz="880" dirty="0">
                 <a:solidFill>
                   <a:srgbClr val="6B7280"/>
                 </a:solidFill>
@@ -4776,9 +4594,9 @@
                 <a:ea typeface="Calibri" pitchFamily="34" charset="-122"/>
                 <a:cs typeface="Calibri" pitchFamily="34" charset="-120"/>
               </a:rPr>
-              <a:t>Sync LLM judge (Pydantic ResponseQualityGate) → reject? → bounded regen + re-verify before persist</a:t>
-            </a:r>
-            <a:endParaRPr lang="en-US" sz="950" dirty="0"/>
+              <a:t>Synchronous LLM judge. Returns ResponseQualityGate — Pydantic (extra='forbid'): is_acceptable: bool, feedback: str. If rejected: bounded regen + re-verify. This loop runs before the answer is saved. Bad answers never reach the user.</a:t>
+            </a:r>
+            <a:endParaRPr lang="en-US" sz="880" dirty="0"/>
           </a:p>
         </p:txBody>
       </p:sp>
@@ -4790,14 +4608,14 @@
         </p:nvSpPr>
         <p:spPr>
           <a:xfrm>
-            <a:off x="6812280" y="2825496"/>
-            <a:ext cx="0" cy="118872"/>
+            <a:off x="6812280" y="2651760"/>
+            <a:ext cx="0" cy="54864"/>
           </a:xfrm>
           <a:prstGeom prst="line">
             <a:avLst/>
           </a:prstGeom>
           <a:noFill/>
-          <a:ln w="19050">
+          <a:ln w="12700">
             <a:solidFill>
               <a:srgbClr val="CBD5E1"/>
             </a:solidFill>
@@ -4813,8 +4631,8 @@
         </p:nvSpPr>
         <p:spPr>
           <a:xfrm>
-            <a:off x="4846320" y="2944368"/>
-            <a:ext cx="3931920" cy="749808"/>
+            <a:off x="4846320" y="2706624"/>
+            <a:ext cx="3931920" cy="713232"/>
           </a:xfrm>
           <a:prstGeom prst="rect">
             <a:avLst/>
@@ -4829,9 +4647,9 @@
             <a:prstDash val="solid"/>
           </a:ln>
           <a:effectLst>
-            <a:outerShdw sx="100000" sy="100000" kx="0" ky="0" algn="bl" rotWithShape="0" blurRad="127000" dist="38100" dir="8100000">
+            <a:outerShdw sx="100000" sy="100000" kx="0" ky="0" algn="bl" rotWithShape="0" blurRad="101600" dist="25400" dir="8100000">
               <a:srgbClr val="000000">
-                <a:alpha val="22000"/>
+                <a:alpha val="18000"/>
               </a:srgbClr>
             </a:outerShdw>
           </a:effectLst>
@@ -4845,8 +4663,8 @@
         </p:nvSpPr>
         <p:spPr>
           <a:xfrm>
-            <a:off x="4846320" y="2944368"/>
-            <a:ext cx="45720" cy="749808"/>
+            <a:off x="4846320" y="2706624"/>
+            <a:ext cx="45720" cy="713232"/>
           </a:xfrm>
           <a:prstGeom prst="rect">
             <a:avLst/>
@@ -4870,24 +4688,24 @@
         </p:nvSpPr>
         <p:spPr>
           <a:xfrm>
-            <a:off x="4974336" y="3017520"/>
-            <a:ext cx="3657600" cy="237744"/>
-          </a:xfrm>
-          <a:prstGeom prst="rect">
-            <a:avLst/>
-          </a:prstGeom>
-          <a:noFill/>
-          <a:ln/>
-        </p:spPr>
-        <p:txBody>
-          <a:bodyPr wrap="square" lIns="0" tIns="0" rIns="0" bIns="0" rtlCol="0" anchor="ctr"/>
-          <a:lstStyle/>
-          <a:p>
-            <a:pPr indent="0" marL="0">
-              <a:buNone/>
-            </a:pPr>
-            <a:r>
-              <a:rPr lang="en-US" sz="1200" b="1" dirty="0">
+            <a:off x="4974336" y="2761488"/>
+            <a:ext cx="3694176" cy="219456"/>
+          </a:xfrm>
+          <a:prstGeom prst="rect">
+            <a:avLst/>
+          </a:prstGeom>
+          <a:noFill/>
+          <a:ln/>
+        </p:spPr>
+        <p:txBody>
+          <a:bodyPr wrap="square" lIns="0" tIns="0" rIns="0" bIns="0" rtlCol="0" anchor="ctr"/>
+          <a:lstStyle/>
+          <a:p>
+            <a:pPr indent="0" marL="0">
+              <a:buNone/>
+            </a:pPr>
+            <a:r>
+              <a:rPr lang="en-US" sz="1100" b="1" dirty="0">
                 <a:solidFill>
                   <a:srgbClr val="111827"/>
                 </a:solidFill>
@@ -4897,7 +4715,7 @@
               </a:rPr>
               <a:t>7. Persist + respond</a:t>
             </a:r>
-            <a:endParaRPr lang="en-US" sz="1200" dirty="0"/>
+            <a:endParaRPr lang="en-US" sz="1100" dirty="0"/>
           </a:p>
         </p:txBody>
       </p:sp>
@@ -4909,24 +4727,24 @@
         </p:nvSpPr>
         <p:spPr>
           <a:xfrm>
-            <a:off x="4974336" y="3291840"/>
-            <a:ext cx="3657600" cy="329184"/>
-          </a:xfrm>
-          <a:prstGeom prst="rect">
-            <a:avLst/>
-          </a:prstGeom>
-          <a:noFill/>
-          <a:ln/>
-        </p:spPr>
-        <p:txBody>
-          <a:bodyPr wrap="square" lIns="0" tIns="0" rIns="0" bIns="0" rtlCol="0" anchor="ctr"/>
-          <a:lstStyle/>
-          <a:p>
-            <a:pPr indent="0" marL="0">
-              <a:buNone/>
-            </a:pPr>
-            <a:r>
-              <a:rPr lang="en-US" sz="950" dirty="0">
+            <a:off x="4974336" y="3008376"/>
+            <a:ext cx="3694176" cy="384048"/>
+          </a:xfrm>
+          <a:prstGeom prst="rect">
+            <a:avLst/>
+          </a:prstGeom>
+          <a:noFill/>
+          <a:ln/>
+        </p:spPr>
+        <p:txBody>
+          <a:bodyPr wrap="square" lIns="0" tIns="0" rIns="0" bIns="0" rtlCol="0" anchor="ctr"/>
+          <a:lstStyle/>
+          <a:p>
+            <a:pPr indent="0" marL="0">
+              <a:buNone/>
+            </a:pPr>
+            <a:r>
+              <a:rPr lang="en-US" sz="880" dirty="0">
                 <a:solidFill>
                   <a:srgbClr val="6B7280"/>
                 </a:solidFill>
@@ -4934,9 +4752,9 @@
                 <a:ea typeface="Calibri" pitchFamily="34" charset="-122"/>
                 <a:cs typeface="Calibri" pitchFamily="34" charset="-120"/>
               </a:rPr>
-              <a:t>Message row + chunk IDs for audit; latency budget logged</a:t>
-            </a:r>
-            <a:endParaRPr lang="en-US" sz="950" dirty="0"/>
+              <a:t>Message row written with chunk IDs — full audit trail. Async Langfuse dimensional scoring runs after response is sent (non-blocking, never adds latency).</a:t>
+            </a:r>
+            <a:endParaRPr lang="en-US" sz="880" dirty="0"/>
           </a:p>
         </p:txBody>
       </p:sp>
@@ -4948,31 +4766,34 @@
         </p:nvSpPr>
         <p:spPr>
           <a:xfrm>
-            <a:off x="457200" y="4645152"/>
-            <a:ext cx="8229600" cy="320040"/>
-          </a:xfrm>
-          <a:prstGeom prst="rect">
-            <a:avLst/>
-          </a:prstGeom>
-          <a:noFill/>
-          <a:ln/>
-        </p:spPr>
-        <p:txBody>
-          <a:bodyPr wrap="square" lIns="0" tIns="0" rIns="0" bIns="0" rtlCol="0" anchor="ctr"/>
-          <a:lstStyle/>
-          <a:p>
-            <a:pPr indent="0" marL="0">
-              <a:buNone/>
-            </a:pPr>
-            <a:r>
-              <a:rPr lang="en-US" sz="1100" b="1" i="1" dirty="0">
+            <a:off x="457200" y="4636008"/>
+            <a:ext cx="8229600" cy="384048"/>
+          </a:xfrm>
+          <a:prstGeom prst="rect">
+            <a:avLst/>
+          </a:prstGeom>
+          <a:noFill/>
+          <a:ln/>
+        </p:spPr>
+        <p:txBody>
+          <a:bodyPr wrap="square" lIns="0" tIns="0" rIns="0" bIns="0" rtlCol="0" anchor="ctr"/>
+          <a:lstStyle/>
+          <a:p>
+            <a:pPr indent="0" marL="0">
+              <a:buNone/>
+            </a:pPr>
+            <a:r>
+              <a:rPr lang="en-US" sz="1000" i="1" dirty="0">
                 <a:solidFill>
                   <a:srgbClr val="6366F1"/>
                 </a:solidFill>
-              </a:rPr>
-              <a:t>Retrieval modes x verifier retries x gate loops — correctness over raw fluency.</a:t>
-            </a:r>
-            <a:endParaRPr lang="en-US" sz="1100" dirty="0"/>
+                <a:latin typeface="Calibri" pitchFamily="34" charset="0"/>
+                <a:ea typeface="Calibri" pitchFamily="34" charset="-122"/>
+                <a:cs typeface="Calibri" pitchFamily="34" charset="-120"/>
+              </a:rPr>
+              <a:t>Why hybrid not vector-only? Vector catches meaning but misses exact names. Full-text catches those but misses paraphrased queries. Together, precision is meaningfully higher — at zero extra cost since both run on the same Postgres instance.</a:t>
+            </a:r>
+            <a:endParaRPr lang="en-US" sz="1000" dirty="0"/>
           </a:p>
         </p:txBody>
       </p:sp>
@@ -5042,7 +4863,7 @@
         <p:spPr>
           <a:xfrm>
             <a:off x="457200" y="182880"/>
-            <a:ext cx="8229600" cy="256032"/>
+            <a:ext cx="8229600" cy="237744"/>
           </a:xfrm>
           <a:prstGeom prst="rect">
             <a:avLst/>
@@ -5063,7 +4884,7 @@
                   <a:srgbClr val="F59E0B"/>
                 </a:solidFill>
               </a:rPr>
-              <a:t>PROMPTS, QUALITY &amp; EVALUATION</a:t>
+              <a:t>QUALITY &amp; EVALUATION</a:t>
             </a:r>
             <a:endParaRPr lang="en-US" sz="900" dirty="0"/>
           </a:p>
@@ -5077,8 +4898,8 @@
         </p:nvSpPr>
         <p:spPr>
           <a:xfrm>
-            <a:off x="457200" y="475488"/>
-            <a:ext cx="8229600" cy="594360"/>
+            <a:off x="457200" y="457200"/>
+            <a:ext cx="8229600" cy="566928"/>
           </a:xfrm>
           <a:prstGeom prst="rect">
             <a:avLst/>
@@ -5094,7 +4915,7 @@
               <a:buNone/>
             </a:pPr>
             <a:r>
-              <a:rPr lang="en-US" sz="2500" b="1" dirty="0">
+              <a:rPr lang="en-US" sz="2200" b="1" dirty="0">
                 <a:solidFill>
                   <a:srgbClr val="F1F5F9"/>
                 </a:solidFill>
@@ -5102,9 +4923,9 @@
                 <a:ea typeface="Calibri" pitchFamily="34" charset="-122"/>
                 <a:cs typeface="Calibri" pitchFamily="34" charset="-120"/>
               </a:rPr>
-              <a:t>Four interlocking quality layers.</a:t>
-            </a:r>
-            <a:endParaRPr lang="en-US" sz="2500" dirty="0"/>
+              <a:t>Four layers between a question and a persisted answer.</a:t>
+            </a:r>
+            <a:endParaRPr lang="en-US" sz="2200" dirty="0"/>
           </a:p>
         </p:txBody>
       </p:sp>
@@ -5116,8 +4937,8 @@
         </p:nvSpPr>
         <p:spPr>
           <a:xfrm>
-            <a:off x="347472" y="1188720"/>
-            <a:ext cx="2011680" cy="3639312"/>
+            <a:off x="256032" y="1170432"/>
+            <a:ext cx="2011680" cy="3520440"/>
           </a:xfrm>
           <a:prstGeom prst="rect">
             <a:avLst/>
@@ -5132,9 +4953,9 @@
             <a:prstDash val="solid"/>
           </a:ln>
           <a:effectLst>
-            <a:outerShdw sx="100000" sy="100000" kx="0" ky="0" algn="bl" rotWithShape="0" blurRad="127000" dist="38100" dir="8100000">
+            <a:outerShdw sx="100000" sy="100000" kx="0" ky="0" algn="bl" rotWithShape="0" blurRad="101600" dist="25400" dir="8100000">
               <a:srgbClr val="000000">
-                <a:alpha val="22000"/>
+                <a:alpha val="18000"/>
               </a:srgbClr>
             </a:outerShdw>
           </a:effectLst>
@@ -5148,7 +4969,7 @@
         </p:nvSpPr>
         <p:spPr>
           <a:xfrm>
-            <a:off x="347472" y="1188720"/>
+            <a:off x="256032" y="1170432"/>
             <a:ext cx="2011680" cy="54864"/>
           </a:xfrm>
           <a:prstGeom prst="rect">
@@ -5173,8 +4994,8 @@
         </p:nvSpPr>
         <p:spPr>
           <a:xfrm>
-            <a:off x="438912" y="1261872"/>
-            <a:ext cx="1828800" cy="502920"/>
+            <a:off x="347472" y="1243584"/>
+            <a:ext cx="1828800" cy="420624"/>
           </a:xfrm>
           <a:prstGeom prst="rect">
             <a:avLst/>
@@ -5198,7 +5019,7 @@
                 <a:ea typeface="Calibri" pitchFamily="34" charset="-122"/>
                 <a:cs typeface="Calibri" pitchFamily="34" charset="-120"/>
               </a:rPr>
-              <a:t>1  Evidence verifier</a:t>
+              <a:t>1. Evidence Verifier</a:t>
             </a:r>
             <a:endParaRPr lang="en-US" sz="1050" dirty="0"/>
           </a:p>
@@ -5212,8 +5033,8 @@
         </p:nvSpPr>
         <p:spPr>
           <a:xfrm>
-            <a:off x="438912" y="1810512"/>
-            <a:ext cx="1828800" cy="594360"/>
+            <a:off x="347472" y="1700784"/>
+            <a:ext cx="1828800" cy="493776"/>
           </a:xfrm>
           <a:prstGeom prst="rect">
             <a:avLst/>
@@ -5229,7 +5050,7 @@
               <a:buNone/>
             </a:pPr>
             <a:r>
-              <a:rPr lang="en-US" sz="900" dirty="0">
+              <a:rPr lang="en-US" sz="880" dirty="0">
                 <a:solidFill>
                   <a:srgbClr val="94A3B8"/>
                 </a:solidFill>
@@ -5237,9 +5058,9 @@
                 <a:ea typeface="Calibri" pitchFamily="34" charset="-122"/>
                 <a:cs typeface="Calibri" pitchFamily="34" charset="-120"/>
               </a:rPr>
-              <a:t>— Runs on every non-deterministic LLM path</a:t>
-            </a:r>
-            <a:endParaRPr lang="en-US" sz="900" dirty="0"/>
+              <a:t>— Synchronous on every non-deterministic LLM path</a:t>
+            </a:r>
+            <a:endParaRPr lang="en-US" sz="880" dirty="0"/>
           </a:p>
         </p:txBody>
       </p:sp>
@@ -5251,8 +5072,8 @@
         </p:nvSpPr>
         <p:spPr>
           <a:xfrm>
-            <a:off x="438912" y="2478024"/>
-            <a:ext cx="1828800" cy="594360"/>
+            <a:off x="347472" y="2258568"/>
+            <a:ext cx="1828800" cy="493776"/>
           </a:xfrm>
           <a:prstGeom prst="rect">
             <a:avLst/>
@@ -5268,7 +5089,7 @@
               <a:buNone/>
             </a:pPr>
             <a:r>
-              <a:rPr lang="en-US" sz="900" dirty="0">
+              <a:rPr lang="en-US" sz="880" dirty="0">
                 <a:solidFill>
                   <a:srgbClr val="94A3B8"/>
                 </a:solidFill>
@@ -5276,9 +5097,9 @@
                 <a:ea typeface="Calibri" pitchFamily="34" charset="-122"/>
                 <a:cs typeface="Calibri" pitchFamily="34" charset="-120"/>
               </a:rPr>
-              <a:t>— Enforces grounded file/symbol references</a:t>
-            </a:r>
-            <a:endParaRPr lang="en-US" sz="900" dirty="0"/>
+              <a:t>— Enforces answers reference real indexed content</a:t>
+            </a:r>
+            <a:endParaRPr lang="en-US" sz="880" dirty="0"/>
           </a:p>
         </p:txBody>
       </p:sp>
@@ -5290,8 +5111,8 @@
         </p:nvSpPr>
         <p:spPr>
           <a:xfrm>
-            <a:off x="438912" y="3145536"/>
-            <a:ext cx="1828800" cy="594360"/>
+            <a:off x="347472" y="2816352"/>
+            <a:ext cx="1828800" cy="493776"/>
           </a:xfrm>
           <a:prstGeom prst="rect">
             <a:avLst/>
@@ -5307,7 +5128,7 @@
               <a:buNone/>
             </a:pPr>
             <a:r>
-              <a:rPr lang="en-US" sz="900" dirty="0">
+              <a:rPr lang="en-US" sz="880" dirty="0">
                 <a:solidFill>
                   <a:srgbClr val="94A3B8"/>
                 </a:solidFill>
@@ -5315,9 +5136,9 @@
                 <a:ea typeface="Calibri" pitchFamily="34" charset="-122"/>
                 <a:cs typeface="Calibri" pitchFamily="34" charset="-120"/>
               </a:rPr>
-              <a:t>— Workspace answers skip per-project ## headers on conversational turns</a:t>
-            </a:r>
-            <a:endParaRPr lang="en-US" sz="900" dirty="0"/>
+              <a:t>— On failure: bounded regen with explicit correction before user sees anything</a:t>
+            </a:r>
+            <a:endParaRPr lang="en-US" sz="880" dirty="0"/>
           </a:p>
         </p:txBody>
       </p:sp>
@@ -5329,8 +5150,8 @@
         </p:nvSpPr>
         <p:spPr>
           <a:xfrm>
-            <a:off x="438912" y="3813048"/>
-            <a:ext cx="1828800" cy="594360"/>
+            <a:off x="347472" y="3374136"/>
+            <a:ext cx="1828800" cy="493776"/>
           </a:xfrm>
           <a:prstGeom prst="rect">
             <a:avLst/>
@@ -5346,7 +5167,7 @@
               <a:buNone/>
             </a:pPr>
             <a:r>
-              <a:rPr lang="en-US" sz="900" dirty="0">
+              <a:rPr lang="en-US" sz="880" dirty="0">
                 <a:solidFill>
                   <a:srgbClr val="94A3B8"/>
                 </a:solidFill>
@@ -5354,9 +5175,9 @@
                 <a:ea typeface="Calibri" pitchFamily="34" charset="-122"/>
                 <a:cs typeface="Calibri" pitchFamily="34" charset="-120"/>
               </a:rPr>
-              <a:t>— Verifier-requested regeneration loops before user sees anything</a:t>
-            </a:r>
-            <a:endParaRPr lang="en-US" sz="900" dirty="0"/>
+              <a:t>— Workspace conversational turns skip internal headers so answers read naturally</a:t>
+            </a:r>
+            <a:endParaRPr lang="en-US" sz="880" dirty="0"/>
           </a:p>
         </p:txBody>
       </p:sp>
@@ -5368,8 +5189,8 @@
         </p:nvSpPr>
         <p:spPr>
           <a:xfrm>
-            <a:off x="2523744" y="1188720"/>
-            <a:ext cx="2011680" cy="3639312"/>
+            <a:off x="2432304" y="1170432"/>
+            <a:ext cx="2011680" cy="3520440"/>
           </a:xfrm>
           <a:prstGeom prst="rect">
             <a:avLst/>
@@ -5384,9 +5205,9 @@
             <a:prstDash val="solid"/>
           </a:ln>
           <a:effectLst>
-            <a:outerShdw sx="100000" sy="100000" kx="0" ky="0" algn="bl" rotWithShape="0" blurRad="127000" dist="38100" dir="8100000">
+            <a:outerShdw sx="100000" sy="100000" kx="0" ky="0" algn="bl" rotWithShape="0" blurRad="101600" dist="25400" dir="8100000">
               <a:srgbClr val="000000">
-                <a:alpha val="22000"/>
+                <a:alpha val="18000"/>
               </a:srgbClr>
             </a:outerShdw>
           </a:effectLst>
@@ -5400,7 +5221,7 @@
         </p:nvSpPr>
         <p:spPr>
           <a:xfrm>
-            <a:off x="2523744" y="1188720"/>
+            <a:off x="2432304" y="1170432"/>
             <a:ext cx="2011680" cy="54864"/>
           </a:xfrm>
           <a:prstGeom prst="rect">
@@ -5425,8 +5246,8 @@
         </p:nvSpPr>
         <p:spPr>
           <a:xfrm>
-            <a:off x="2615184" y="1261872"/>
-            <a:ext cx="1828800" cy="502920"/>
+            <a:off x="2523744" y="1243584"/>
+            <a:ext cx="1828800" cy="420624"/>
           </a:xfrm>
           <a:prstGeom prst="rect">
             <a:avLst/>
@@ -5450,7 +5271,7 @@
                 <a:ea typeface="Calibri" pitchFamily="34" charset="-122"/>
                 <a:cs typeface="Calibri" pitchFamily="34" charset="-120"/>
               </a:rPr>
-              <a:t>2  Active quality gate</a:t>
+              <a:t>2. Active Quality Gate</a:t>
             </a:r>
             <a:endParaRPr lang="en-US" sz="1050" dirty="0"/>
           </a:p>
@@ -5464,8 +5285,8 @@
         </p:nvSpPr>
         <p:spPr>
           <a:xfrm>
-            <a:off x="2615184" y="1810512"/>
-            <a:ext cx="1828800" cy="594360"/>
+            <a:off x="2523744" y="1700784"/>
+            <a:ext cx="1828800" cy="493776"/>
           </a:xfrm>
           <a:prstGeom prst="rect">
             <a:avLst/>
@@ -5481,7 +5302,7 @@
               <a:buNone/>
             </a:pPr>
             <a:r>
-              <a:rPr lang="en-US" sz="900" dirty="0">
+              <a:rPr lang="en-US" sz="880" dirty="0">
                 <a:solidFill>
                   <a:srgbClr val="94A3B8"/>
                 </a:solidFill>
@@ -5489,9 +5310,9 @@
                 <a:ea typeface="Calibri" pitchFamily="34" charset="-122"/>
                 <a:cs typeface="Calibri" pitchFamily="34" charset="-120"/>
               </a:rPr>
-              <a:t>— CHAT_QUALITY_GATE_ENABLED (default on in config)</a:t>
-            </a:r>
-            <a:endParaRPr lang="en-US" sz="900" dirty="0"/>
+              <a:t>— CHAT_QUALITY_GATE_ENABLED — on by default</a:t>
+            </a:r>
+            <a:endParaRPr lang="en-US" sz="880" dirty="0"/>
           </a:p>
         </p:txBody>
       </p:sp>
@@ -5503,8 +5324,8 @@
         </p:nvSpPr>
         <p:spPr>
           <a:xfrm>
-            <a:off x="2615184" y="2478024"/>
-            <a:ext cx="1828800" cy="594360"/>
+            <a:off x="2523744" y="2258568"/>
+            <a:ext cx="1828800" cy="493776"/>
           </a:xfrm>
           <a:prstGeom prst="rect">
             <a:avLst/>
@@ -5520,7 +5341,7 @@
               <a:buNone/>
             </a:pPr>
             <a:r>
-              <a:rPr lang="en-US" sz="900" dirty="0">
+              <a:rPr lang="en-US" sz="880" dirty="0">
                 <a:solidFill>
                   <a:srgbClr val="94A3B8"/>
                 </a:solidFill>
@@ -5528,9 +5349,9 @@
                 <a:ea typeface="Calibri" pitchFamily="34" charset="-122"/>
                 <a:cs typeface="Calibri" pitchFamily="34" charset="-120"/>
               </a:rPr>
-              <a:t>— Synchronous LLM judge — JSON validated by ResponseQualityGate</a:t>
-            </a:r>
-            <a:endParaRPr lang="en-US" sz="900" dirty="0"/>
+              <a:t>— Synchronous LLM judge → ResponseQualityGate (Pydantic, extra='forbid')</a:t>
+            </a:r>
+            <a:endParaRPr lang="en-US" sz="880" dirty="0"/>
           </a:p>
         </p:txBody>
       </p:sp>
@@ -5542,8 +5363,8 @@
         </p:nvSpPr>
         <p:spPr>
           <a:xfrm>
-            <a:off x="2615184" y="3145536"/>
-            <a:ext cx="1828800" cy="594360"/>
+            <a:off x="2523744" y="2816352"/>
+            <a:ext cx="1828800" cy="493776"/>
           </a:xfrm>
           <a:prstGeom prst="rect">
             <a:avLst/>
@@ -5559,7 +5380,7 @@
               <a:buNone/>
             </a:pPr>
             <a:r>
-              <a:rPr lang="en-US" sz="900" dirty="0">
+              <a:rPr lang="en-US" sz="880" dirty="0">
                 <a:solidFill>
                   <a:srgbClr val="94A3B8"/>
                 </a:solidFill>
@@ -5567,9 +5388,9 @@
                 <a:ea typeface="Calibri" pitchFamily="34" charset="-122"/>
                 <a:cs typeface="Calibri" pitchFamily="34" charset="-120"/>
               </a:rPr>
-              <a:t>— Pydantic (extra='forbid'): is_acceptable: bool, feedback: str</a:t>
-            </a:r>
-            <a:endParaRPr lang="en-US" sz="900" dirty="0"/>
+              <a:t>— is_acceptable: bool, feedback: str</a:t>
+            </a:r>
+            <a:endParaRPr lang="en-US" sz="880" dirty="0"/>
           </a:p>
         </p:txBody>
       </p:sp>
@@ -5581,8 +5402,8 @@
         </p:nvSpPr>
         <p:spPr>
           <a:xfrm>
-            <a:off x="2615184" y="3813048"/>
-            <a:ext cx="1828800" cy="594360"/>
+            <a:off x="2523744" y="3374136"/>
+            <a:ext cx="1828800" cy="493776"/>
           </a:xfrm>
           <a:prstGeom prst="rect">
             <a:avLst/>
@@ -5598,7 +5419,7 @@
               <a:buNone/>
             </a:pPr>
             <a:r>
-              <a:rPr lang="en-US" sz="900" dirty="0">
+              <a:rPr lang="en-US" sz="880" dirty="0">
                 <a:solidFill>
                   <a:srgbClr val="94A3B8"/>
                 </a:solidFill>
@@ -5606,22 +5427,61 @@
                 <a:ea typeface="Calibri" pitchFamily="34" charset="-122"/>
                 <a:cs typeface="Calibri" pitchFamily="34" charset="-120"/>
               </a:rPr>
-              <a:t>— Reject → bounded generate_* + re-verify BEFORE persist</a:t>
-            </a:r>
-            <a:endParaRPr lang="en-US" sz="900" dirty="0"/>
-          </a:p>
-        </p:txBody>
-      </p:sp>
-      <p:sp>
-        <p:nvSpPr>
-          <p:cNvPr id="19" name="Shape 17"/>
-          <p:cNvSpPr/>
-          <p:nvPr/>
-        </p:nvSpPr>
-        <p:spPr>
-          <a:xfrm>
-            <a:off x="4700016" y="1188720"/>
-            <a:ext cx="2011680" cy="3639312"/>
+              <a:t>— Reject → bounded regen + feedback injected → re-verify → only then persisted</a:t>
+            </a:r>
+            <a:endParaRPr lang="en-US" sz="880" dirty="0"/>
+          </a:p>
+        </p:txBody>
+      </p:sp>
+      <p:sp>
+        <p:nvSpPr>
+          <p:cNvPr id="19" name="Text 17"/>
+          <p:cNvSpPr/>
+          <p:nvPr/>
+        </p:nvSpPr>
+        <p:spPr>
+          <a:xfrm>
+            <a:off x="2523744" y="3931920"/>
+            <a:ext cx="1828800" cy="493776"/>
+          </a:xfrm>
+          <a:prstGeom prst="rect">
+            <a:avLst/>
+          </a:prstGeom>
+          <a:noFill/>
+          <a:ln/>
+        </p:spPr>
+        <p:txBody>
+          <a:bodyPr wrap="square" lIns="0" tIns="0" rIns="0" bIns="0" rtlCol="0" anchor="t"/>
+          <a:lstStyle/>
+          <a:p>
+            <a:pPr indent="0" marL="0">
+              <a:buNone/>
+            </a:pPr>
+            <a:r>
+              <a:rPr lang="en-US" sz="880" dirty="0">
+                <a:solidFill>
+                  <a:srgbClr val="94A3B8"/>
+                </a:solidFill>
+                <a:latin typeface="Calibri" pitchFamily="34" charset="0"/>
+                <a:ea typeface="Calibri" pitchFamily="34" charset="-122"/>
+                <a:cs typeface="Calibri" pitchFamily="34" charset="-120"/>
+              </a:rPr>
+              <a:t>— Not a post-hoc log. A blocking gate.</a:t>
+            </a:r>
+            <a:endParaRPr lang="en-US" sz="880" dirty="0"/>
+          </a:p>
+        </p:txBody>
+      </p:sp>
+      <p:sp>
+        <p:nvSpPr>
+          <p:cNvPr id="20" name="Shape 18"/>
+          <p:cNvSpPr/>
+          <p:nvPr/>
+        </p:nvSpPr>
+        <p:spPr>
+          <a:xfrm>
+            <a:off x="4608576" y="1170432"/>
+            <a:ext cx="2011680" cy="3520440"/>
           </a:xfrm>
           <a:prstGeom prst="rect">
             <a:avLst/>
@@ -5636,9 +5496,9 @@
             <a:prstDash val="solid"/>
           </a:ln>
           <a:effectLst>
-            <a:outerShdw sx="100000" sy="100000" kx="0" ky="0" algn="bl" rotWithShape="0" blurRad="127000" dist="38100" dir="8100000">
+            <a:outerShdw sx="100000" sy="100000" kx="0" ky="0" algn="bl" rotWithShape="0" blurRad="101600" dist="25400" dir="8100000">
               <a:srgbClr val="000000">
-                <a:alpha val="22000"/>
+                <a:alpha val="18000"/>
               </a:srgbClr>
             </a:outerShdw>
           </a:effectLst>
@@ -5646,13 +5506,13 @@
       </p:sp>
       <p:sp>
         <p:nvSpPr>
-          <p:cNvPr id="20" name="Shape 18"/>
-          <p:cNvSpPr/>
-          <p:nvPr/>
-        </p:nvSpPr>
-        <p:spPr>
-          <a:xfrm>
-            <a:off x="4700016" y="1188720"/>
+          <p:cNvPr id="21" name="Shape 19"/>
+          <p:cNvSpPr/>
+          <p:nvPr/>
+        </p:nvSpPr>
+        <p:spPr>
+          <a:xfrm>
+            <a:off x="4608576" y="1170432"/>
             <a:ext cx="2011680" cy="54864"/>
           </a:xfrm>
           <a:prstGeom prst="rect">
@@ -5671,14 +5531,14 @@
       </p:sp>
       <p:sp>
         <p:nvSpPr>
-          <p:cNvPr id="21" name="Text 19"/>
-          <p:cNvSpPr/>
-          <p:nvPr/>
-        </p:nvSpPr>
-        <p:spPr>
-          <a:xfrm>
-            <a:off x="4791456" y="1261872"/>
-            <a:ext cx="1828800" cy="502920"/>
+          <p:cNvPr id="22" name="Text 20"/>
+          <p:cNvSpPr/>
+          <p:nvPr/>
+        </p:nvSpPr>
+        <p:spPr>
+          <a:xfrm>
+            <a:off x="4700016" y="1243584"/>
+            <a:ext cx="1828800" cy="420624"/>
           </a:xfrm>
           <a:prstGeom prst="rect">
             <a:avLst/>
@@ -5702,7 +5562,7 @@
                 <a:ea typeface="Calibri" pitchFamily="34" charset="-122"/>
                 <a:cs typeface="Calibri" pitchFamily="34" charset="-120"/>
               </a:rPr>
-              <a:t>3  Passive judge + Langfuse</a:t>
+              <a:t>3. Passive Judge + Langfuse</a:t>
             </a:r>
             <a:endParaRPr lang="en-US" sz="1050" dirty="0"/>
           </a:p>
@@ -5710,14 +5570,14 @@
       </p:sp>
       <p:sp>
         <p:nvSpPr>
-          <p:cNvPr id="22" name="Text 20"/>
-          <p:cNvSpPr/>
-          <p:nvPr/>
-        </p:nvSpPr>
-        <p:spPr>
-          <a:xfrm>
-            <a:off x="4791456" y="1810512"/>
-            <a:ext cx="1828800" cy="594360"/>
+          <p:cNvPr id="23" name="Text 21"/>
+          <p:cNvSpPr/>
+          <p:nvPr/>
+        </p:nvSpPr>
+        <p:spPr>
+          <a:xfrm>
+            <a:off x="4700016" y="1700784"/>
+            <a:ext cx="1828800" cy="493776"/>
           </a:xfrm>
           <a:prstGeom prst="rect">
             <a:avLst/>
@@ -5733,7 +5593,7 @@
               <a:buNone/>
             </a:pPr>
             <a:r>
-              <a:rPr lang="en-US" sz="900" dirty="0">
+              <a:rPr lang="en-US" sz="880" dirty="0">
                 <a:solidFill>
                   <a:srgbClr val="94A3B8"/>
                 </a:solidFill>
@@ -5741,22 +5601,22 @@
                 <a:ea typeface="Calibri" pitchFamily="34" charset="-122"/>
                 <a:cs typeface="Calibri" pitchFamily="34" charset="-120"/>
               </a:rPr>
-              <a:t>— When gate is off: evaluate_response_async runs after persist</a:t>
-            </a:r>
-            <a:endParaRPr lang="en-US" sz="900" dirty="0"/>
-          </a:p>
-        </p:txBody>
-      </p:sp>
-      <p:sp>
-        <p:nvSpPr>
-          <p:cNvPr id="23" name="Text 21"/>
-          <p:cNvSpPr/>
-          <p:nvPr/>
-        </p:nvSpPr>
-        <p:spPr>
-          <a:xfrm>
-            <a:off x="4791456" y="2478024"/>
-            <a:ext cx="1828800" cy="594360"/>
+              <a:t>— Runs after gate passes — non-blocking</a:t>
+            </a:r>
+            <a:endParaRPr lang="en-US" sz="880" dirty="0"/>
+          </a:p>
+        </p:txBody>
+      </p:sp>
+      <p:sp>
+        <p:nvSpPr>
+          <p:cNvPr id="24" name="Text 22"/>
+          <p:cNvSpPr/>
+          <p:nvPr/>
+        </p:nvSpPr>
+        <p:spPr>
+          <a:xfrm>
+            <a:off x="4700016" y="2258568"/>
+            <a:ext cx="1828800" cy="493776"/>
           </a:xfrm>
           <a:prstGeom prst="rect">
             <a:avLst/>
@@ -5772,7 +5632,7 @@
               <a:buNone/>
             </a:pPr>
             <a:r>
-              <a:rPr lang="en-US" sz="900" dirty="0">
+              <a:rPr lang="en-US" sz="880" dirty="0">
                 <a:solidFill>
                   <a:srgbClr val="94A3B8"/>
                 </a:solidFill>
@@ -5780,22 +5640,22 @@
                 <a:ea typeface="Calibri" pitchFamily="34" charset="-122"/>
                 <a:cs typeface="Calibri" pitchFamily="34" charset="-120"/>
               </a:rPr>
-              <a:t>— Multi-axis dimensional scores pushed to Langfuse</a:t>
-            </a:r>
-            <a:endParaRPr lang="en-US" sz="900" dirty="0"/>
-          </a:p>
-        </p:txBody>
-      </p:sp>
-      <p:sp>
-        <p:nvSpPr>
-          <p:cNvPr id="24" name="Text 22"/>
-          <p:cNvSpPr/>
-          <p:nvPr/>
-        </p:nvSpPr>
-        <p:spPr>
-          <a:xfrm>
-            <a:off x="4791456" y="3145536"/>
-            <a:ext cx="1828800" cy="594360"/>
+              <a:t>— evaluate_response_async — multi-axis scores</a:t>
+            </a:r>
+            <a:endParaRPr lang="en-US" sz="880" dirty="0"/>
+          </a:p>
+        </p:txBody>
+      </p:sp>
+      <p:sp>
+        <p:nvSpPr>
+          <p:cNvPr id="25" name="Text 23"/>
+          <p:cNvSpPr/>
+          <p:nvPr/>
+        </p:nvSpPr>
+        <p:spPr>
+          <a:xfrm>
+            <a:off x="4700016" y="2816352"/>
+            <a:ext cx="1828800" cy="493776"/>
           </a:xfrm>
           <a:prstGeom prst="rect">
             <a:avLst/>
@@ -5811,7 +5671,7 @@
               <a:buNone/>
             </a:pPr>
             <a:r>
-              <a:rPr lang="en-US" sz="900" dirty="0">
+              <a:rPr lang="en-US" sz="880" dirty="0">
                 <a:solidFill>
                   <a:srgbClr val="94A3B8"/>
                 </a:solidFill>
@@ -5819,22 +5679,22 @@
                 <a:ea typeface="Calibri" pitchFamily="34" charset="-122"/>
                 <a:cs typeface="Calibri" pitchFamily="34" charset="-120"/>
               </a:rPr>
-              <a:t>— Useful for dashboards and experiment baselines</a:t>
-            </a:r>
-            <a:endParaRPr lang="en-US" sz="900" dirty="0"/>
-          </a:p>
-        </p:txBody>
-      </p:sp>
-      <p:sp>
-        <p:nvSpPr>
-          <p:cNvPr id="25" name="Text 23"/>
-          <p:cNvSpPr/>
-          <p:nvPr/>
-        </p:nvSpPr>
-        <p:spPr>
-          <a:xfrm>
-            <a:off x="4791456" y="3813048"/>
-            <a:ext cx="1828800" cy="594360"/>
+              <a:t>— Relevance, groundedness, completeness pushed to Langfuse</a:t>
+            </a:r>
+            <a:endParaRPr lang="en-US" sz="880" dirty="0"/>
+          </a:p>
+        </p:txBody>
+      </p:sp>
+      <p:sp>
+        <p:nvSpPr>
+          <p:cNvPr id="26" name="Text 24"/>
+          <p:cNvSpPr/>
+          <p:nvPr/>
+        </p:nvSpPr>
+        <p:spPr>
+          <a:xfrm>
+            <a:off x="4700016" y="3374136"/>
+            <a:ext cx="1828800" cy="493776"/>
           </a:xfrm>
           <a:prstGeom prst="rect">
             <a:avLst/>
@@ -5850,7 +5710,7 @@
               <a:buNone/>
             </a:pPr>
             <a:r>
-              <a:rPr lang="en-US" sz="900" dirty="0">
+              <a:rPr lang="en-US" sz="880" dirty="0">
                 <a:solidFill>
                   <a:srgbClr val="94A3B8"/>
                 </a:solidFill>
@@ -5858,22 +5718,22 @@
                 <a:ea typeface="Calibri" pitchFamily="34" charset="-122"/>
                 <a:cs typeface="Calibri" pitchFamily="34" charset="-120"/>
               </a:rPr>
-              <a:t>— answer_generation, response_quality_gate traces with workspace_id</a:t>
-            </a:r>
-            <a:endParaRPr lang="en-US" sz="900" dirty="0"/>
-          </a:p>
-        </p:txBody>
-      </p:sp>
-      <p:sp>
-        <p:nvSpPr>
-          <p:cNvPr id="26" name="Shape 24"/>
-          <p:cNvSpPr/>
-          <p:nvPr/>
-        </p:nvSpPr>
-        <p:spPr>
-          <a:xfrm>
-            <a:off x="6876288" y="1188720"/>
-            <a:ext cx="2011680" cy="3639312"/>
+              <a:t>— Powers regression baselines for prompt/model changes</a:t>
+            </a:r>
+            <a:endParaRPr lang="en-US" sz="880" dirty="0"/>
+          </a:p>
+        </p:txBody>
+      </p:sp>
+      <p:sp>
+        <p:nvSpPr>
+          <p:cNvPr id="27" name="Shape 25"/>
+          <p:cNvSpPr/>
+          <p:nvPr/>
+        </p:nvSpPr>
+        <p:spPr>
+          <a:xfrm>
+            <a:off x="6784848" y="1170432"/>
+            <a:ext cx="2011680" cy="3520440"/>
           </a:xfrm>
           <a:prstGeom prst="rect">
             <a:avLst/>
@@ -5888,9 +5748,9 @@
             <a:prstDash val="solid"/>
           </a:ln>
           <a:effectLst>
-            <a:outerShdw sx="100000" sy="100000" kx="0" ky="0" algn="bl" rotWithShape="0" blurRad="127000" dist="38100" dir="8100000">
+            <a:outerShdw sx="100000" sy="100000" kx="0" ky="0" algn="bl" rotWithShape="0" blurRad="101600" dist="25400" dir="8100000">
               <a:srgbClr val="000000">
-                <a:alpha val="22000"/>
+                <a:alpha val="18000"/>
               </a:srgbClr>
             </a:outerShdw>
           </a:effectLst>
@@ -5898,13 +5758,13 @@
       </p:sp>
       <p:sp>
         <p:nvSpPr>
-          <p:cNvPr id="27" name="Shape 25"/>
-          <p:cNvSpPr/>
-          <p:nvPr/>
-        </p:nvSpPr>
-        <p:spPr>
-          <a:xfrm>
-            <a:off x="6876288" y="1188720"/>
+          <p:cNvPr id="28" name="Shape 26"/>
+          <p:cNvSpPr/>
+          <p:nvPr/>
+        </p:nvSpPr>
+        <p:spPr>
+          <a:xfrm>
+            <a:off x="6784848" y="1170432"/>
             <a:ext cx="2011680" cy="54864"/>
           </a:xfrm>
           <a:prstGeom prst="rect">
@@ -5923,14 +5783,14 @@
       </p:sp>
       <p:sp>
         <p:nvSpPr>
-          <p:cNvPr id="28" name="Text 26"/>
-          <p:cNvSpPr/>
-          <p:nvPr/>
-        </p:nvSpPr>
-        <p:spPr>
-          <a:xfrm>
-            <a:off x="6967728" y="1261872"/>
-            <a:ext cx="1828800" cy="502920"/>
+          <p:cNvPr id="29" name="Text 27"/>
+          <p:cNvSpPr/>
+          <p:nvPr/>
+        </p:nvSpPr>
+        <p:spPr>
+          <a:xfrm>
+            <a:off x="6876288" y="1243584"/>
+            <a:ext cx="1828800" cy="420624"/>
           </a:xfrm>
           <a:prstGeom prst="rect">
             <a:avLst/>
@@ -5954,7 +5814,7 @@
                 <a:ea typeface="Calibri" pitchFamily="34" charset="-122"/>
                 <a:cs typeface="Calibri" pitchFamily="34" charset="-120"/>
               </a:rPr>
-              <a:t>4  Prompt contracts</a:t>
+              <a:t>4. Prompt Contracts</a:t>
             </a:r>
             <a:endParaRPr lang="en-US" sz="1050" dirty="0"/>
           </a:p>
@@ -5962,14 +5822,14 @@
       </p:sp>
       <p:sp>
         <p:nvSpPr>
-          <p:cNvPr id="29" name="Text 27"/>
-          <p:cNvSpPr/>
-          <p:nvPr/>
-        </p:nvSpPr>
-        <p:spPr>
-          <a:xfrm>
-            <a:off x="6967728" y="1810512"/>
-            <a:ext cx="1828800" cy="594360"/>
+          <p:cNvPr id="30" name="Text 28"/>
+          <p:cNvSpPr/>
+          <p:nvPr/>
+        </p:nvSpPr>
+        <p:spPr>
+          <a:xfrm>
+            <a:off x="6876288" y="1700784"/>
+            <a:ext cx="1828800" cy="493776"/>
           </a:xfrm>
           <a:prstGeom prst="rect">
             <a:avLst/>
@@ -5985,7 +5845,7 @@
               <a:buNone/>
             </a:pPr>
             <a:r>
-              <a:rPr lang="en-US" sz="900" dirty="0">
+              <a:rPr lang="en-US" sz="880" dirty="0">
                 <a:solidFill>
                   <a:srgbClr val="94A3B8"/>
                 </a:solidFill>
@@ -5993,22 +5853,22 @@
                 <a:ea typeface="Calibri" pitchFamily="34" charset="-122"/>
                 <a:cs typeface="Calibri" pitchFamily="34" charset="-120"/>
               </a:rPr>
-              <a:t>— Twin: owner notes + Memory Brief + chunks + conversation memory</a:t>
-            </a:r>
-            <a:endParaRPr lang="en-US" sz="900" dirty="0"/>
-          </a:p>
-        </p:txBody>
-      </p:sp>
-      <p:sp>
-        <p:nvSpPr>
-          <p:cNvPr id="30" name="Text 28"/>
-          <p:cNvSpPr/>
-          <p:nvPr/>
-        </p:nvSpPr>
-        <p:spPr>
-          <a:xfrm>
-            <a:off x="6967728" y="2478024"/>
-            <a:ext cx="1828800" cy="594360"/>
+              <a:t>— Fixed structure at every level — no freeform injection</a:t>
+            </a:r>
+            <a:endParaRPr lang="en-US" sz="880" dirty="0"/>
+          </a:p>
+        </p:txBody>
+      </p:sp>
+      <p:sp>
+        <p:nvSpPr>
+          <p:cNvPr id="31" name="Text 29"/>
+          <p:cNvSpPr/>
+          <p:nvPr/>
+        </p:nvSpPr>
+        <p:spPr>
+          <a:xfrm>
+            <a:off x="6876288" y="2258568"/>
+            <a:ext cx="1828800" cy="493776"/>
           </a:xfrm>
           <a:prstGeom prst="rect">
             <a:avLst/>
@@ -6024,7 +5884,7 @@
               <a:buNone/>
             </a:pPr>
             <a:r>
-              <a:rPr lang="en-US" sz="900" dirty="0">
+              <a:rPr lang="en-US" sz="880" dirty="0">
                 <a:solidFill>
                   <a:srgbClr val="94A3B8"/>
                 </a:solidFill>
@@ -6032,22 +5892,22 @@
                 <a:ea typeface="Calibri" pitchFamily="34" charset="-122"/>
                 <a:cs typeface="Calibri" pitchFamily="34" charset="-120"/>
               </a:rPr>
-              <a:t>— Workspace: multi-project blocks; no internal routing dumps to visitors</a:t>
-            </a:r>
-            <a:endParaRPr lang="en-US" sz="900" dirty="0"/>
-          </a:p>
-        </p:txBody>
-      </p:sp>
-      <p:sp>
-        <p:nvSpPr>
-          <p:cNvPr id="31" name="Text 29"/>
-          <p:cNvSpPr/>
-          <p:nvPr/>
-        </p:nvSpPr>
-        <p:spPr>
-          <a:xfrm>
-            <a:off x="6967728" y="3145536"/>
-            <a:ext cx="1828800" cy="594360"/>
+              <a:t>— All ingested content sanitised (treats every source as adversarial)</a:t>
+            </a:r>
+            <a:endParaRPr lang="en-US" sz="880" dirty="0"/>
+          </a:p>
+        </p:txBody>
+      </p:sp>
+      <p:sp>
+        <p:nvSpPr>
+          <p:cNvPr id="32" name="Text 30"/>
+          <p:cNvSpPr/>
+          <p:nvPr/>
+        </p:nvSpPr>
+        <p:spPr>
+          <a:xfrm>
+            <a:off x="6876288" y="2816352"/>
+            <a:ext cx="1828800" cy="493776"/>
           </a:xfrm>
           <a:prstGeom prst="rect">
             <a:avLst/>
@@ -6063,7 +5923,7 @@
               <a:buNone/>
             </a:pPr>
             <a:r>
-              <a:rPr lang="en-US" sz="900" dirty="0">
+              <a:rPr lang="en-US" sz="880" dirty="0">
                 <a:solidFill>
                   <a:srgbClr val="94A3B8"/>
                 </a:solidFill>
@@ -6071,22 +5931,22 @@
                 <a:ea typeface="Calibri" pitchFamily="34" charset="-122"/>
                 <a:cs typeface="Calibri" pitchFamily="34" charset="-120"/>
               </a:rPr>
-              <a:t>— Sanitised injection — all ingested content treated as untrusted</a:t>
-            </a:r>
-            <a:endParaRPr lang="en-US" sz="900" dirty="0"/>
-          </a:p>
-        </p:txBody>
-      </p:sp>
-      <p:sp>
-        <p:nvSpPr>
-          <p:cNvPr id="32" name="Text 30"/>
-          <p:cNvSpPr/>
-          <p:nvPr/>
-        </p:nvSpPr>
-        <p:spPr>
-          <a:xfrm>
-            <a:off x="6967728" y="3813048"/>
-            <a:ext cx="1828800" cy="594360"/>
+              <a:t>— Workspace prompts never expose internal routing to visitors</a:t>
+            </a:r>
+            <a:endParaRPr lang="en-US" sz="880" dirty="0"/>
+          </a:p>
+        </p:txBody>
+      </p:sp>
+      <p:sp>
+        <p:nvSpPr>
+          <p:cNvPr id="33" name="Text 31"/>
+          <p:cNvSpPr/>
+          <p:nvPr/>
+        </p:nvSpPr>
+        <p:spPr>
+          <a:xfrm>
+            <a:off x="6876288" y="3374136"/>
+            <a:ext cx="1828800" cy="493776"/>
           </a:xfrm>
           <a:prstGeom prst="rect">
             <a:avLst/>
@@ -6102,7 +5962,7 @@
               <a:buNone/>
             </a:pPr>
             <a:r>
-              <a:rPr lang="en-US" sz="900" dirty="0">
+              <a:rPr lang="en-US" sz="880" dirty="0">
                 <a:solidFill>
                   <a:srgbClr val="94A3B8"/>
                 </a:solidFill>
@@ -6110,9 +5970,48 @@
                 <a:ea typeface="Calibri" pitchFamily="34" charset="-122"/>
                 <a:cs typeface="Calibri" pitchFamily="34" charset="-120"/>
               </a:rPr>
-              <a:t>— Regeneration hints injected on verifier retry</a:t>
-            </a:r>
-            <a:endParaRPr lang="en-US" sz="900" dirty="0"/>
+              <a:t>— Regeneration hints injected into retry prompts by the verifier</a:t>
+            </a:r>
+            <a:endParaRPr lang="en-US" sz="880" dirty="0"/>
+          </a:p>
+        </p:txBody>
+      </p:sp>
+      <p:sp>
+        <p:nvSpPr>
+          <p:cNvPr id="34" name="Text 32"/>
+          <p:cNvSpPr/>
+          <p:nvPr/>
+        </p:nvSpPr>
+        <p:spPr>
+          <a:xfrm>
+            <a:off x="457200" y="4754880"/>
+            <a:ext cx="8229600" cy="274320"/>
+          </a:xfrm>
+          <a:prstGeom prst="rect">
+            <a:avLst/>
+          </a:prstGeom>
+          <a:noFill/>
+          <a:ln/>
+        </p:spPr>
+        <p:txBody>
+          <a:bodyPr wrap="square" lIns="0" tIns="0" rIns="0" bIns="0" rtlCol="0" anchor="ctr"/>
+          <a:lstStyle/>
+          <a:p>
+            <a:pPr indent="0" marL="0">
+              <a:buNone/>
+            </a:pPr>
+            <a:r>
+              <a:rPr lang="en-US" sz="950" i="1" dirty="0">
+                <a:solidFill>
+                  <a:srgbClr val="94A3B8"/>
+                </a:solidFill>
+                <a:latin typeface="Calibri" pitchFamily="34" charset="0"/>
+                <a:ea typeface="Calibri" pitchFamily="34" charset="-122"/>
+                <a:cs typeface="Calibri" pitchFamily="34" charset="-120"/>
+              </a:rPr>
+              <a:t>Tradeoff: The synchronous gate adds ~1–2s per answer. Deliberate. This is a trust product — correctness over raw speed. Gate can be disabled per environment. In practice, the large majority of answers pass on the first attempt.</a:t>
+            </a:r>
+            <a:endParaRPr lang="en-US" sz="950" dirty="0"/>
           </a:p>
         </p:txBody>
       </p:sp>
@@ -6182,7 +6081,7 @@
         <p:spPr>
           <a:xfrm>
             <a:off x="457200" y="182880"/>
-            <a:ext cx="8229600" cy="256032"/>
+            <a:ext cx="8229600" cy="237744"/>
           </a:xfrm>
           <a:prstGeom prst="rect">
             <a:avLst/>
@@ -6203,7 +6102,7 @@
                   <a:srgbClr val="14B8A6"/>
                 </a:solidFill>
               </a:rPr>
-              <a:t>ENGINEERING PRACTICES &amp; PRODUCTION READINESS</a:t>
+              <a:t>INFRASTRUCTURE &amp; DEPLOYMENT</a:t>
             </a:r>
             <a:endParaRPr lang="en-US" sz="900" dirty="0"/>
           </a:p>
@@ -6217,8 +6116,8 @@
         </p:nvSpPr>
         <p:spPr>
           <a:xfrm>
-            <a:off x="457200" y="475488"/>
-            <a:ext cx="8229600" cy="594360"/>
+            <a:off x="457200" y="457200"/>
+            <a:ext cx="8229600" cy="566928"/>
           </a:xfrm>
           <a:prstGeom prst="rect">
             <a:avLst/>
@@ -6242,7 +6141,7 @@
                 <a:ea typeface="Calibri" pitchFamily="34" charset="-122"/>
                 <a:cs typeface="Calibri" pitchFamily="34" charset="-120"/>
               </a:rPr>
-              <a:t>Boring-operable stack. Deliberate trade-offs documented.</a:t>
+              <a:t>From docker compose up to production AWS — one push to main.</a:t>
             </a:r>
             <a:endParaRPr lang="en-US" sz="2200" dirty="0"/>
           </a:p>
@@ -6256,31 +6155,31 @@
         </p:nvSpPr>
         <p:spPr>
           <a:xfrm>
-            <a:off x="347472" y="1207008"/>
-            <a:ext cx="4023360" cy="274320"/>
-          </a:xfrm>
-          <a:prstGeom prst="rect">
-            <a:avLst/>
-          </a:prstGeom>
-          <a:noFill/>
-          <a:ln/>
-        </p:spPr>
-        <p:txBody>
-          <a:bodyPr wrap="square" lIns="0" tIns="0" rIns="0" bIns="0" rtlCol="0" anchor="ctr"/>
-          <a:lstStyle/>
-          <a:p>
-            <a:pPr indent="0" marL="0">
-              <a:buNone/>
-            </a:pPr>
-            <a:r>
-              <a:rPr lang="en-US" sz="1100" b="1" dirty="0">
+            <a:off x="347472" y="1115568"/>
+            <a:ext cx="2697480" cy="274320"/>
+          </a:xfrm>
+          <a:prstGeom prst="rect">
+            <a:avLst/>
+          </a:prstGeom>
+          <a:noFill/>
+          <a:ln/>
+        </p:spPr>
+        <p:txBody>
+          <a:bodyPr wrap="square" lIns="0" tIns="0" rIns="0" bIns="0" rtlCol="0" anchor="ctr"/>
+          <a:lstStyle/>
+          <a:p>
+            <a:pPr indent="0" marL="0">
+              <a:buNone/>
+            </a:pPr>
+            <a:r>
+              <a:rPr lang="en-US" sz="1000" b="1" dirty="0">
                 <a:solidFill>
                   <a:srgbClr val="14B8A6"/>
                 </a:solidFill>
               </a:rPr>
-              <a:t>Tech stack</a:t>
-            </a:r>
-            <a:endParaRPr lang="en-US" sz="1100" dirty="0"/>
+              <a:t>Local — 5 services, one command</a:t>
+            </a:r>
+            <a:endParaRPr lang="en-US" sz="1000" dirty="0"/>
           </a:p>
         </p:txBody>
       </p:sp>
@@ -6292,8 +6191,8 @@
         </p:nvSpPr>
         <p:spPr>
           <a:xfrm>
-            <a:off x="347472" y="1508760"/>
-            <a:ext cx="4160520" cy="411480"/>
+            <a:off x="347472" y="1426464"/>
+            <a:ext cx="2697480" cy="347472"/>
           </a:xfrm>
           <a:prstGeom prst="rect">
             <a:avLst/>
@@ -6317,24 +6216,24 @@
         </p:nvSpPr>
         <p:spPr>
           <a:xfrm>
-            <a:off x="457200" y="1600200"/>
-            <a:ext cx="1280160" cy="228600"/>
-          </a:xfrm>
-          <a:prstGeom prst="rect">
-            <a:avLst/>
-          </a:prstGeom>
-          <a:noFill/>
-          <a:ln/>
-        </p:spPr>
-        <p:txBody>
-          <a:bodyPr wrap="square" lIns="0" tIns="0" rIns="0" bIns="0" rtlCol="0" anchor="ctr"/>
-          <a:lstStyle/>
-          <a:p>
-            <a:pPr indent="0" marL="0">
-              <a:buNone/>
-            </a:pPr>
-            <a:r>
-              <a:rPr lang="en-US" sz="1000" b="1" dirty="0">
+            <a:off x="438912" y="1508760"/>
+            <a:ext cx="822960" cy="182880"/>
+          </a:xfrm>
+          <a:prstGeom prst="rect">
+            <a:avLst/>
+          </a:prstGeom>
+          <a:noFill/>
+          <a:ln/>
+        </p:spPr>
+        <p:txBody>
+          <a:bodyPr wrap="square" lIns="0" tIns="0" rIns="0" bIns="0" rtlCol="0" anchor="ctr"/>
+          <a:lstStyle/>
+          <a:p>
+            <a:pPr indent="0" marL="0">
+              <a:buNone/>
+            </a:pPr>
+            <a:r>
+              <a:rPr lang="en-US" sz="950" b="1" dirty="0">
                 <a:solidFill>
                   <a:srgbClr val="111827"/>
                 </a:solidFill>
@@ -6342,9 +6241,9 @@
                 <a:ea typeface="Calibri" pitchFamily="34" charset="-122"/>
                 <a:cs typeface="Calibri" pitchFamily="34" charset="-120"/>
               </a:rPr>
-              <a:t>Backend</a:t>
-            </a:r>
-            <a:endParaRPr lang="en-US" sz="1000" dirty="0"/>
+              <a:t>backend</a:t>
+            </a:r>
+            <a:endParaRPr lang="en-US" sz="950" dirty="0"/>
           </a:p>
         </p:txBody>
       </p:sp>
@@ -6356,24 +6255,24 @@
         </p:nvSpPr>
         <p:spPr>
           <a:xfrm>
-            <a:off x="1783080" y="1600200"/>
-            <a:ext cx="2606040" cy="228600"/>
-          </a:xfrm>
-          <a:prstGeom prst="rect">
-            <a:avLst/>
-          </a:prstGeom>
-          <a:noFill/>
-          <a:ln/>
-        </p:spPr>
-        <p:txBody>
-          <a:bodyPr wrap="square" lIns="0" tIns="0" rIns="0" bIns="0" rtlCol="0" anchor="ctr"/>
-          <a:lstStyle/>
-          <a:p>
-            <a:pPr indent="0" marL="0">
-              <a:buNone/>
-            </a:pPr>
-            <a:r>
-              <a:rPr lang="en-US" sz="1000" dirty="0">
+            <a:off x="1298448" y="1508760"/>
+            <a:ext cx="1645920" cy="182880"/>
+          </a:xfrm>
+          <a:prstGeom prst="rect">
+            <a:avLst/>
+          </a:prstGeom>
+          <a:noFill/>
+          <a:ln/>
+        </p:spPr>
+        <p:txBody>
+          <a:bodyPr wrap="square" lIns="0" tIns="0" rIns="0" bIns="0" rtlCol="0" anchor="ctr"/>
+          <a:lstStyle/>
+          <a:p>
+            <a:pPr indent="0" marL="0">
+              <a:buNone/>
+            </a:pPr>
+            <a:r>
+              <a:rPr lang="en-US" sz="950" dirty="0">
                 <a:solidFill>
                   <a:srgbClr val="6B7280"/>
                 </a:solidFill>
@@ -6381,9 +6280,9 @@
                 <a:ea typeface="Calibri" pitchFamily="34" charset="-122"/>
                 <a:cs typeface="Calibri" pitchFamily="34" charset="-120"/>
               </a:rPr>
-              <a:t>Python 3.11+, FastAPI, Pydantic v2</a:t>
-            </a:r>
-            <a:endParaRPr lang="en-US" sz="1000" dirty="0"/>
+              <a:t>FastAPI — uvicorn, port 8000</a:t>
+            </a:r>
+            <a:endParaRPr lang="en-US" sz="950" dirty="0"/>
           </a:p>
         </p:txBody>
       </p:sp>
@@ -6395,8 +6294,8 @@
         </p:nvSpPr>
         <p:spPr>
           <a:xfrm>
-            <a:off x="347472" y="1965960"/>
-            <a:ext cx="4160520" cy="411480"/>
+            <a:off x="347472" y="1810512"/>
+            <a:ext cx="2697480" cy="347472"/>
           </a:xfrm>
           <a:prstGeom prst="rect">
             <a:avLst/>
@@ -6420,24 +6319,24 @@
         </p:nvSpPr>
         <p:spPr>
           <a:xfrm>
-            <a:off x="457200" y="2057400"/>
-            <a:ext cx="1280160" cy="228600"/>
-          </a:xfrm>
-          <a:prstGeom prst="rect">
-            <a:avLst/>
-          </a:prstGeom>
-          <a:noFill/>
-          <a:ln/>
-        </p:spPr>
-        <p:txBody>
-          <a:bodyPr wrap="square" lIns="0" tIns="0" rIns="0" bIns="0" rtlCol="0" anchor="ctr"/>
-          <a:lstStyle/>
-          <a:p>
-            <a:pPr indent="0" marL="0">
-              <a:buNone/>
-            </a:pPr>
-            <a:r>
-              <a:rPr lang="en-US" sz="1000" b="1" dirty="0">
+            <a:off x="438912" y="1892808"/>
+            <a:ext cx="822960" cy="182880"/>
+          </a:xfrm>
+          <a:prstGeom prst="rect">
+            <a:avLst/>
+          </a:prstGeom>
+          <a:noFill/>
+          <a:ln/>
+        </p:spPr>
+        <p:txBody>
+          <a:bodyPr wrap="square" lIns="0" tIns="0" rIns="0" bIns="0" rtlCol="0" anchor="ctr"/>
+          <a:lstStyle/>
+          <a:p>
+            <a:pPr indent="0" marL="0">
+              <a:buNone/>
+            </a:pPr>
+            <a:r>
+              <a:rPr lang="en-US" sz="950" b="1" dirty="0">
                 <a:solidFill>
                   <a:srgbClr val="111827"/>
                 </a:solidFill>
@@ -6445,9 +6344,9 @@
                 <a:ea typeface="Calibri" pitchFamily="34" charset="-122"/>
                 <a:cs typeface="Calibri" pitchFamily="34" charset="-120"/>
               </a:rPr>
-              <a:t>Frontend</a:t>
-            </a:r>
-            <a:endParaRPr lang="en-US" sz="1000" dirty="0"/>
+              <a:t>worker</a:t>
+            </a:r>
+            <a:endParaRPr lang="en-US" sz="950" dirty="0"/>
           </a:p>
         </p:txBody>
       </p:sp>
@@ -6459,24 +6358,24 @@
         </p:nvSpPr>
         <p:spPr>
           <a:xfrm>
-            <a:off x="1783080" y="2057400"/>
-            <a:ext cx="2606040" cy="228600"/>
-          </a:xfrm>
-          <a:prstGeom prst="rect">
-            <a:avLst/>
-          </a:prstGeom>
-          <a:noFill/>
-          <a:ln/>
-        </p:spPr>
-        <p:txBody>
-          <a:bodyPr wrap="square" lIns="0" tIns="0" rIns="0" bIns="0" rtlCol="0" anchor="ctr"/>
-          <a:lstStyle/>
-          <a:p>
-            <a:pPr indent="0" marL="0">
-              <a:buNone/>
-            </a:pPr>
-            <a:r>
-              <a:rPr lang="en-US" sz="1000" dirty="0">
+            <a:off x="1298448" y="1892808"/>
+            <a:ext cx="1645920" cy="182880"/>
+          </a:xfrm>
+          <a:prstGeom prst="rect">
+            <a:avLst/>
+          </a:prstGeom>
+          <a:noFill/>
+          <a:ln/>
+        </p:spPr>
+        <p:txBody>
+          <a:bodyPr wrap="square" lIns="0" tIns="0" rIns="0" bIns="0" rtlCol="0" anchor="ctr"/>
+          <a:lstStyle/>
+          <a:p>
+            <a:pPr indent="0" marL="0">
+              <a:buNone/>
+            </a:pPr>
+            <a:r>
+              <a:rPr lang="en-US" sz="950" dirty="0">
                 <a:solidFill>
                   <a:srgbClr val="6B7280"/>
                 </a:solidFill>
@@ -6484,9 +6383,9 @@
                 <a:ea typeface="Calibri" pitchFamily="34" charset="-122"/>
                 <a:cs typeface="Calibri" pitchFamily="34" charset="-120"/>
               </a:rPr>
-              <a:t>React 18, TypeScript, Vite</a:t>
-            </a:r>
-            <a:endParaRPr lang="en-US" sz="1000" dirty="0"/>
+              <a:t>ARQ async job runner</a:t>
+            </a:r>
+            <a:endParaRPr lang="en-US" sz="950" dirty="0"/>
           </a:p>
         </p:txBody>
       </p:sp>
@@ -6498,8 +6397,8 @@
         </p:nvSpPr>
         <p:spPr>
           <a:xfrm>
-            <a:off x="347472" y="2423160"/>
-            <a:ext cx="4160520" cy="411480"/>
+            <a:off x="347472" y="2194560"/>
+            <a:ext cx="2697480" cy="347472"/>
           </a:xfrm>
           <a:prstGeom prst="rect">
             <a:avLst/>
@@ -6523,24 +6422,24 @@
         </p:nvSpPr>
         <p:spPr>
           <a:xfrm>
-            <a:off x="457200" y="2514600"/>
-            <a:ext cx="1280160" cy="228600"/>
-          </a:xfrm>
-          <a:prstGeom prst="rect">
-            <a:avLst/>
-          </a:prstGeom>
-          <a:noFill/>
-          <a:ln/>
-        </p:spPr>
-        <p:txBody>
-          <a:bodyPr wrap="square" lIns="0" tIns="0" rIns="0" bIns="0" rtlCol="0" anchor="ctr"/>
-          <a:lstStyle/>
-          <a:p>
-            <a:pPr indent="0" marL="0">
-              <a:buNone/>
-            </a:pPr>
-            <a:r>
-              <a:rPr lang="en-US" sz="1000" b="1" dirty="0">
+            <a:off x="438912" y="2276856"/>
+            <a:ext cx="822960" cy="182880"/>
+          </a:xfrm>
+          <a:prstGeom prst="rect">
+            <a:avLst/>
+          </a:prstGeom>
+          <a:noFill/>
+          <a:ln/>
+        </p:spPr>
+        <p:txBody>
+          <a:bodyPr wrap="square" lIns="0" tIns="0" rIns="0" bIns="0" rtlCol="0" anchor="ctr"/>
+          <a:lstStyle/>
+          <a:p>
+            <a:pPr indent="0" marL="0">
+              <a:buNone/>
+            </a:pPr>
+            <a:r>
+              <a:rPr lang="en-US" sz="950" b="1" dirty="0">
                 <a:solidFill>
                   <a:srgbClr val="111827"/>
                 </a:solidFill>
@@ -6548,9 +6447,9 @@
                 <a:ea typeface="Calibri" pitchFamily="34" charset="-122"/>
                 <a:cs typeface="Calibri" pitchFamily="34" charset="-120"/>
               </a:rPr>
-              <a:t>Database</a:t>
-            </a:r>
-            <a:endParaRPr lang="en-US" sz="1000" dirty="0"/>
+              <a:t>db</a:t>
+            </a:r>
+            <a:endParaRPr lang="en-US" sz="950" dirty="0"/>
           </a:p>
         </p:txBody>
       </p:sp>
@@ -6562,24 +6461,24 @@
         </p:nvSpPr>
         <p:spPr>
           <a:xfrm>
-            <a:off x="1783080" y="2514600"/>
-            <a:ext cx="2606040" cy="228600"/>
-          </a:xfrm>
-          <a:prstGeom prst="rect">
-            <a:avLst/>
-          </a:prstGeom>
-          <a:noFill/>
-          <a:ln/>
-        </p:spPr>
-        <p:txBody>
-          <a:bodyPr wrap="square" lIns="0" tIns="0" rIns="0" bIns="0" rtlCol="0" anchor="ctr"/>
-          <a:lstStyle/>
-          <a:p>
-            <a:pPr indent="0" marL="0">
-              <a:buNone/>
-            </a:pPr>
-            <a:r>
-              <a:rPr lang="en-US" sz="1000" dirty="0">
+            <a:off x="1298448" y="2276856"/>
+            <a:ext cx="1645920" cy="182880"/>
+          </a:xfrm>
+          <a:prstGeom prst="rect">
+            <a:avLst/>
+          </a:prstGeom>
+          <a:noFill/>
+          <a:ln/>
+        </p:spPr>
+        <p:txBody>
+          <a:bodyPr wrap="square" lIns="0" tIns="0" rIns="0" bIns="0" rtlCol="0" anchor="ctr"/>
+          <a:lstStyle/>
+          <a:p>
+            <a:pPr indent="0" marL="0">
+              <a:buNone/>
+            </a:pPr>
+            <a:r>
+              <a:rPr lang="en-US" sz="950" dirty="0">
                 <a:solidFill>
                   <a:srgbClr val="6B7280"/>
                 </a:solidFill>
@@ -6587,9 +6486,9 @@
                 <a:ea typeface="Calibri" pitchFamily="34" charset="-122"/>
                 <a:cs typeface="Calibri" pitchFamily="34" charset="-120"/>
               </a:rPr>
-              <a:t>PostgreSQL + pgvector (hybrid retrieval)</a:t>
-            </a:r>
-            <a:endParaRPr lang="en-US" sz="1000" dirty="0"/>
+              <a:t>PostgreSQL 16 + pgvector</a:t>
+            </a:r>
+            <a:endParaRPr lang="en-US" sz="950" dirty="0"/>
           </a:p>
         </p:txBody>
       </p:sp>
@@ -6601,8 +6500,8 @@
         </p:nvSpPr>
         <p:spPr>
           <a:xfrm>
-            <a:off x="347472" y="2880360"/>
-            <a:ext cx="4160520" cy="411480"/>
+            <a:off x="347472" y="2578608"/>
+            <a:ext cx="2697480" cy="347472"/>
           </a:xfrm>
           <a:prstGeom prst="rect">
             <a:avLst/>
@@ -6626,24 +6525,24 @@
         </p:nvSpPr>
         <p:spPr>
           <a:xfrm>
-            <a:off x="457200" y="2971800"/>
-            <a:ext cx="1280160" cy="228600"/>
-          </a:xfrm>
-          <a:prstGeom prst="rect">
-            <a:avLst/>
-          </a:prstGeom>
-          <a:noFill/>
-          <a:ln/>
-        </p:spPr>
-        <p:txBody>
-          <a:bodyPr wrap="square" lIns="0" tIns="0" rIns="0" bIns="0" rtlCol="0" anchor="ctr"/>
-          <a:lstStyle/>
-          <a:p>
-            <a:pPr indent="0" marL="0">
-              <a:buNone/>
-            </a:pPr>
-            <a:r>
-              <a:rPr lang="en-US" sz="1000" b="1" dirty="0">
+            <a:off x="438912" y="2660904"/>
+            <a:ext cx="822960" cy="182880"/>
+          </a:xfrm>
+          <a:prstGeom prst="rect">
+            <a:avLst/>
+          </a:prstGeom>
+          <a:noFill/>
+          <a:ln/>
+        </p:spPr>
+        <p:txBody>
+          <a:bodyPr wrap="square" lIns="0" tIns="0" rIns="0" bIns="0" rtlCol="0" anchor="ctr"/>
+          <a:lstStyle/>
+          <a:p>
+            <a:pPr indent="0" marL="0">
+              <a:buNone/>
+            </a:pPr>
+            <a:r>
+              <a:rPr lang="en-US" sz="950" b="1" dirty="0">
                 <a:solidFill>
                   <a:srgbClr val="111827"/>
                 </a:solidFill>
@@ -6651,9 +6550,9 @@
                 <a:ea typeface="Calibri" pitchFamily="34" charset="-122"/>
                 <a:cs typeface="Calibri" pitchFamily="34" charset="-120"/>
               </a:rPr>
-              <a:t>Queue / Cache</a:t>
-            </a:r>
-            <a:endParaRPr lang="en-US" sz="1000" dirty="0"/>
+              <a:t>redis</a:t>
+            </a:r>
+            <a:endParaRPr lang="en-US" sz="950" dirty="0"/>
           </a:p>
         </p:txBody>
       </p:sp>
@@ -6665,24 +6564,24 @@
         </p:nvSpPr>
         <p:spPr>
           <a:xfrm>
-            <a:off x="1783080" y="2971800"/>
-            <a:ext cx="2606040" cy="228600"/>
-          </a:xfrm>
-          <a:prstGeom prst="rect">
-            <a:avLst/>
-          </a:prstGeom>
-          <a:noFill/>
-          <a:ln/>
-        </p:spPr>
-        <p:txBody>
-          <a:bodyPr wrap="square" lIns="0" tIns="0" rIns="0" bIns="0" rtlCol="0" anchor="ctr"/>
-          <a:lstStyle/>
-          <a:p>
-            <a:pPr indent="0" marL="0">
-              <a:buNone/>
-            </a:pPr>
-            <a:r>
-              <a:rPr lang="en-US" sz="1000" dirty="0">
+            <a:off x="1298448" y="2660904"/>
+            <a:ext cx="1645920" cy="182880"/>
+          </a:xfrm>
+          <a:prstGeom prst="rect">
+            <a:avLst/>
+          </a:prstGeom>
+          <a:noFill/>
+          <a:ln/>
+        </p:spPr>
+        <p:txBody>
+          <a:bodyPr wrap="square" lIns="0" tIns="0" rIns="0" bIns="0" rtlCol="0" anchor="ctr"/>
+          <a:lstStyle/>
+          <a:p>
+            <a:pPr indent="0" marL="0">
+              <a:buNone/>
+            </a:pPr>
+            <a:r>
+              <a:rPr lang="en-US" sz="950" dirty="0">
                 <a:solidFill>
                   <a:srgbClr val="6B7280"/>
                 </a:solidFill>
@@ -6690,9 +6589,9 @@
                 <a:ea typeface="Calibri" pitchFamily="34" charset="-122"/>
                 <a:cs typeface="Calibri" pitchFamily="34" charset="-120"/>
               </a:rPr>
-              <a:t>Redis + ARQ (idempotent async jobs)</a:t>
-            </a:r>
-            <a:endParaRPr lang="en-US" sz="1000" dirty="0"/>
+              <a:t>Job queue + distributed locks</a:t>
+            </a:r>
+            <a:endParaRPr lang="en-US" sz="950" dirty="0"/>
           </a:p>
         </p:txBody>
       </p:sp>
@@ -6704,8 +6603,8 @@
         </p:nvSpPr>
         <p:spPr>
           <a:xfrm>
-            <a:off x="347472" y="3337560"/>
-            <a:ext cx="4160520" cy="411480"/>
+            <a:off x="347472" y="2962656"/>
+            <a:ext cx="2697480" cy="347472"/>
           </a:xfrm>
           <a:prstGeom prst="rect">
             <a:avLst/>
@@ -6729,8 +6628,86 @@
         </p:nvSpPr>
         <p:spPr>
           <a:xfrm>
-            <a:off x="457200" y="3429000"/>
-            <a:ext cx="1280160" cy="228600"/>
+            <a:off x="438912" y="3044952"/>
+            <a:ext cx="822960" cy="182880"/>
+          </a:xfrm>
+          <a:prstGeom prst="rect">
+            <a:avLst/>
+          </a:prstGeom>
+          <a:noFill/>
+          <a:ln/>
+        </p:spPr>
+        <p:txBody>
+          <a:bodyPr wrap="square" lIns="0" tIns="0" rIns="0" bIns="0" rtlCol="0" anchor="ctr"/>
+          <a:lstStyle/>
+          <a:p>
+            <a:pPr indent="0" marL="0">
+              <a:buNone/>
+            </a:pPr>
+            <a:r>
+              <a:rPr lang="en-US" sz="950" b="1" dirty="0">
+                <a:solidFill>
+                  <a:srgbClr val="111827"/>
+                </a:solidFill>
+                <a:latin typeface="Calibri" pitchFamily="34" charset="0"/>
+                <a:ea typeface="Calibri" pitchFamily="34" charset="-122"/>
+                <a:cs typeface="Calibri" pitchFamily="34" charset="-120"/>
+              </a:rPr>
+              <a:t>frontend</a:t>
+            </a:r>
+            <a:endParaRPr lang="en-US" sz="950" dirty="0"/>
+          </a:p>
+        </p:txBody>
+      </p:sp>
+      <p:sp>
+        <p:nvSpPr>
+          <p:cNvPr id="20" name="Text 18"/>
+          <p:cNvSpPr/>
+          <p:nvPr/>
+        </p:nvSpPr>
+        <p:spPr>
+          <a:xfrm>
+            <a:off x="1298448" y="3044952"/>
+            <a:ext cx="1645920" cy="182880"/>
+          </a:xfrm>
+          <a:prstGeom prst="rect">
+            <a:avLst/>
+          </a:prstGeom>
+          <a:noFill/>
+          <a:ln/>
+        </p:spPr>
+        <p:txBody>
+          <a:bodyPr wrap="square" lIns="0" tIns="0" rIns="0" bIns="0" rtlCol="0" anchor="ctr"/>
+          <a:lstStyle/>
+          <a:p>
+            <a:pPr indent="0" marL="0">
+              <a:buNone/>
+            </a:pPr>
+            <a:r>
+              <a:rPr lang="en-US" sz="950" dirty="0">
+                <a:solidFill>
+                  <a:srgbClr val="6B7280"/>
+                </a:solidFill>
+                <a:latin typeface="Calibri" pitchFamily="34" charset="0"/>
+                <a:ea typeface="Calibri" pitchFamily="34" charset="-122"/>
+                <a:cs typeface="Calibri" pitchFamily="34" charset="-120"/>
+              </a:rPr>
+              <a:t>React 18 + Vite dev server</a:t>
+            </a:r>
+            <a:endParaRPr lang="en-US" sz="950" dirty="0"/>
+          </a:p>
+        </p:txBody>
+      </p:sp>
+      <p:sp>
+        <p:nvSpPr>
+          <p:cNvPr id="21" name="Text 19"/>
+          <p:cNvSpPr/>
+          <p:nvPr/>
+        </p:nvSpPr>
+        <p:spPr>
+          <a:xfrm>
+            <a:off x="3246120" y="1115568"/>
+            <a:ext cx="2743200" cy="274320"/>
           </a:xfrm>
           <a:prstGeom prst="rect">
             <a:avLst/>
@@ -6748,13 +6725,10 @@
             <a:r>
               <a:rPr lang="en-US" sz="1000" b="1" dirty="0">
                 <a:solidFill>
-                  <a:srgbClr val="111827"/>
-                </a:solidFill>
-                <a:latin typeface="Calibri" pitchFamily="34" charset="0"/>
-                <a:ea typeface="Calibri" pitchFamily="34" charset="-122"/>
-                <a:cs typeface="Calibri" pitchFamily="34" charset="-120"/>
-              </a:rPr>
-              <a:t>LLM</a:t>
+                  <a:srgbClr val="14B8A6"/>
+                </a:solidFill>
+              </a:rPr>
+              <a:t>Production — AWS</a:t>
             </a:r>
             <a:endParaRPr lang="en-US" sz="1000" dirty="0"/>
           </a:p>
@@ -6762,59 +6736,20 @@
       </p:sp>
       <p:sp>
         <p:nvSpPr>
-          <p:cNvPr id="20" name="Text 18"/>
-          <p:cNvSpPr/>
-          <p:nvPr/>
-        </p:nvSpPr>
-        <p:spPr>
-          <a:xfrm>
-            <a:off x="1783080" y="3429000"/>
-            <a:ext cx="2606040" cy="228600"/>
-          </a:xfrm>
-          <a:prstGeom prst="rect">
-            <a:avLst/>
-          </a:prstGeom>
-          <a:noFill/>
-          <a:ln/>
-        </p:spPr>
-        <p:txBody>
-          <a:bodyPr wrap="square" lIns="0" tIns="0" rIns="0" bIns="0" rtlCol="0" anchor="ctr"/>
-          <a:lstStyle/>
-          <a:p>
-            <a:pPr indent="0" marL="0">
-              <a:buNone/>
-            </a:pPr>
-            <a:r>
-              <a:rPr lang="en-US" sz="1000" dirty="0">
-                <a:solidFill>
-                  <a:srgbClr val="6B7280"/>
-                </a:solidFill>
-                <a:latin typeface="Calibri" pitchFamily="34" charset="0"/>
-                <a:ea typeface="Calibri" pitchFamily="34" charset="-122"/>
-                <a:cs typeface="Calibri" pitchFamily="34" charset="-120"/>
-              </a:rPr>
-              <a:t>OpenAI-compatible (OpenRouter / OpenAI)</a:t>
-            </a:r>
-            <a:endParaRPr lang="en-US" sz="1000" dirty="0"/>
-          </a:p>
-        </p:txBody>
-      </p:sp>
-      <p:sp>
-        <p:nvSpPr>
-          <p:cNvPr id="21" name="Shape 19"/>
-          <p:cNvSpPr/>
-          <p:nvPr/>
-        </p:nvSpPr>
-        <p:spPr>
-          <a:xfrm>
-            <a:off x="347472" y="3794760"/>
-            <a:ext cx="4160520" cy="411480"/>
-          </a:xfrm>
-          <a:prstGeom prst="rect">
-            <a:avLst/>
-          </a:prstGeom>
-          <a:solidFill>
-            <a:srgbClr val="FFFFFF"/>
+          <p:cNvPr id="22" name="Shape 20"/>
+          <p:cNvSpPr/>
+          <p:nvPr/>
+        </p:nvSpPr>
+        <p:spPr>
+          <a:xfrm>
+            <a:off x="3246120" y="1426464"/>
+            <a:ext cx="2743200" cy="347472"/>
+          </a:xfrm>
+          <a:prstGeom prst="rect">
+            <a:avLst/>
+          </a:prstGeom>
+          <a:solidFill>
+            <a:srgbClr val="F9F9FB"/>
           </a:solidFill>
           <a:ln w="12700">
             <a:solidFill>
@@ -6826,30 +6761,30 @@
       </p:sp>
       <p:sp>
         <p:nvSpPr>
-          <p:cNvPr id="22" name="Text 20"/>
-          <p:cNvSpPr/>
-          <p:nvPr/>
-        </p:nvSpPr>
-        <p:spPr>
-          <a:xfrm>
-            <a:off x="457200" y="3886200"/>
-            <a:ext cx="1280160" cy="228600"/>
-          </a:xfrm>
-          <a:prstGeom prst="rect">
-            <a:avLst/>
-          </a:prstGeom>
-          <a:noFill/>
-          <a:ln/>
-        </p:spPr>
-        <p:txBody>
-          <a:bodyPr wrap="square" lIns="0" tIns="0" rIns="0" bIns="0" rtlCol="0" anchor="ctr"/>
-          <a:lstStyle/>
-          <a:p>
-            <a:pPr indent="0" marL="0">
-              <a:buNone/>
-            </a:pPr>
-            <a:r>
-              <a:rPr lang="en-US" sz="1000" b="1" dirty="0">
+          <p:cNvPr id="23" name="Text 21"/>
+          <p:cNvSpPr/>
+          <p:nvPr/>
+        </p:nvSpPr>
+        <p:spPr>
+          <a:xfrm>
+            <a:off x="3328416" y="1508760"/>
+            <a:ext cx="1005840" cy="182880"/>
+          </a:xfrm>
+          <a:prstGeom prst="rect">
+            <a:avLst/>
+          </a:prstGeom>
+          <a:noFill/>
+          <a:ln/>
+        </p:spPr>
+        <p:txBody>
+          <a:bodyPr wrap="square" lIns="0" tIns="0" rIns="0" bIns="0" rtlCol="0" anchor="ctr"/>
+          <a:lstStyle/>
+          <a:p>
+            <a:pPr indent="0" marL="0">
+              <a:buNone/>
+            </a:pPr>
+            <a:r>
+              <a:rPr lang="en-US" sz="900" b="1" dirty="0">
                 <a:solidFill>
                   <a:srgbClr val="111827"/>
                 </a:solidFill>
@@ -6857,38 +6792,38 @@
                 <a:ea typeface="Calibri" pitchFamily="34" charset="-122"/>
                 <a:cs typeface="Calibri" pitchFamily="34" charset="-120"/>
               </a:rPr>
-              <a:t>Auth</a:t>
-            </a:r>
-            <a:endParaRPr lang="en-US" sz="1000" dirty="0"/>
-          </a:p>
-        </p:txBody>
-      </p:sp>
-      <p:sp>
-        <p:nvSpPr>
-          <p:cNvPr id="23" name="Text 21"/>
-          <p:cNvSpPr/>
-          <p:nvPr/>
-        </p:nvSpPr>
-        <p:spPr>
-          <a:xfrm>
-            <a:off x="1783080" y="3886200"/>
-            <a:ext cx="2606040" cy="228600"/>
-          </a:xfrm>
-          <a:prstGeom prst="rect">
-            <a:avLst/>
-          </a:prstGeom>
-          <a:noFill/>
-          <a:ln/>
-        </p:spPr>
-        <p:txBody>
-          <a:bodyPr wrap="square" lIns="0" tIns="0" rIns="0" bIns="0" rtlCol="0" anchor="ctr"/>
-          <a:lstStyle/>
-          <a:p>
-            <a:pPr indent="0" marL="0">
-              <a:buNone/>
-            </a:pPr>
-            <a:r>
-              <a:rPr lang="en-US" sz="1000" dirty="0">
+              <a:t>EC2</a:t>
+            </a:r>
+            <a:endParaRPr lang="en-US" sz="900" dirty="0"/>
+          </a:p>
+        </p:txBody>
+      </p:sp>
+      <p:sp>
+        <p:nvSpPr>
+          <p:cNvPr id="24" name="Text 22"/>
+          <p:cNvSpPr/>
+          <p:nvPr/>
+        </p:nvSpPr>
+        <p:spPr>
+          <a:xfrm>
+            <a:off x="4370832" y="1508760"/>
+            <a:ext cx="1536192" cy="182880"/>
+          </a:xfrm>
+          <a:prstGeom prst="rect">
+            <a:avLst/>
+          </a:prstGeom>
+          <a:noFill/>
+          <a:ln/>
+        </p:spPr>
+        <p:txBody>
+          <a:bodyPr wrap="square" lIns="0" tIns="0" rIns="0" bIns="0" rtlCol="0" anchor="ctr"/>
+          <a:lstStyle/>
+          <a:p>
+            <a:pPr indent="0" marL="0">
+              <a:buNone/>
+            </a:pPr>
+            <a:r>
+              <a:rPr lang="en-US" sz="850" dirty="0">
                 <a:solidFill>
                   <a:srgbClr val="6B7280"/>
                 </a:solidFill>
@@ -6896,28 +6831,28 @@
                 <a:ea typeface="Calibri" pitchFamily="34" charset="-122"/>
                 <a:cs typeface="Calibri" pitchFamily="34" charset="-120"/>
               </a:rPr>
-              <a:t>JWT + httpOnly cookies</a:t>
-            </a:r>
-            <a:endParaRPr lang="en-US" sz="1000" dirty="0"/>
-          </a:p>
-        </p:txBody>
-      </p:sp>
-      <p:sp>
-        <p:nvSpPr>
-          <p:cNvPr id="24" name="Shape 22"/>
-          <p:cNvSpPr/>
-          <p:nvPr/>
-        </p:nvSpPr>
-        <p:spPr>
-          <a:xfrm>
-            <a:off x="347472" y="4251960"/>
-            <a:ext cx="4160520" cy="411480"/>
-          </a:xfrm>
-          <a:prstGeom prst="rect">
-            <a:avLst/>
-          </a:prstGeom>
-          <a:solidFill>
-            <a:srgbClr val="F9F9FB"/>
+              <a:t>Backend + worker via Docker Compose; systemd auto-restarts</a:t>
+            </a:r>
+            <a:endParaRPr lang="en-US" sz="850" dirty="0"/>
+          </a:p>
+        </p:txBody>
+      </p:sp>
+      <p:sp>
+        <p:nvSpPr>
+          <p:cNvPr id="25" name="Shape 23"/>
+          <p:cNvSpPr/>
+          <p:nvPr/>
+        </p:nvSpPr>
+        <p:spPr>
+          <a:xfrm>
+            <a:off x="3246120" y="1810512"/>
+            <a:ext cx="2743200" cy="347472"/>
+          </a:xfrm>
+          <a:prstGeom prst="rect">
+            <a:avLst/>
+          </a:prstGeom>
+          <a:solidFill>
+            <a:srgbClr val="FFFFFF"/>
           </a:solidFill>
           <a:ln w="12700">
             <a:solidFill>
@@ -6929,14 +6864,504 @@
       </p:sp>
       <p:sp>
         <p:nvSpPr>
-          <p:cNvPr id="25" name="Text 23"/>
-          <p:cNvSpPr/>
-          <p:nvPr/>
-        </p:nvSpPr>
-        <p:spPr>
-          <a:xfrm>
-            <a:off x="457200" y="4343400"/>
-            <a:ext cx="1280160" cy="228600"/>
+          <p:cNvPr id="26" name="Text 24"/>
+          <p:cNvSpPr/>
+          <p:nvPr/>
+        </p:nvSpPr>
+        <p:spPr>
+          <a:xfrm>
+            <a:off x="3328416" y="1892808"/>
+            <a:ext cx="1005840" cy="182880"/>
+          </a:xfrm>
+          <a:prstGeom prst="rect">
+            <a:avLst/>
+          </a:prstGeom>
+          <a:noFill/>
+          <a:ln/>
+        </p:spPr>
+        <p:txBody>
+          <a:bodyPr wrap="square" lIns="0" tIns="0" rIns="0" bIns="0" rtlCol="0" anchor="ctr"/>
+          <a:lstStyle/>
+          <a:p>
+            <a:pPr indent="0" marL="0">
+              <a:buNone/>
+            </a:pPr>
+            <a:r>
+              <a:rPr lang="en-US" sz="900" b="1" dirty="0">
+                <a:solidFill>
+                  <a:srgbClr val="111827"/>
+                </a:solidFill>
+                <a:latin typeface="Calibri" pitchFamily="34" charset="0"/>
+                <a:ea typeface="Calibri" pitchFamily="34" charset="-122"/>
+                <a:cs typeface="Calibri" pitchFamily="34" charset="-120"/>
+              </a:rPr>
+              <a:t>S3 + CloudFront</a:t>
+            </a:r>
+            <a:endParaRPr lang="en-US" sz="900" dirty="0"/>
+          </a:p>
+        </p:txBody>
+      </p:sp>
+      <p:sp>
+        <p:nvSpPr>
+          <p:cNvPr id="27" name="Text 25"/>
+          <p:cNvSpPr/>
+          <p:nvPr/>
+        </p:nvSpPr>
+        <p:spPr>
+          <a:xfrm>
+            <a:off x="4370832" y="1892808"/>
+            <a:ext cx="1536192" cy="182880"/>
+          </a:xfrm>
+          <a:prstGeom prst="rect">
+            <a:avLst/>
+          </a:prstGeom>
+          <a:noFill/>
+          <a:ln/>
+        </p:spPr>
+        <p:txBody>
+          <a:bodyPr wrap="square" lIns="0" tIns="0" rIns="0" bIns="0" rtlCol="0" anchor="ctr"/>
+          <a:lstStyle/>
+          <a:p>
+            <a:pPr indent="0" marL="0">
+              <a:buNone/>
+            </a:pPr>
+            <a:r>
+              <a:rPr lang="en-US" sz="850" dirty="0">
+                <a:solidFill>
+                  <a:srgbClr val="6B7280"/>
+                </a:solidFill>
+                <a:latin typeface="Calibri" pitchFamily="34" charset="0"/>
+                <a:ea typeface="Calibri" pitchFamily="34" charset="-122"/>
+                <a:cs typeface="Calibri" pitchFamily="34" charset="-120"/>
+              </a:rPr>
+              <a:t>React frontend — global CDN, HTTPS, cache invalidated on every deploy</a:t>
+            </a:r>
+            <a:endParaRPr lang="en-US" sz="850" dirty="0"/>
+          </a:p>
+        </p:txBody>
+      </p:sp>
+      <p:sp>
+        <p:nvSpPr>
+          <p:cNvPr id="28" name="Shape 26"/>
+          <p:cNvSpPr/>
+          <p:nvPr/>
+        </p:nvSpPr>
+        <p:spPr>
+          <a:xfrm>
+            <a:off x="3246120" y="2194560"/>
+            <a:ext cx="2743200" cy="347472"/>
+          </a:xfrm>
+          <a:prstGeom prst="rect">
+            <a:avLst/>
+          </a:prstGeom>
+          <a:solidFill>
+            <a:srgbClr val="F9F9FB"/>
+          </a:solidFill>
+          <a:ln w="12700">
+            <a:solidFill>
+              <a:srgbClr val="E5E7EB"/>
+            </a:solidFill>
+            <a:prstDash val="solid"/>
+          </a:ln>
+        </p:spPr>
+      </p:sp>
+      <p:sp>
+        <p:nvSpPr>
+          <p:cNvPr id="29" name="Text 27"/>
+          <p:cNvSpPr/>
+          <p:nvPr/>
+        </p:nvSpPr>
+        <p:spPr>
+          <a:xfrm>
+            <a:off x="3328416" y="2276856"/>
+            <a:ext cx="1005840" cy="182880"/>
+          </a:xfrm>
+          <a:prstGeom prst="rect">
+            <a:avLst/>
+          </a:prstGeom>
+          <a:noFill/>
+          <a:ln/>
+        </p:spPr>
+        <p:txBody>
+          <a:bodyPr wrap="square" lIns="0" tIns="0" rIns="0" bIns="0" rtlCol="0" anchor="ctr"/>
+          <a:lstStyle/>
+          <a:p>
+            <a:pPr indent="0" marL="0">
+              <a:buNone/>
+            </a:pPr>
+            <a:r>
+              <a:rPr lang="en-US" sz="900" b="1" dirty="0">
+                <a:solidFill>
+                  <a:srgbClr val="111827"/>
+                </a:solidFill>
+                <a:latin typeface="Calibri" pitchFamily="34" charset="0"/>
+                <a:ea typeface="Calibri" pitchFamily="34" charset="-122"/>
+                <a:cs typeface="Calibri" pitchFamily="34" charset="-120"/>
+              </a:rPr>
+              <a:t>SSM Param Store</a:t>
+            </a:r>
+            <a:endParaRPr lang="en-US" sz="900" dirty="0"/>
+          </a:p>
+        </p:txBody>
+      </p:sp>
+      <p:sp>
+        <p:nvSpPr>
+          <p:cNvPr id="30" name="Text 28"/>
+          <p:cNvSpPr/>
+          <p:nvPr/>
+        </p:nvSpPr>
+        <p:spPr>
+          <a:xfrm>
+            <a:off x="4370832" y="2276856"/>
+            <a:ext cx="1536192" cy="182880"/>
+          </a:xfrm>
+          <a:prstGeom prst="rect">
+            <a:avLst/>
+          </a:prstGeom>
+          <a:noFill/>
+          <a:ln/>
+        </p:spPr>
+        <p:txBody>
+          <a:bodyPr wrap="square" lIns="0" tIns="0" rIns="0" bIns="0" rtlCol="0" anchor="ctr"/>
+          <a:lstStyle/>
+          <a:p>
+            <a:pPr indent="0" marL="0">
+              <a:buNone/>
+            </a:pPr>
+            <a:r>
+              <a:rPr lang="en-US" sz="850" dirty="0">
+                <a:solidFill>
+                  <a:srgbClr val="6B7280"/>
+                </a:solidFill>
+                <a:latin typeface="Calibri" pitchFamily="34" charset="0"/>
+                <a:ea typeface="Calibri" pitchFamily="34" charset="-122"/>
+                <a:cs typeface="Calibri" pitchFamily="34" charset="-120"/>
+              </a:rPr>
+              <a:t>Secrets vault — .env as SecureStrings. Never in code.</a:t>
+            </a:r>
+            <a:endParaRPr lang="en-US" sz="850" dirty="0"/>
+          </a:p>
+        </p:txBody>
+      </p:sp>
+      <p:sp>
+        <p:nvSpPr>
+          <p:cNvPr id="31" name="Shape 29"/>
+          <p:cNvSpPr/>
+          <p:nvPr/>
+        </p:nvSpPr>
+        <p:spPr>
+          <a:xfrm>
+            <a:off x="3246120" y="2578608"/>
+            <a:ext cx="2743200" cy="347472"/>
+          </a:xfrm>
+          <a:prstGeom prst="rect">
+            <a:avLst/>
+          </a:prstGeom>
+          <a:solidFill>
+            <a:srgbClr val="FFFFFF"/>
+          </a:solidFill>
+          <a:ln w="12700">
+            <a:solidFill>
+              <a:srgbClr val="E5E7EB"/>
+            </a:solidFill>
+            <a:prstDash val="solid"/>
+          </a:ln>
+        </p:spPr>
+      </p:sp>
+      <p:sp>
+        <p:nvSpPr>
+          <p:cNvPr id="32" name="Text 30"/>
+          <p:cNvSpPr/>
+          <p:nvPr/>
+        </p:nvSpPr>
+        <p:spPr>
+          <a:xfrm>
+            <a:off x="3328416" y="2660904"/>
+            <a:ext cx="1005840" cy="182880"/>
+          </a:xfrm>
+          <a:prstGeom prst="rect">
+            <a:avLst/>
+          </a:prstGeom>
+          <a:noFill/>
+          <a:ln/>
+        </p:spPr>
+        <p:txBody>
+          <a:bodyPr wrap="square" lIns="0" tIns="0" rIns="0" bIns="0" rtlCol="0" anchor="ctr"/>
+          <a:lstStyle/>
+          <a:p>
+            <a:pPr indent="0" marL="0">
+              <a:buNone/>
+            </a:pPr>
+            <a:r>
+              <a:rPr lang="en-US" sz="900" b="1" dirty="0">
+                <a:solidFill>
+                  <a:srgbClr val="111827"/>
+                </a:solidFill>
+                <a:latin typeface="Calibri" pitchFamily="34" charset="0"/>
+                <a:ea typeface="Calibri" pitchFamily="34" charset="-122"/>
+                <a:cs typeface="Calibri" pitchFamily="34" charset="-120"/>
+              </a:rPr>
+              <a:t>CloudWatch</a:t>
+            </a:r>
+            <a:endParaRPr lang="en-US" sz="900" dirty="0"/>
+          </a:p>
+        </p:txBody>
+      </p:sp>
+      <p:sp>
+        <p:nvSpPr>
+          <p:cNvPr id="33" name="Text 31"/>
+          <p:cNvSpPr/>
+          <p:nvPr/>
+        </p:nvSpPr>
+        <p:spPr>
+          <a:xfrm>
+            <a:off x="4370832" y="2660904"/>
+            <a:ext cx="1536192" cy="182880"/>
+          </a:xfrm>
+          <a:prstGeom prst="rect">
+            <a:avLst/>
+          </a:prstGeom>
+          <a:noFill/>
+          <a:ln/>
+        </p:spPr>
+        <p:txBody>
+          <a:bodyPr wrap="square" lIns="0" tIns="0" rIns="0" bIns="0" rtlCol="0" anchor="ctr"/>
+          <a:lstStyle/>
+          <a:p>
+            <a:pPr indent="0" marL="0">
+              <a:buNone/>
+            </a:pPr>
+            <a:r>
+              <a:rPr lang="en-US" sz="850" dirty="0">
+                <a:solidFill>
+                  <a:srgbClr val="6B7280"/>
+                </a:solidFill>
+                <a:latin typeface="Calibri" pitchFamily="34" charset="0"/>
+                <a:ea typeface="Calibri" pitchFamily="34" charset="-122"/>
+                <a:cs typeface="Calibri" pitchFamily="34" charset="-120"/>
+              </a:rPr>
+              <a:t>Container logs, metric filters, 6 alarms, dashboard</a:t>
+            </a:r>
+            <a:endParaRPr lang="en-US" sz="850" dirty="0"/>
+          </a:p>
+        </p:txBody>
+      </p:sp>
+      <p:sp>
+        <p:nvSpPr>
+          <p:cNvPr id="34" name="Shape 32"/>
+          <p:cNvSpPr/>
+          <p:nvPr/>
+        </p:nvSpPr>
+        <p:spPr>
+          <a:xfrm>
+            <a:off x="3246120" y="2962656"/>
+            <a:ext cx="2743200" cy="347472"/>
+          </a:xfrm>
+          <a:prstGeom prst="rect">
+            <a:avLst/>
+          </a:prstGeom>
+          <a:solidFill>
+            <a:srgbClr val="F9F9FB"/>
+          </a:solidFill>
+          <a:ln w="12700">
+            <a:solidFill>
+              <a:srgbClr val="E5E7EB"/>
+            </a:solidFill>
+            <a:prstDash val="solid"/>
+          </a:ln>
+        </p:spPr>
+      </p:sp>
+      <p:sp>
+        <p:nvSpPr>
+          <p:cNvPr id="35" name="Text 33"/>
+          <p:cNvSpPr/>
+          <p:nvPr/>
+        </p:nvSpPr>
+        <p:spPr>
+          <a:xfrm>
+            <a:off x="3328416" y="3044952"/>
+            <a:ext cx="1005840" cy="182880"/>
+          </a:xfrm>
+          <a:prstGeom prst="rect">
+            <a:avLst/>
+          </a:prstGeom>
+          <a:noFill/>
+          <a:ln/>
+        </p:spPr>
+        <p:txBody>
+          <a:bodyPr wrap="square" lIns="0" tIns="0" rIns="0" bIns="0" rtlCol="0" anchor="ctr"/>
+          <a:lstStyle/>
+          <a:p>
+            <a:pPr indent="0" marL="0">
+              <a:buNone/>
+            </a:pPr>
+            <a:r>
+              <a:rPr lang="en-US" sz="900" b="1" dirty="0">
+                <a:solidFill>
+                  <a:srgbClr val="111827"/>
+                </a:solidFill>
+                <a:latin typeface="Calibri" pitchFamily="34" charset="0"/>
+                <a:ea typeface="Calibri" pitchFamily="34" charset="-122"/>
+                <a:cs typeface="Calibri" pitchFamily="34" charset="-120"/>
+              </a:rPr>
+              <a:t>Elastic IP</a:t>
+            </a:r>
+            <a:endParaRPr lang="en-US" sz="900" dirty="0"/>
+          </a:p>
+        </p:txBody>
+      </p:sp>
+      <p:sp>
+        <p:nvSpPr>
+          <p:cNvPr id="36" name="Text 34"/>
+          <p:cNvSpPr/>
+          <p:nvPr/>
+        </p:nvSpPr>
+        <p:spPr>
+          <a:xfrm>
+            <a:off x="4370832" y="3044952"/>
+            <a:ext cx="1536192" cy="182880"/>
+          </a:xfrm>
+          <a:prstGeom prst="rect">
+            <a:avLst/>
+          </a:prstGeom>
+          <a:noFill/>
+          <a:ln/>
+        </p:spPr>
+        <p:txBody>
+          <a:bodyPr wrap="square" lIns="0" tIns="0" rIns="0" bIns="0" rtlCol="0" anchor="ctr"/>
+          <a:lstStyle/>
+          <a:p>
+            <a:pPr indent="0" marL="0">
+              <a:buNone/>
+            </a:pPr>
+            <a:r>
+              <a:rPr lang="en-US" sz="850" dirty="0">
+                <a:solidFill>
+                  <a:srgbClr val="6B7280"/>
+                </a:solidFill>
+                <a:latin typeface="Calibri" pitchFamily="34" charset="0"/>
+                <a:ea typeface="Calibri" pitchFamily="34" charset="-122"/>
+                <a:cs typeface="Calibri" pitchFamily="34" charset="-120"/>
+              </a:rPr>
+              <a:t>Stable address — CloudFront origin never needs updating</a:t>
+            </a:r>
+            <a:endParaRPr lang="en-US" sz="850" dirty="0"/>
+          </a:p>
+        </p:txBody>
+      </p:sp>
+      <p:sp>
+        <p:nvSpPr>
+          <p:cNvPr id="37" name="Shape 35"/>
+          <p:cNvSpPr/>
+          <p:nvPr/>
+        </p:nvSpPr>
+        <p:spPr>
+          <a:xfrm>
+            <a:off x="3246120" y="3346704"/>
+            <a:ext cx="2743200" cy="347472"/>
+          </a:xfrm>
+          <a:prstGeom prst="rect">
+            <a:avLst/>
+          </a:prstGeom>
+          <a:solidFill>
+            <a:srgbClr val="FFFFFF"/>
+          </a:solidFill>
+          <a:ln w="12700">
+            <a:solidFill>
+              <a:srgbClr val="E5E7EB"/>
+            </a:solidFill>
+            <a:prstDash val="solid"/>
+          </a:ln>
+        </p:spPr>
+      </p:sp>
+      <p:sp>
+        <p:nvSpPr>
+          <p:cNvPr id="38" name="Text 36"/>
+          <p:cNvSpPr/>
+          <p:nvPr/>
+        </p:nvSpPr>
+        <p:spPr>
+          <a:xfrm>
+            <a:off x="3328416" y="3429000"/>
+            <a:ext cx="1005840" cy="182880"/>
+          </a:xfrm>
+          <a:prstGeom prst="rect">
+            <a:avLst/>
+          </a:prstGeom>
+          <a:noFill/>
+          <a:ln/>
+        </p:spPr>
+        <p:txBody>
+          <a:bodyPr wrap="square" lIns="0" tIns="0" rIns="0" bIns="0" rtlCol="0" anchor="ctr"/>
+          <a:lstStyle/>
+          <a:p>
+            <a:pPr indent="0" marL="0">
+              <a:buNone/>
+            </a:pPr>
+            <a:r>
+              <a:rPr lang="en-US" sz="900" b="1" dirty="0">
+                <a:solidFill>
+                  <a:srgbClr val="111827"/>
+                </a:solidFill>
+                <a:latin typeface="Calibri" pitchFamily="34" charset="0"/>
+                <a:ea typeface="Calibri" pitchFamily="34" charset="-122"/>
+                <a:cs typeface="Calibri" pitchFamily="34" charset="-120"/>
+              </a:rPr>
+              <a:t>IAM + OIDC</a:t>
+            </a:r>
+            <a:endParaRPr lang="en-US" sz="900" dirty="0"/>
+          </a:p>
+        </p:txBody>
+      </p:sp>
+      <p:sp>
+        <p:nvSpPr>
+          <p:cNvPr id="39" name="Text 37"/>
+          <p:cNvSpPr/>
+          <p:nvPr/>
+        </p:nvSpPr>
+        <p:spPr>
+          <a:xfrm>
+            <a:off x="4370832" y="3429000"/>
+            <a:ext cx="1536192" cy="182880"/>
+          </a:xfrm>
+          <a:prstGeom prst="rect">
+            <a:avLst/>
+          </a:prstGeom>
+          <a:noFill/>
+          <a:ln/>
+        </p:spPr>
+        <p:txBody>
+          <a:bodyPr wrap="square" lIns="0" tIns="0" rIns="0" bIns="0" rtlCol="0" anchor="ctr"/>
+          <a:lstStyle/>
+          <a:p>
+            <a:pPr indent="0" marL="0">
+              <a:buNone/>
+            </a:pPr>
+            <a:r>
+              <a:rPr lang="en-US" sz="850" dirty="0">
+                <a:solidFill>
+                  <a:srgbClr val="6B7280"/>
+                </a:solidFill>
+                <a:latin typeface="Calibri" pitchFamily="34" charset="0"/>
+                <a:ea typeface="Calibri" pitchFamily="34" charset="-122"/>
+                <a:cs typeface="Calibri" pitchFamily="34" charset="-120"/>
+              </a:rPr>
+              <a:t>GitHub Actions assumes role via OIDC — no long-lived AWS credentials</a:t>
+            </a:r>
+            <a:endParaRPr lang="en-US" sz="850" dirty="0"/>
+          </a:p>
+        </p:txBody>
+      </p:sp>
+      <p:sp>
+        <p:nvSpPr>
+          <p:cNvPr id="40" name="Text 38"/>
+          <p:cNvSpPr/>
+          <p:nvPr/>
+        </p:nvSpPr>
+        <p:spPr>
+          <a:xfrm>
+            <a:off x="6172200" y="1115568"/>
+            <a:ext cx="2743200" cy="274320"/>
           </a:xfrm>
           <a:prstGeom prst="rect">
             <a:avLst/>
@@ -6954,13 +7379,10 @@
             <a:r>
               <a:rPr lang="en-US" sz="1000" b="1" dirty="0">
                 <a:solidFill>
-                  <a:srgbClr val="111827"/>
-                </a:solidFill>
-                <a:latin typeface="Calibri" pitchFamily="34" charset="0"/>
-                <a:ea typeface="Calibri" pitchFamily="34" charset="-122"/>
-                <a:cs typeface="Calibri" pitchFamily="34" charset="-120"/>
-              </a:rPr>
-              <a:t>Infra / CI</a:t>
+                  <a:srgbClr val="14B8A6"/>
+                </a:solidFill>
+              </a:rPr>
+              <a:t>CI/CD — GitHub Actions, 3 jobs on push to main</a:t>
             </a:r>
             <a:endParaRPr lang="en-US" sz="1000" dirty="0"/>
           </a:p>
@@ -6968,89 +7390,14 @@
       </p:sp>
       <p:sp>
         <p:nvSpPr>
-          <p:cNvPr id="26" name="Text 24"/>
-          <p:cNvSpPr/>
-          <p:nvPr/>
-        </p:nvSpPr>
-        <p:spPr>
-          <a:xfrm>
-            <a:off x="1783080" y="4343400"/>
-            <a:ext cx="2606040" cy="228600"/>
-          </a:xfrm>
-          <a:prstGeom prst="rect">
-            <a:avLst/>
-          </a:prstGeom>
-          <a:noFill/>
-          <a:ln/>
-        </p:spPr>
-        <p:txBody>
-          <a:bodyPr wrap="square" lIns="0" tIns="0" rIns="0" bIns="0" rtlCol="0" anchor="ctr"/>
-          <a:lstStyle/>
-          <a:p>
-            <a:pPr indent="0" marL="0">
-              <a:buNone/>
-            </a:pPr>
-            <a:r>
-              <a:rPr lang="en-US" sz="1000" dirty="0">
-                <a:solidFill>
-                  <a:srgbClr val="6B7280"/>
-                </a:solidFill>
-                <a:latin typeface="Calibri" pitchFamily="34" charset="0"/>
-                <a:ea typeface="Calibri" pitchFamily="34" charset="-122"/>
-                <a:cs typeface="Calibri" pitchFamily="34" charset="-120"/>
-              </a:rPr>
-              <a:t>Docker Compose, Terraform, GitHub Actions</a:t>
-            </a:r>
-            <a:endParaRPr lang="en-US" sz="1000" dirty="0"/>
-          </a:p>
-        </p:txBody>
-      </p:sp>
-      <p:sp>
-        <p:nvSpPr>
-          <p:cNvPr id="27" name="Text 25"/>
-          <p:cNvSpPr/>
-          <p:nvPr/>
-        </p:nvSpPr>
-        <p:spPr>
-          <a:xfrm>
-            <a:off x="4846320" y="1207008"/>
-            <a:ext cx="3931920" cy="274320"/>
-          </a:xfrm>
-          <a:prstGeom prst="rect">
-            <a:avLst/>
-          </a:prstGeom>
-          <a:noFill/>
-          <a:ln/>
-        </p:spPr>
-        <p:txBody>
-          <a:bodyPr wrap="square" lIns="0" tIns="0" rIns="0" bIns="0" rtlCol="0" anchor="ctr"/>
-          <a:lstStyle/>
-          <a:p>
-            <a:pPr indent="0" marL="0">
-              <a:buNone/>
-            </a:pPr>
-            <a:r>
-              <a:rPr lang="en-US" sz="1100" b="1" dirty="0">
-                <a:solidFill>
-                  <a:srgbClr val="6366F1"/>
-                </a:solidFill>
-              </a:rPr>
-              <a:t>Engineering practices</a:t>
-            </a:r>
-            <a:endParaRPr lang="en-US" sz="1100" dirty="0"/>
-          </a:p>
-        </p:txBody>
-      </p:sp>
-      <p:sp>
-        <p:nvSpPr>
-          <p:cNvPr id="28" name="Shape 26"/>
-          <p:cNvSpPr/>
-          <p:nvPr/>
-        </p:nvSpPr>
-        <p:spPr>
-          <a:xfrm>
-            <a:off x="4846320" y="1508760"/>
-            <a:ext cx="3931920" cy="566928"/>
+          <p:cNvPr id="41" name="Shape 39"/>
+          <p:cNvSpPr/>
+          <p:nvPr/>
+        </p:nvSpPr>
+        <p:spPr>
+          <a:xfrm>
+            <a:off x="6172200" y="1426464"/>
+            <a:ext cx="2743200" cy="804672"/>
           </a:xfrm>
           <a:prstGeom prst="rect">
             <a:avLst/>
@@ -7065,9 +7412,9 @@
             <a:prstDash val="solid"/>
           </a:ln>
           <a:effectLst>
-            <a:outerShdw sx="100000" sy="100000" kx="0" ky="0" algn="bl" rotWithShape="0" blurRad="127000" dist="38100" dir="8100000">
+            <a:outerShdw sx="100000" sy="100000" kx="0" ky="0" algn="bl" rotWithShape="0" blurRad="101600" dist="25400" dir="8100000">
               <a:srgbClr val="000000">
-                <a:alpha val="22000"/>
+                <a:alpha val="18000"/>
               </a:srgbClr>
             </a:outerShdw>
           </a:effectLst>
@@ -7075,14 +7422,14 @@
       </p:sp>
       <p:sp>
         <p:nvSpPr>
-          <p:cNvPr id="29" name="Shape 27"/>
-          <p:cNvSpPr/>
-          <p:nvPr/>
-        </p:nvSpPr>
-        <p:spPr>
-          <a:xfrm>
-            <a:off x="4846320" y="1508760"/>
-            <a:ext cx="45720" cy="566928"/>
+          <p:cNvPr id="42" name="Shape 40"/>
+          <p:cNvSpPr/>
+          <p:nvPr/>
+        </p:nvSpPr>
+        <p:spPr>
+          <a:xfrm>
+            <a:off x="6172200" y="1426464"/>
+            <a:ext cx="45720" cy="804672"/>
           </a:xfrm>
           <a:prstGeom prst="rect">
             <a:avLst/>
@@ -7100,14 +7447,14 @@
       </p:sp>
       <p:sp>
         <p:nvSpPr>
-          <p:cNvPr id="30" name="Text 28"/>
-          <p:cNvSpPr/>
-          <p:nvPr/>
-        </p:nvSpPr>
-        <p:spPr>
-          <a:xfrm>
-            <a:off x="4974336" y="1563624"/>
-            <a:ext cx="3657600" cy="201168"/>
+          <p:cNvPr id="43" name="Text 41"/>
+          <p:cNvSpPr/>
+          <p:nvPr/>
+        </p:nvSpPr>
+        <p:spPr>
+          <a:xfrm>
+            <a:off x="6291072" y="1490472"/>
+            <a:ext cx="2542032" cy="219456"/>
           </a:xfrm>
           <a:prstGeom prst="rect">
             <a:avLst/>
@@ -7131,7 +7478,7 @@
                 <a:ea typeface="Calibri" pitchFamily="34" charset="-122"/>
                 <a:cs typeface="Calibri" pitchFamily="34" charset="-120"/>
               </a:rPr>
-              <a:t>Code structure</a:t>
+              <a:t>Job 1 — Terraform</a:t>
             </a:r>
             <a:endParaRPr lang="en-US" sz="1100" dirty="0"/>
           </a:p>
@@ -7139,30 +7486,30 @@
       </p:sp>
       <p:sp>
         <p:nvSpPr>
-          <p:cNvPr id="31" name="Text 29"/>
-          <p:cNvSpPr/>
-          <p:nvPr/>
-        </p:nvSpPr>
-        <p:spPr>
-          <a:xfrm>
-            <a:off x="4974336" y="1783080"/>
-            <a:ext cx="3657600" cy="237744"/>
-          </a:xfrm>
-          <a:prstGeom prst="rect">
-            <a:avLst/>
-          </a:prstGeom>
-          <a:noFill/>
-          <a:ln/>
-        </p:spPr>
-        <p:txBody>
-          <a:bodyPr wrap="square" lIns="0" tIns="0" rIns="0" bIns="0" rtlCol="0" anchor="ctr"/>
-          <a:lstStyle/>
-          <a:p>
-            <a:pPr indent="0" marL="0">
-              <a:buNone/>
-            </a:pPr>
-            <a:r>
-              <a:rPr lang="en-US" sz="950" dirty="0">
+          <p:cNvPr id="44" name="Text 42"/>
+          <p:cNvSpPr/>
+          <p:nvPr/>
+        </p:nvSpPr>
+        <p:spPr>
+          <a:xfrm>
+            <a:off x="6291072" y="1737360"/>
+            <a:ext cx="2542032" cy="420624"/>
+          </a:xfrm>
+          <a:prstGeom prst="rect">
+            <a:avLst/>
+          </a:prstGeom>
+          <a:noFill/>
+          <a:ln/>
+        </p:spPr>
+        <p:txBody>
+          <a:bodyPr wrap="square" lIns="0" tIns="0" rIns="0" bIns="0" rtlCol="0" anchor="ctr"/>
+          <a:lstStyle/>
+          <a:p>
+            <a:pPr indent="0" marL="0">
+              <a:buNone/>
+            </a:pPr>
+            <a:r>
+              <a:rPr lang="en-US" sz="880" dirty="0">
                 <a:solidFill>
                   <a:srgbClr val="6B7280"/>
                 </a:solidFill>
@@ -7170,22 +7517,22 @@
                 <a:ea typeface="Calibri" pitchFamily="34" charset="-122"/>
                 <a:cs typeface="Calibri" pitchFamily="34" charset="-120"/>
               </a:rPr>
-              <a:t>Domain-driven app/domains/*; thin API routers; Pydantic settings in app/core/config.py</a:t>
-            </a:r>
-            <a:endParaRPr lang="en-US" sz="950" dirty="0"/>
-          </a:p>
-        </p:txBody>
-      </p:sp>
-      <p:sp>
-        <p:nvSpPr>
-          <p:cNvPr id="32" name="Shape 30"/>
-          <p:cNvSpPr/>
-          <p:nvPr/>
-        </p:nvSpPr>
-        <p:spPr>
-          <a:xfrm>
-            <a:off x="4846320" y="2167128"/>
-            <a:ext cx="3931920" cy="566928"/>
+              <a:t>terraform apply — provisions/updates all infra. State in S3, locks in DynamoDB. New env = one workspace new + apply.</a:t>
+            </a:r>
+            <a:endParaRPr lang="en-US" sz="880" dirty="0"/>
+          </a:p>
+        </p:txBody>
+      </p:sp>
+      <p:sp>
+        <p:nvSpPr>
+          <p:cNvPr id="45" name="Shape 43"/>
+          <p:cNvSpPr/>
+          <p:nvPr/>
+        </p:nvSpPr>
+        <p:spPr>
+          <a:xfrm>
+            <a:off x="6172200" y="2340864"/>
+            <a:ext cx="2743200" cy="804672"/>
           </a:xfrm>
           <a:prstGeom prst="rect">
             <a:avLst/>
@@ -7200,9 +7547,9 @@
             <a:prstDash val="solid"/>
           </a:ln>
           <a:effectLst>
-            <a:outerShdw sx="100000" sy="100000" kx="0" ky="0" algn="bl" rotWithShape="0" blurRad="127000" dist="38100" dir="8100000">
+            <a:outerShdw sx="100000" sy="100000" kx="0" ky="0" algn="bl" rotWithShape="0" blurRad="101600" dist="25400" dir="8100000">
               <a:srgbClr val="000000">
-                <a:alpha val="22000"/>
+                <a:alpha val="18000"/>
               </a:srgbClr>
             </a:outerShdw>
           </a:effectLst>
@@ -7210,24 +7557,24 @@
       </p:sp>
       <p:sp>
         <p:nvSpPr>
-          <p:cNvPr id="33" name="Shape 31"/>
-          <p:cNvSpPr/>
-          <p:nvPr/>
-        </p:nvSpPr>
-        <p:spPr>
-          <a:xfrm>
-            <a:off x="4846320" y="2167128"/>
-            <a:ext cx="45720" cy="566928"/>
-          </a:xfrm>
-          <a:prstGeom prst="rect">
-            <a:avLst/>
-          </a:prstGeom>
-          <a:solidFill>
-            <a:srgbClr val="6366F1"/>
+          <p:cNvPr id="46" name="Shape 44"/>
+          <p:cNvSpPr/>
+          <p:nvPr/>
+        </p:nvSpPr>
+        <p:spPr>
+          <a:xfrm>
+            <a:off x="6172200" y="2340864"/>
+            <a:ext cx="45720" cy="804672"/>
+          </a:xfrm>
+          <a:prstGeom prst="rect">
+            <a:avLst/>
+          </a:prstGeom>
+          <a:solidFill>
+            <a:srgbClr val="14B8A6"/>
           </a:solidFill>
           <a:ln w="12700">
             <a:solidFill>
-              <a:srgbClr val="6366F1"/>
+              <a:srgbClr val="14B8A6"/>
             </a:solidFill>
             <a:prstDash val="solid"/>
           </a:ln>
@@ -7235,14 +7582,14 @@
       </p:sp>
       <p:sp>
         <p:nvSpPr>
-          <p:cNvPr id="34" name="Text 32"/>
-          <p:cNvSpPr/>
-          <p:nvPr/>
-        </p:nvSpPr>
-        <p:spPr>
-          <a:xfrm>
-            <a:off x="4974336" y="2221992"/>
-            <a:ext cx="3657600" cy="201168"/>
+          <p:cNvPr id="47" name="Text 45"/>
+          <p:cNvSpPr/>
+          <p:nvPr/>
+        </p:nvSpPr>
+        <p:spPr>
+          <a:xfrm>
+            <a:off x="6291072" y="2404872"/>
+            <a:ext cx="2542032" cy="219456"/>
           </a:xfrm>
           <a:prstGeom prst="rect">
             <a:avLst/>
@@ -7266,7 +7613,7 @@
                 <a:ea typeface="Calibri" pitchFamily="34" charset="-122"/>
                 <a:cs typeface="Calibri" pitchFamily="34" charset="-120"/>
               </a:rPr>
-              <a:t>Tests</a:t>
+              <a:t>Job 2 — Frontend</a:t>
             </a:r>
             <a:endParaRPr lang="en-US" sz="1100" dirty="0"/>
           </a:p>
@@ -7274,30 +7621,30 @@
       </p:sp>
       <p:sp>
         <p:nvSpPr>
-          <p:cNvPr id="35" name="Text 33"/>
-          <p:cNvSpPr/>
-          <p:nvPr/>
-        </p:nvSpPr>
-        <p:spPr>
-          <a:xfrm>
-            <a:off x="4974336" y="2441448"/>
-            <a:ext cx="3657600" cy="237744"/>
-          </a:xfrm>
-          <a:prstGeom prst="rect">
-            <a:avLst/>
-          </a:prstGeom>
-          <a:noFill/>
-          <a:ln/>
-        </p:spPr>
-        <p:txBody>
-          <a:bodyPr wrap="square" lIns="0" tIns="0" rIns="0" bIns="0" rtlCol="0" anchor="ctr"/>
-          <a:lstStyle/>
-          <a:p>
-            <a:pPr indent="0" marL="0">
-              <a:buNone/>
-            </a:pPr>
-            <a:r>
-              <a:rPr lang="en-US" sz="950" dirty="0">
+          <p:cNvPr id="48" name="Text 46"/>
+          <p:cNvSpPr/>
+          <p:nvPr/>
+        </p:nvSpPr>
+        <p:spPr>
+          <a:xfrm>
+            <a:off x="6291072" y="2651760"/>
+            <a:ext cx="2542032" cy="420624"/>
+          </a:xfrm>
+          <a:prstGeom prst="rect">
+            <a:avLst/>
+          </a:prstGeom>
+          <a:noFill/>
+          <a:ln/>
+        </p:spPr>
+        <p:txBody>
+          <a:bodyPr wrap="square" lIns="0" tIns="0" rIns="0" bIns="0" rtlCol="0" anchor="ctr"/>
+          <a:lstStyle/>
+          <a:p>
+            <a:pPr indent="0" marL="0">
+              <a:buNone/>
+            </a:pPr>
+            <a:r>
+              <a:rPr lang="en-US" sz="880" dirty="0">
                 <a:solidFill>
                   <a:srgbClr val="6B7280"/>
                 </a:solidFill>
@@ -7305,22 +7652,22 @@
                 <a:ea typeface="Calibri" pitchFamily="34" charset="-122"/>
                 <a:cs typeface="Calibri" pitchFamily="34" charset="-120"/>
               </a:rPr>
-              <a:t>backend/tests/unit/ — chat routing, verifier, quality gate JSON, generators with mocked LLM</a:t>
-            </a:r>
-            <a:endParaRPr lang="en-US" sz="950" dirty="0"/>
-          </a:p>
-        </p:txBody>
-      </p:sp>
-      <p:sp>
-        <p:nvSpPr>
-          <p:cNvPr id="36" name="Shape 34"/>
-          <p:cNvSpPr/>
-          <p:nvPr/>
-        </p:nvSpPr>
-        <p:spPr>
-          <a:xfrm>
-            <a:off x="4846320" y="2825496"/>
-            <a:ext cx="3931920" cy="566928"/>
+              <a:t>Vite build → S3 sync → CloudFront invalidation. Runs parallel with Job 3.</a:t>
+            </a:r>
+            <a:endParaRPr lang="en-US" sz="880" dirty="0"/>
+          </a:p>
+        </p:txBody>
+      </p:sp>
+      <p:sp>
+        <p:nvSpPr>
+          <p:cNvPr id="49" name="Shape 47"/>
+          <p:cNvSpPr/>
+          <p:nvPr/>
+        </p:nvSpPr>
+        <p:spPr>
+          <a:xfrm>
+            <a:off x="6172200" y="3255264"/>
+            <a:ext cx="2743200" cy="804672"/>
           </a:xfrm>
           <a:prstGeom prst="rect">
             <a:avLst/>
@@ -7335,9 +7682,9 @@
             <a:prstDash val="solid"/>
           </a:ln>
           <a:effectLst>
-            <a:outerShdw sx="100000" sy="100000" kx="0" ky="0" algn="bl" rotWithShape="0" blurRad="127000" dist="38100" dir="8100000">
+            <a:outerShdw sx="100000" sy="100000" kx="0" ky="0" algn="bl" rotWithShape="0" blurRad="101600" dist="25400" dir="8100000">
               <a:srgbClr val="000000">
-                <a:alpha val="22000"/>
+                <a:alpha val="18000"/>
               </a:srgbClr>
             </a:outerShdw>
           </a:effectLst>
@@ -7345,24 +7692,24 @@
       </p:sp>
       <p:sp>
         <p:nvSpPr>
-          <p:cNvPr id="37" name="Shape 35"/>
-          <p:cNvSpPr/>
-          <p:nvPr/>
-        </p:nvSpPr>
-        <p:spPr>
-          <a:xfrm>
-            <a:off x="4846320" y="2825496"/>
-            <a:ext cx="45720" cy="566928"/>
-          </a:xfrm>
-          <a:prstGeom prst="rect">
-            <a:avLst/>
-          </a:prstGeom>
-          <a:solidFill>
-            <a:srgbClr val="6366F1"/>
+          <p:cNvPr id="50" name="Shape 48"/>
+          <p:cNvSpPr/>
+          <p:nvPr/>
+        </p:nvSpPr>
+        <p:spPr>
+          <a:xfrm>
+            <a:off x="6172200" y="3255264"/>
+            <a:ext cx="45720" cy="804672"/>
+          </a:xfrm>
+          <a:prstGeom prst="rect">
+            <a:avLst/>
+          </a:prstGeom>
+          <a:solidFill>
+            <a:srgbClr val="F59E0B"/>
           </a:solidFill>
           <a:ln w="12700">
             <a:solidFill>
-              <a:srgbClr val="6366F1"/>
+              <a:srgbClr val="F59E0B"/>
             </a:solidFill>
             <a:prstDash val="solid"/>
           </a:ln>
@@ -7370,14 +7717,14 @@
       </p:sp>
       <p:sp>
         <p:nvSpPr>
-          <p:cNvPr id="38" name="Text 36"/>
-          <p:cNvSpPr/>
-          <p:nvPr/>
-        </p:nvSpPr>
-        <p:spPr>
-          <a:xfrm>
-            <a:off x="4974336" y="2880360"/>
-            <a:ext cx="3657600" cy="201168"/>
+          <p:cNvPr id="51" name="Text 49"/>
+          <p:cNvSpPr/>
+          <p:nvPr/>
+        </p:nvSpPr>
+        <p:spPr>
+          <a:xfrm>
+            <a:off x="6291072" y="3319272"/>
+            <a:ext cx="2542032" cy="219456"/>
           </a:xfrm>
           <a:prstGeom prst="rect">
             <a:avLst/>
@@ -7401,7 +7748,7 @@
                 <a:ea typeface="Calibri" pitchFamily="34" charset="-122"/>
                 <a:cs typeface="Calibri" pitchFamily="34" charset="-120"/>
               </a:rPr>
-              <a:t>Observability</a:t>
+              <a:t>Job 3 — Backend</a:t>
             </a:r>
             <a:endParaRPr lang="en-US" sz="1100" dirty="0"/>
           </a:p>
@@ -7409,30 +7756,30 @@
       </p:sp>
       <p:sp>
         <p:nvSpPr>
-          <p:cNvPr id="39" name="Text 37"/>
-          <p:cNvSpPr/>
-          <p:nvPr/>
-        </p:nvSpPr>
-        <p:spPr>
-          <a:xfrm>
-            <a:off x="4974336" y="3099816"/>
-            <a:ext cx="3657600" cy="237744"/>
-          </a:xfrm>
-          <a:prstGeom prst="rect">
-            <a:avLst/>
-          </a:prstGeom>
-          <a:noFill/>
-          <a:ln/>
-        </p:spPr>
-        <p:txBody>
-          <a:bodyPr wrap="square" lIns="0" tIns="0" rIns="0" bIns="0" rtlCol="0" anchor="ctr"/>
-          <a:lstStyle/>
-          <a:p>
-            <a:pPr indent="0" marL="0">
-              <a:buNone/>
-            </a:pPr>
-            <a:r>
-              <a:rPr lang="en-US" sz="950" dirty="0">
+          <p:cNvPr id="52" name="Text 50"/>
+          <p:cNvSpPr/>
+          <p:nvPr/>
+        </p:nvSpPr>
+        <p:spPr>
+          <a:xfrm>
+            <a:off x="6291072" y="3566160"/>
+            <a:ext cx="2542032" cy="420624"/>
+          </a:xfrm>
+          <a:prstGeom prst="rect">
+            <a:avLst/>
+          </a:prstGeom>
+          <a:noFill/>
+          <a:ln/>
+        </p:spPr>
+        <p:txBody>
+          <a:bodyPr wrap="square" lIns="0" tIns="0" rIns="0" bIns="0" rtlCol="0" anchor="ctr"/>
+          <a:lstStyle/>
+          <a:p>
+            <a:pPr indent="0" marL="0">
+              <a:buNone/>
+            </a:pPr>
+            <a:r>
+              <a:rPr lang="en-US" sz="880" dirty="0">
                 <a:solidFill>
                   <a:srgbClr val="6B7280"/>
                 </a:solidFill>
@@ -7440,134 +7787,38 @@
                 <a:ea typeface="Calibri" pitchFamily="34" charset="-122"/>
                 <a:cs typeface="Calibri" pitchFamily="34" charset="-120"/>
               </a:rPr>
-              <a:t>Langfuse generation traces; latency budget warnings (chat_*_latency_budget_ms); no secrets in logs</a:t>
-            </a:r>
-            <a:endParaRPr lang="en-US" sz="950" dirty="0"/>
-          </a:p>
-        </p:txBody>
-      </p:sp>
-      <p:sp>
-        <p:nvSpPr>
-          <p:cNvPr id="40" name="Shape 38"/>
-          <p:cNvSpPr/>
-          <p:nvPr/>
-        </p:nvSpPr>
-        <p:spPr>
-          <a:xfrm>
-            <a:off x="4846320" y="3483864"/>
-            <a:ext cx="3931920" cy="566928"/>
-          </a:xfrm>
-          <a:prstGeom prst="rect">
-            <a:avLst/>
-          </a:prstGeom>
-          <a:solidFill>
-            <a:srgbClr val="FFFFFF"/>
-          </a:solidFill>
-          <a:ln w="12700">
-            <a:solidFill>
-              <a:srgbClr val="E5E7EB"/>
-            </a:solidFill>
-            <a:prstDash val="solid"/>
-          </a:ln>
-          <a:effectLst>
-            <a:outerShdw sx="100000" sy="100000" kx="0" ky="0" algn="bl" rotWithShape="0" blurRad="127000" dist="38100" dir="8100000">
-              <a:srgbClr val="000000">
-                <a:alpha val="22000"/>
-              </a:srgbClr>
-            </a:outerShdw>
-          </a:effectLst>
-        </p:spPr>
-      </p:sp>
-      <p:sp>
-        <p:nvSpPr>
-          <p:cNvPr id="41" name="Shape 39"/>
-          <p:cNvSpPr/>
-          <p:nvPr/>
-        </p:nvSpPr>
-        <p:spPr>
-          <a:xfrm>
-            <a:off x="4846320" y="3483864"/>
-            <a:ext cx="45720" cy="566928"/>
-          </a:xfrm>
-          <a:prstGeom prst="rect">
-            <a:avLst/>
-          </a:prstGeom>
-          <a:solidFill>
-            <a:srgbClr val="6366F1"/>
-          </a:solidFill>
-          <a:ln w="12700">
-            <a:solidFill>
-              <a:srgbClr val="6366F1"/>
-            </a:solidFill>
-            <a:prstDash val="solid"/>
-          </a:ln>
-        </p:spPr>
-      </p:sp>
-      <p:sp>
-        <p:nvSpPr>
-          <p:cNvPr id="42" name="Text 40"/>
-          <p:cNvSpPr/>
-          <p:nvPr/>
-        </p:nvSpPr>
-        <p:spPr>
-          <a:xfrm>
-            <a:off x="4974336" y="3538728"/>
-            <a:ext cx="3657600" cy="201168"/>
-          </a:xfrm>
-          <a:prstGeom prst="rect">
-            <a:avLst/>
-          </a:prstGeom>
-          <a:noFill/>
-          <a:ln/>
-        </p:spPr>
-        <p:txBody>
-          <a:bodyPr wrap="square" lIns="0" tIns="0" rIns="0" bIns="0" rtlCol="0" anchor="ctr"/>
-          <a:lstStyle/>
-          <a:p>
-            <a:pPr indent="0" marL="0">
-              <a:buNone/>
-            </a:pPr>
-            <a:r>
-              <a:rPr lang="en-US" sz="1100" b="1" dirty="0">
-                <a:solidFill>
-                  <a:srgbClr val="111827"/>
-                </a:solidFill>
-                <a:latin typeface="Calibri" pitchFamily="34" charset="0"/>
-                <a:ea typeface="Calibri" pitchFamily="34" charset="-122"/>
-                <a:cs typeface="Calibri" pitchFamily="34" charset="-120"/>
-              </a:rPr>
-              <a:t>Deployment</a:t>
-            </a:r>
-            <a:endParaRPr lang="en-US" sz="1100" dirty="0"/>
-          </a:p>
-        </p:txBody>
-      </p:sp>
-      <p:sp>
-        <p:nvSpPr>
-          <p:cNvPr id="43" name="Text 41"/>
-          <p:cNvSpPr/>
-          <p:nvPr/>
-        </p:nvSpPr>
-        <p:spPr>
-          <a:xfrm>
-            <a:off x="4974336" y="3758184"/>
-            <a:ext cx="3657600" cy="237744"/>
-          </a:xfrm>
-          <a:prstGeom prst="rect">
-            <a:avLst/>
-          </a:prstGeom>
-          <a:noFill/>
-          <a:ln/>
-        </p:spPr>
-        <p:txBody>
-          <a:bodyPr wrap="square" lIns="0" tIns="0" rIns="0" bIns="0" rtlCol="0" anchor="ctr"/>
-          <a:lstStyle/>
-          <a:p>
-            <a:pPr indent="0" marL="0">
-              <a:buNone/>
-            </a:pPr>
-            <a:r>
-              <a:rPr lang="en-US" sz="950" dirty="0">
+              <a:t>SSM RunCommand: git pull + docker compose up --build. No SSH key, no open port 22. Full audit in CloudTrail.</a:t>
+            </a:r>
+            <a:endParaRPr lang="en-US" sz="880" dirty="0"/>
+          </a:p>
+        </p:txBody>
+      </p:sp>
+      <p:sp>
+        <p:nvSpPr>
+          <p:cNvPr id="53" name="Text 51"/>
+          <p:cNvSpPr/>
+          <p:nvPr/>
+        </p:nvSpPr>
+        <p:spPr>
+          <a:xfrm>
+            <a:off x="347472" y="4617720"/>
+            <a:ext cx="8503920" cy="420624"/>
+          </a:xfrm>
+          <a:prstGeom prst="rect">
+            <a:avLst/>
+          </a:prstGeom>
+          <a:noFill/>
+          <a:ln/>
+        </p:spPr>
+        <p:txBody>
+          <a:bodyPr wrap="square" lIns="0" tIns="0" rIns="0" bIns="0" rtlCol="0" anchor="ctr"/>
+          <a:lstStyle/>
+          <a:p>
+            <a:pPr indent="0" marL="0">
+              <a:buNone/>
+            </a:pPr>
+            <a:r>
+              <a:rPr lang="en-US" sz="880" i="1" dirty="0">
                 <a:solidFill>
                   <a:srgbClr val="6B7280"/>
                 </a:solidFill>
@@ -7575,144 +7826,9 @@
                 <a:ea typeface="Calibri" pitchFamily="34" charset="-122"/>
                 <a:cs typeface="Calibri" pitchFamily="34" charset="-120"/>
               </a:rPr>
-              <a:t>Docker Compose local; Terraform + GitHub Actions (deploy.yml, destroy.yml) for AWS-oriented cloud</a:t>
-            </a:r>
-            <a:endParaRPr lang="en-US" sz="950" dirty="0"/>
-          </a:p>
-        </p:txBody>
-      </p:sp>
-      <p:sp>
-        <p:nvSpPr>
-          <p:cNvPr id="44" name="Shape 42"/>
-          <p:cNvSpPr/>
-          <p:nvPr/>
-        </p:nvSpPr>
-        <p:spPr>
-          <a:xfrm>
-            <a:off x="4846320" y="4142232"/>
-            <a:ext cx="3931920" cy="566928"/>
-          </a:xfrm>
-          <a:prstGeom prst="rect">
-            <a:avLst/>
-          </a:prstGeom>
-          <a:solidFill>
-            <a:srgbClr val="FFFFFF"/>
-          </a:solidFill>
-          <a:ln w="12700">
-            <a:solidFill>
-              <a:srgbClr val="E5E7EB"/>
-            </a:solidFill>
-            <a:prstDash val="solid"/>
-          </a:ln>
-          <a:effectLst>
-            <a:outerShdw sx="100000" sy="100000" kx="0" ky="0" algn="bl" rotWithShape="0" blurRad="127000" dist="38100" dir="8100000">
-              <a:srgbClr val="000000">
-                <a:alpha val="22000"/>
-              </a:srgbClr>
-            </a:outerShdw>
-          </a:effectLst>
-        </p:spPr>
-      </p:sp>
-      <p:sp>
-        <p:nvSpPr>
-          <p:cNvPr id="45" name="Shape 43"/>
-          <p:cNvSpPr/>
-          <p:nvPr/>
-        </p:nvSpPr>
-        <p:spPr>
-          <a:xfrm>
-            <a:off x="4846320" y="4142232"/>
-            <a:ext cx="45720" cy="566928"/>
-          </a:xfrm>
-          <a:prstGeom prst="rect">
-            <a:avLst/>
-          </a:prstGeom>
-          <a:solidFill>
-            <a:srgbClr val="6366F1"/>
-          </a:solidFill>
-          <a:ln w="12700">
-            <a:solidFill>
-              <a:srgbClr val="6366F1"/>
-            </a:solidFill>
-            <a:prstDash val="solid"/>
-          </a:ln>
-        </p:spPr>
-      </p:sp>
-      <p:sp>
-        <p:nvSpPr>
-          <p:cNvPr id="46" name="Text 44"/>
-          <p:cNvSpPr/>
-          <p:nvPr/>
-        </p:nvSpPr>
-        <p:spPr>
-          <a:xfrm>
-            <a:off x="4974336" y="4197096"/>
-            <a:ext cx="3657600" cy="201168"/>
-          </a:xfrm>
-          <a:prstGeom prst="rect">
-            <a:avLst/>
-          </a:prstGeom>
-          <a:noFill/>
-          <a:ln/>
-        </p:spPr>
-        <p:txBody>
-          <a:bodyPr wrap="square" lIns="0" tIns="0" rIns="0" bIns="0" rtlCol="0" anchor="ctr"/>
-          <a:lstStyle/>
-          <a:p>
-            <a:pPr indent="0" marL="0">
-              <a:buNone/>
-            </a:pPr>
-            <a:r>
-              <a:rPr lang="en-US" sz="1100" b="1" dirty="0">
-                <a:solidFill>
-                  <a:srgbClr val="111827"/>
-                </a:solidFill>
-                <a:latin typeface="Calibri" pitchFamily="34" charset="0"/>
-                <a:ea typeface="Calibri" pitchFamily="34" charset="-122"/>
-                <a:cs typeface="Calibri" pitchFamily="34" charset="-120"/>
-              </a:rPr>
-              <a:t>Safety</a:t>
-            </a:r>
-            <a:endParaRPr lang="en-US" sz="1100" dirty="0"/>
-          </a:p>
-        </p:txBody>
-      </p:sp>
-      <p:sp>
-        <p:nvSpPr>
-          <p:cNvPr id="47" name="Text 45"/>
-          <p:cNvSpPr/>
-          <p:nvPr/>
-        </p:nvSpPr>
-        <p:spPr>
-          <a:xfrm>
-            <a:off x="4974336" y="4416552"/>
-            <a:ext cx="3657600" cy="237744"/>
-          </a:xfrm>
-          <a:prstGeom prst="rect">
-            <a:avLst/>
-          </a:prstGeom>
-          <a:noFill/>
-          <a:ln/>
-        </p:spPr>
-        <p:txBody>
-          <a:bodyPr wrap="square" lIns="0" tIns="0" rIns="0" bIns="0" rtlCol="0" anchor="ctr"/>
-          <a:lstStyle/>
-          <a:p>
-            <a:pPr indent="0" marL="0">
-              <a:buNone/>
-            </a:pPr>
-            <a:r>
-              <a:rPr lang="en-US" sz="950" dirty="0">
-                <a:solidFill>
-                  <a:srgbClr val="6B7280"/>
-                </a:solidFill>
-                <a:latin typeface="Calibri" pitchFamily="34" charset="0"/>
-                <a:ea typeface="Calibri" pitchFamily="34" charset="-122"/>
-                <a:cs typeface="Calibri" pitchFamily="34" charset="-120"/>
-              </a:rPr>
-              <a:t>Policy tiering at ingest + retrieve + pre-LLM; secret scanning; share surfaces rate-limited, revocable</a:t>
-            </a:r>
-            <a:endParaRPr lang="en-US" sz="950" dirty="0"/>
+              <a:t>Why EC2 not Lambda/Fargate? ARQ worker needs a persistent Redis connection and runs long jobs (3–5 min). Serverless cold starts make both worse. Why SSM RunCommand? No key rotation risk, no open port 22, full CloudTrail audit. Why Terraform? Every AWS resource version-controlled, reproducible in one command.</a:t>
+            </a:r>
+            <a:endParaRPr lang="en-US" sz="880" dirty="0"/>
           </a:p>
         </p:txBody>
       </p:sp>
@@ -7757,7 +7873,7 @@
         <p:spPr>
           <a:xfrm>
             <a:off x="0" y="0"/>
-            <a:ext cx="45720" cy="5143500"/>
+            <a:ext cx="9144000" cy="64008"/>
           </a:xfrm>
           <a:prstGeom prst="rect">
             <a:avLst/>
@@ -7775,22 +7891,127 @@
       </p:sp>
       <p:sp>
         <p:nvSpPr>
-          <p:cNvPr id="3" name="Shape 1"/>
-          <p:cNvSpPr/>
-          <p:nvPr/>
-        </p:nvSpPr>
-        <p:spPr>
-          <a:xfrm>
-            <a:off x="5669280" y="457200"/>
-            <a:ext cx="3291840" cy="3291840"/>
-          </a:xfrm>
-          <a:prstGeom prst="ellipse">
-            <a:avLst/>
-          </a:prstGeom>
-          <a:solidFill>
-            <a:srgbClr val="6366F1">
-              <a:alpha val="10000"/>
-            </a:srgbClr>
+          <p:cNvPr id="3" name="Text 1"/>
+          <p:cNvSpPr/>
+          <p:nvPr/>
+        </p:nvSpPr>
+        <p:spPr>
+          <a:xfrm>
+            <a:off x="457200" y="182880"/>
+            <a:ext cx="8229600" cy="237744"/>
+          </a:xfrm>
+          <a:prstGeom prst="rect">
+            <a:avLst/>
+          </a:prstGeom>
+          <a:noFill/>
+          <a:ln/>
+        </p:spPr>
+        <p:txBody>
+          <a:bodyPr wrap="square" lIns="0" tIns="0" rIns="0" bIns="0" rtlCol="0" anchor="ctr"/>
+          <a:lstStyle/>
+          <a:p>
+            <a:pPr indent="0" marL="0">
+              <a:buNone/>
+            </a:pPr>
+            <a:r>
+              <a:rPr lang="en-US" sz="900" b="1" spc="500" kern="0" dirty="0">
+                <a:solidFill>
+                  <a:srgbClr val="6366F1"/>
+                </a:solidFill>
+              </a:rPr>
+              <a:t>ENGINEERING PRACTICES</a:t>
+            </a:r>
+            <a:endParaRPr lang="en-US" sz="900" dirty="0"/>
+          </a:p>
+        </p:txBody>
+      </p:sp>
+      <p:sp>
+        <p:nvSpPr>
+          <p:cNvPr id="4" name="Text 2"/>
+          <p:cNvSpPr/>
+          <p:nvPr/>
+        </p:nvSpPr>
+        <p:spPr>
+          <a:xfrm>
+            <a:off x="457200" y="457200"/>
+            <a:ext cx="8229600" cy="566928"/>
+          </a:xfrm>
+          <a:prstGeom prst="rect">
+            <a:avLst/>
+          </a:prstGeom>
+          <a:noFill/>
+          <a:ln/>
+        </p:spPr>
+        <p:txBody>
+          <a:bodyPr wrap="square" lIns="0" tIns="0" rIns="0" bIns="0" rtlCol="0" anchor="ctr"/>
+          <a:lstStyle/>
+          <a:p>
+            <a:pPr algn="l" indent="0" marL="0">
+              <a:buNone/>
+            </a:pPr>
+            <a:r>
+              <a:rPr lang="en-US" sz="2200" b="1" dirty="0">
+                <a:solidFill>
+                  <a:srgbClr val="F1F5F9"/>
+                </a:solidFill>
+                <a:latin typeface="Calibri" pitchFamily="34" charset="0"/>
+                <a:ea typeface="Calibri" pitchFamily="34" charset="-122"/>
+                <a:cs typeface="Calibri" pitchFamily="34" charset="-120"/>
+              </a:rPr>
+              <a:t>Built to be read, tested, and operated — not just demoed.</a:t>
+            </a:r>
+            <a:endParaRPr lang="en-US" sz="2200" dirty="0"/>
+          </a:p>
+        </p:txBody>
+      </p:sp>
+      <p:sp>
+        <p:nvSpPr>
+          <p:cNvPr id="5" name="Shape 3"/>
+          <p:cNvSpPr/>
+          <p:nvPr/>
+        </p:nvSpPr>
+        <p:spPr>
+          <a:xfrm>
+            <a:off x="256032" y="1170432"/>
+            <a:ext cx="4160520" cy="1755648"/>
+          </a:xfrm>
+          <a:prstGeom prst="rect">
+            <a:avLst/>
+          </a:prstGeom>
+          <a:solidFill>
+            <a:srgbClr val="13131A"/>
+          </a:solidFill>
+          <a:ln w="12700">
+            <a:solidFill>
+              <a:srgbClr val="2D2D3F"/>
+            </a:solidFill>
+            <a:prstDash val="solid"/>
+          </a:ln>
+          <a:effectLst>
+            <a:outerShdw sx="100000" sy="100000" kx="0" ky="0" algn="bl" rotWithShape="0" blurRad="101600" dist="25400" dir="8100000">
+              <a:srgbClr val="000000">
+                <a:alpha val="18000"/>
+              </a:srgbClr>
+            </a:outerShdw>
+          </a:effectLst>
+        </p:spPr>
+      </p:sp>
+      <p:sp>
+        <p:nvSpPr>
+          <p:cNvPr id="6" name="Shape 4"/>
+          <p:cNvSpPr/>
+          <p:nvPr/>
+        </p:nvSpPr>
+        <p:spPr>
+          <a:xfrm>
+            <a:off x="256032" y="1170432"/>
+            <a:ext cx="4160520" cy="54864"/>
+          </a:xfrm>
+          <a:prstGeom prst="rect">
+            <a:avLst/>
+          </a:prstGeom>
+          <a:solidFill>
+            <a:srgbClr val="6366F1"/>
           </a:solidFill>
           <a:ln w="12700">
             <a:solidFill>
@@ -7802,22 +8023,130 @@
       </p:sp>
       <p:sp>
         <p:nvSpPr>
-          <p:cNvPr id="4" name="Shape 2"/>
-          <p:cNvSpPr/>
-          <p:nvPr/>
-        </p:nvSpPr>
-        <p:spPr>
-          <a:xfrm>
-            <a:off x="6400800" y="1097280"/>
-            <a:ext cx="2194560" cy="2194560"/>
-          </a:xfrm>
-          <a:prstGeom prst="ellipse">
-            <a:avLst/>
-          </a:prstGeom>
-          <a:solidFill>
-            <a:srgbClr val="14B8A6">
-              <a:alpha val="12000"/>
-            </a:srgbClr>
+          <p:cNvPr id="7" name="Text 5"/>
+          <p:cNvSpPr/>
+          <p:nvPr/>
+        </p:nvSpPr>
+        <p:spPr>
+          <a:xfrm>
+            <a:off x="384048" y="1243584"/>
+            <a:ext cx="3913632" cy="274320"/>
+          </a:xfrm>
+          <a:prstGeom prst="rect">
+            <a:avLst/>
+          </a:prstGeom>
+          <a:noFill/>
+          <a:ln/>
+        </p:spPr>
+        <p:txBody>
+          <a:bodyPr wrap="square" lIns="0" tIns="0" rIns="0" bIns="0" rtlCol="0" anchor="ctr"/>
+          <a:lstStyle/>
+          <a:p>
+            <a:pPr indent="0" marL="0">
+              <a:buNone/>
+            </a:pPr>
+            <a:r>
+              <a:rPr lang="en-US" sz="1100" b="1" dirty="0">
+                <a:solidFill>
+                  <a:srgbClr val="818CF8"/>
+                </a:solidFill>
+                <a:latin typeface="Calibri" pitchFamily="34" charset="0"/>
+                <a:ea typeface="Calibri" pitchFamily="34" charset="-122"/>
+                <a:cs typeface="Calibri" pitchFamily="34" charset="-120"/>
+              </a:rPr>
+              <a:t>Code structure</a:t>
+            </a:r>
+            <a:endParaRPr lang="en-US" sz="1100" dirty="0"/>
+          </a:p>
+        </p:txBody>
+      </p:sp>
+      <p:sp>
+        <p:nvSpPr>
+          <p:cNvPr id="8" name="Text 6"/>
+          <p:cNvSpPr/>
+          <p:nvPr/>
+        </p:nvSpPr>
+        <p:spPr>
+          <a:xfrm>
+            <a:off x="384048" y="1554480"/>
+            <a:ext cx="3913632" cy="1316736"/>
+          </a:xfrm>
+          <a:prstGeom prst="rect">
+            <a:avLst/>
+          </a:prstGeom>
+          <a:noFill/>
+          <a:ln/>
+        </p:spPr>
+        <p:txBody>
+          <a:bodyPr wrap="square" lIns="0" tIns="0" rIns="0" bIns="0" rtlCol="0" anchor="t"/>
+          <a:lstStyle/>
+          <a:p>
+            <a:pPr indent="0" marL="0">
+              <a:buNone/>
+            </a:pPr>
+            <a:r>
+              <a:rPr lang="en-US" sz="950" dirty="0">
+                <a:solidFill>
+                  <a:srgbClr val="94A3B8"/>
+                </a:solidFill>
+                <a:latin typeface="Calibri" pitchFamily="34" charset="0"/>
+                <a:ea typeface="Calibri" pitchFamily="34" charset="-122"/>
+                <a:cs typeface="Calibri" pitchFamily="34" charset="-120"/>
+              </a:rPr>
+              <a:t>Domain-driven: app/domains/{chat, retrieval, answering, knowledge, memory, policy, sharing, evaluation, embedding}. Thin API routers — no business logic in route handlers. Pydantic v2 at every boundary: requests, responses, config, LLM output schemas. Every module has a docstring stating what it does and what it does not do.</a:t>
+            </a:r>
+            <a:endParaRPr lang="en-US" sz="950" dirty="0"/>
+          </a:p>
+        </p:txBody>
+      </p:sp>
+      <p:sp>
+        <p:nvSpPr>
+          <p:cNvPr id="9" name="Shape 7"/>
+          <p:cNvSpPr/>
+          <p:nvPr/>
+        </p:nvSpPr>
+        <p:spPr>
+          <a:xfrm>
+            <a:off x="4681728" y="1170432"/>
+            <a:ext cx="4160520" cy="1755648"/>
+          </a:xfrm>
+          <a:prstGeom prst="rect">
+            <a:avLst/>
+          </a:prstGeom>
+          <a:solidFill>
+            <a:srgbClr val="13131A"/>
+          </a:solidFill>
+          <a:ln w="12700">
+            <a:solidFill>
+              <a:srgbClr val="2D2D3F"/>
+            </a:solidFill>
+            <a:prstDash val="solid"/>
+          </a:ln>
+          <a:effectLst>
+            <a:outerShdw sx="100000" sy="100000" kx="0" ky="0" algn="bl" rotWithShape="0" blurRad="101600" dist="25400" dir="8100000">
+              <a:srgbClr val="000000">
+                <a:alpha val="18000"/>
+              </a:srgbClr>
+            </a:outerShdw>
+          </a:effectLst>
+        </p:spPr>
+      </p:sp>
+      <p:sp>
+        <p:nvSpPr>
+          <p:cNvPr id="10" name="Shape 8"/>
+          <p:cNvSpPr/>
+          <p:nvPr/>
+        </p:nvSpPr>
+        <p:spPr>
+          <a:xfrm>
+            <a:off x="4681728" y="1170432"/>
+            <a:ext cx="4160520" cy="54864"/>
+          </a:xfrm>
+          <a:prstGeom prst="rect">
+            <a:avLst/>
+          </a:prstGeom>
+          <a:solidFill>
+            <a:srgbClr val="14B8A6"/>
           </a:solidFill>
           <a:ln w="12700">
             <a:solidFill>
@@ -7829,14 +8158,789 @@
       </p:sp>
       <p:sp>
         <p:nvSpPr>
+          <p:cNvPr id="11" name="Text 9"/>
+          <p:cNvSpPr/>
+          <p:nvPr/>
+        </p:nvSpPr>
+        <p:spPr>
+          <a:xfrm>
+            <a:off x="4809744" y="1243584"/>
+            <a:ext cx="3913632" cy="274320"/>
+          </a:xfrm>
+          <a:prstGeom prst="rect">
+            <a:avLst/>
+          </a:prstGeom>
+          <a:noFill/>
+          <a:ln/>
+        </p:spPr>
+        <p:txBody>
+          <a:bodyPr wrap="square" lIns="0" tIns="0" rIns="0" bIns="0" rtlCol="0" anchor="ctr"/>
+          <a:lstStyle/>
+          <a:p>
+            <a:pPr indent="0" marL="0">
+              <a:buNone/>
+            </a:pPr>
+            <a:r>
+              <a:rPr lang="en-US" sz="1100" b="1" dirty="0">
+                <a:solidFill>
+                  <a:srgbClr val="14B8A6"/>
+                </a:solidFill>
+                <a:latin typeface="Calibri" pitchFamily="34" charset="0"/>
+                <a:ea typeface="Calibri" pitchFamily="34" charset="-122"/>
+                <a:cs typeface="Calibri" pitchFamily="34" charset="-120"/>
+              </a:rPr>
+              <a:t>Tests — 30+ unit test files</a:t>
+            </a:r>
+            <a:endParaRPr lang="en-US" sz="1100" dirty="0"/>
+          </a:p>
+        </p:txBody>
+      </p:sp>
+      <p:sp>
+        <p:nvSpPr>
+          <p:cNvPr id="12" name="Text 10"/>
+          <p:cNvSpPr/>
+          <p:nvPr/>
+        </p:nvSpPr>
+        <p:spPr>
+          <a:xfrm>
+            <a:off x="4809744" y="1554480"/>
+            <a:ext cx="3913632" cy="1316736"/>
+          </a:xfrm>
+          <a:prstGeom prst="rect">
+            <a:avLst/>
+          </a:prstGeom>
+          <a:noFill/>
+          <a:ln/>
+        </p:spPr>
+        <p:txBody>
+          <a:bodyPr wrap="square" lIns="0" tIns="0" rIns="0" bIns="0" rtlCol="0" anchor="t"/>
+          <a:lstStyle/>
+          <a:p>
+            <a:pPr indent="0" marL="0">
+              <a:buNone/>
+            </a:pPr>
+            <a:r>
+              <a:rPr lang="en-US" sz="950" dirty="0">
+                <a:solidFill>
+                  <a:srgbClr val="94A3B8"/>
+                </a:solidFill>
+                <a:latin typeface="Calibri" pitchFamily="34" charset="0"/>
+                <a:ea typeface="Calibri" pitchFamily="34" charset="-122"/>
+                <a:cs typeface="Calibri" pitchFamily="34" charset="-120"/>
+              </a:rPr>
+              <a:t>Quality gate JSON + Pydantic schema enforcement · Evidence verifier grounded reference checking · Chat routing decisions (workspace vs twin, scope vs substantive) · Hybrid retrieval merge + deduplication logic · Policy rules (file blocking, secret scanning, content tiering) · Embedding provider failover · Memory pipeline · Sharing service (slug uniqueness, active/inactive, scope enforcement). All unit tests mock the LLM — no live API calls, CI-friendly.</a:t>
+            </a:r>
+            <a:endParaRPr lang="en-US" sz="950" dirty="0"/>
+          </a:p>
+        </p:txBody>
+      </p:sp>
+      <p:sp>
+        <p:nvSpPr>
+          <p:cNvPr id="13" name="Shape 11"/>
+          <p:cNvSpPr/>
+          <p:nvPr/>
+        </p:nvSpPr>
+        <p:spPr>
+          <a:xfrm>
+            <a:off x="256032" y="3035808"/>
+            <a:ext cx="4160520" cy="1828800"/>
+          </a:xfrm>
+          <a:prstGeom prst="rect">
+            <a:avLst/>
+          </a:prstGeom>
+          <a:solidFill>
+            <a:srgbClr val="13131A"/>
+          </a:solidFill>
+          <a:ln w="12700">
+            <a:solidFill>
+              <a:srgbClr val="2D2D3F"/>
+            </a:solidFill>
+            <a:prstDash val="solid"/>
+          </a:ln>
+          <a:effectLst>
+            <a:outerShdw sx="100000" sy="100000" kx="0" ky="0" algn="bl" rotWithShape="0" blurRad="101600" dist="25400" dir="8100000">
+              <a:srgbClr val="000000">
+                <a:alpha val="18000"/>
+              </a:srgbClr>
+            </a:outerShdw>
+          </a:effectLst>
+        </p:spPr>
+      </p:sp>
+      <p:sp>
+        <p:nvSpPr>
+          <p:cNvPr id="14" name="Shape 12"/>
+          <p:cNvSpPr/>
+          <p:nvPr/>
+        </p:nvSpPr>
+        <p:spPr>
+          <a:xfrm>
+            <a:off x="256032" y="3035808"/>
+            <a:ext cx="4160520" cy="54864"/>
+          </a:xfrm>
+          <a:prstGeom prst="rect">
+            <a:avLst/>
+          </a:prstGeom>
+          <a:solidFill>
+            <a:srgbClr val="F59E0B"/>
+          </a:solidFill>
+          <a:ln w="12700">
+            <a:solidFill>
+              <a:srgbClr val="F59E0B"/>
+            </a:solidFill>
+            <a:prstDash val="solid"/>
+          </a:ln>
+        </p:spPr>
+      </p:sp>
+      <p:sp>
+        <p:nvSpPr>
+          <p:cNvPr id="15" name="Text 13"/>
+          <p:cNvSpPr/>
+          <p:nvPr/>
+        </p:nvSpPr>
+        <p:spPr>
+          <a:xfrm>
+            <a:off x="384048" y="3108960"/>
+            <a:ext cx="3913632" cy="274320"/>
+          </a:xfrm>
+          <a:prstGeom prst="rect">
+            <a:avLst/>
+          </a:prstGeom>
+          <a:noFill/>
+          <a:ln/>
+        </p:spPr>
+        <p:txBody>
+          <a:bodyPr wrap="square" lIns="0" tIns="0" rIns="0" bIns="0" rtlCol="0" anchor="ctr"/>
+          <a:lstStyle/>
+          <a:p>
+            <a:pPr indent="0" marL="0">
+              <a:buNone/>
+            </a:pPr>
+            <a:r>
+              <a:rPr lang="en-US" sz="1100" b="1" dirty="0">
+                <a:solidFill>
+                  <a:srgbClr val="F59E0B"/>
+                </a:solidFill>
+                <a:latin typeface="Calibri" pitchFamily="34" charset="0"/>
+                <a:ea typeface="Calibri" pitchFamily="34" charset="-122"/>
+                <a:cs typeface="Calibri" pitchFamily="34" charset="-120"/>
+              </a:rPr>
+              <a:t>Observability</a:t>
+            </a:r>
+            <a:endParaRPr lang="en-US" sz="1100" dirty="0"/>
+          </a:p>
+        </p:txBody>
+      </p:sp>
+      <p:sp>
+        <p:nvSpPr>
+          <p:cNvPr id="16" name="Text 14"/>
+          <p:cNvSpPr/>
+          <p:nvPr/>
+        </p:nvSpPr>
+        <p:spPr>
+          <a:xfrm>
+            <a:off x="384048" y="3419856"/>
+            <a:ext cx="3913632" cy="1353312"/>
+          </a:xfrm>
+          <a:prstGeom prst="rect">
+            <a:avLst/>
+          </a:prstGeom>
+          <a:noFill/>
+          <a:ln/>
+        </p:spPr>
+        <p:txBody>
+          <a:bodyPr wrap="square" lIns="0" tIns="0" rIns="0" bIns="0" rtlCol="0" anchor="t"/>
+          <a:lstStyle/>
+          <a:p>
+            <a:pPr indent="0" marL="0">
+              <a:buNone/>
+            </a:pPr>
+            <a:r>
+              <a:rPr lang="en-US" sz="900" dirty="0">
+                <a:solidFill>
+                  <a:srgbClr val="94A3B8"/>
+                </a:solidFill>
+                <a:latin typeface="Calibri" pitchFamily="34" charset="0"/>
+                <a:ea typeface="Calibri" pitchFamily="34" charset="-122"/>
+                <a:cs typeface="Calibri" pitchFamily="34" charset="-120"/>
+              </a:rPr>
+              <a:t>Langfuse: answer_generation, response_quality_gate, workspace_answer_generation, intent_classification traces — tagged with workspace_id, token counts, latency.</a:t>
+            </a:r>
+            <a:endParaRPr lang="en-US" sz="900" dirty="0"/>
+          </a:p>
+          <a:p>
+            <a:pPr indent="0" marL="0">
+              <a:buNone/>
+            </a:pPr>
+            <a:endParaRPr lang="en-US" sz="900" dirty="0"/>
+          </a:p>
+          <a:p>
+            <a:pPr indent="0" marL="0">
+              <a:buNone/>
+            </a:pPr>
+            <a:r>
+              <a:rPr lang="en-US" sz="900" dirty="0">
+                <a:solidFill>
+                  <a:srgbClr val="94A3B8"/>
+                </a:solidFill>
+                <a:latin typeface="Calibri" pitchFamily="34" charset="0"/>
+                <a:ea typeface="Calibri" pitchFamily="34" charset="-122"/>
+                <a:cs typeface="Calibri" pitchFamily="34" charset="-120"/>
+              </a:rPr>
+              <a:t>CloudWatch metric filters: ChatLatencyMs, RetrievalChunksReturned, MissingEvidenceCount, AppErrorCount, QualityGateRejectionCount, QualityGateExhaustedCount. 6 alarms: P95 latency, budget breaches, app errors, zero retrieval, gate rejection rate, gate exhaustion.</a:t>
+            </a:r>
+            <a:endParaRPr lang="en-US" sz="900" dirty="0"/>
+          </a:p>
+          <a:p>
+            <a:pPr indent="0" marL="0">
+              <a:buNone/>
+            </a:pPr>
+            <a:endParaRPr lang="en-US" sz="900" dirty="0"/>
+          </a:p>
+          <a:p>
+            <a:pPr indent="0" marL="0">
+              <a:buNone/>
+            </a:pPr>
+            <a:r>
+              <a:rPr lang="en-US" sz="900" dirty="0">
+                <a:solidFill>
+                  <a:srgbClr val="94A3B8"/>
+                </a:solidFill>
+                <a:latin typeface="Calibri" pitchFamily="34" charset="0"/>
+                <a:ea typeface="Calibri" pitchFamily="34" charset="-122"/>
+                <a:cs typeface="Calibri" pitchFamily="34" charset="-120"/>
+              </a:rPr>
+              <a:t>Full request_id traceability from HTTP through background worker. No source file contents in logs at any level.</a:t>
+            </a:r>
+            <a:endParaRPr lang="en-US" sz="900" dirty="0"/>
+          </a:p>
+        </p:txBody>
+      </p:sp>
+      <p:sp>
+        <p:nvSpPr>
+          <p:cNvPr id="17" name="Shape 15"/>
+          <p:cNvSpPr/>
+          <p:nvPr/>
+        </p:nvSpPr>
+        <p:spPr>
+          <a:xfrm>
+            <a:off x="4681728" y="3035808"/>
+            <a:ext cx="4160520" cy="1828800"/>
+          </a:xfrm>
+          <a:prstGeom prst="rect">
+            <a:avLst/>
+          </a:prstGeom>
+          <a:solidFill>
+            <a:srgbClr val="13131A"/>
+          </a:solidFill>
+          <a:ln w="12700">
+            <a:solidFill>
+              <a:srgbClr val="2D2D3F"/>
+            </a:solidFill>
+            <a:prstDash val="solid"/>
+          </a:ln>
+          <a:effectLst>
+            <a:outerShdw sx="100000" sy="100000" kx="0" ky="0" algn="bl" rotWithShape="0" blurRad="101600" dist="25400" dir="8100000">
+              <a:srgbClr val="000000">
+                <a:alpha val="18000"/>
+              </a:srgbClr>
+            </a:outerShdw>
+          </a:effectLst>
+        </p:spPr>
+      </p:sp>
+      <p:sp>
+        <p:nvSpPr>
+          <p:cNvPr id="18" name="Shape 16"/>
+          <p:cNvSpPr/>
+          <p:nvPr/>
+        </p:nvSpPr>
+        <p:spPr>
+          <a:xfrm>
+            <a:off x="4681728" y="3035808"/>
+            <a:ext cx="4160520" cy="54864"/>
+          </a:xfrm>
+          <a:prstGeom prst="rect">
+            <a:avLst/>
+          </a:prstGeom>
+          <a:solidFill>
+            <a:srgbClr val="F43F5E"/>
+          </a:solidFill>
+          <a:ln w="12700">
+            <a:solidFill>
+              <a:srgbClr val="F43F5E"/>
+            </a:solidFill>
+            <a:prstDash val="solid"/>
+          </a:ln>
+        </p:spPr>
+      </p:sp>
+      <p:sp>
+        <p:nvSpPr>
+          <p:cNvPr id="19" name="Text 17"/>
+          <p:cNvSpPr/>
+          <p:nvPr/>
+        </p:nvSpPr>
+        <p:spPr>
+          <a:xfrm>
+            <a:off x="4809744" y="3108960"/>
+            <a:ext cx="3913632" cy="420624"/>
+          </a:xfrm>
+          <a:prstGeom prst="rect">
+            <a:avLst/>
+          </a:prstGeom>
+          <a:noFill/>
+          <a:ln/>
+        </p:spPr>
+        <p:txBody>
+          <a:bodyPr wrap="square" lIns="0" tIns="0" rIns="0" bIns="0" rtlCol="0" anchor="ctr"/>
+          <a:lstStyle/>
+          <a:p>
+            <a:pPr indent="0" marL="0">
+              <a:buNone/>
+            </a:pPr>
+            <a:r>
+              <a:rPr lang="en-US" sz="1100" b="1" dirty="0">
+                <a:solidFill>
+                  <a:srgbClr val="F43F5E"/>
+                </a:solidFill>
+                <a:latin typeface="Calibri" pitchFamily="34" charset="0"/>
+                <a:ea typeface="Calibri" pitchFamily="34" charset="-122"/>
+                <a:cs typeface="Calibri" pitchFamily="34" charset="-120"/>
+              </a:rPr>
+              <a:t>Content policy — 3 tiers, enforced at ingest + retrieval + pre-LLM</a:t>
+            </a:r>
+            <a:endParaRPr lang="en-US" sz="1100" dirty="0"/>
+          </a:p>
+        </p:txBody>
+      </p:sp>
+      <p:sp>
+        <p:nvSpPr>
+          <p:cNvPr id="20" name="Shape 18"/>
+          <p:cNvSpPr/>
+          <p:nvPr/>
+        </p:nvSpPr>
+        <p:spPr>
+          <a:xfrm>
+            <a:off x="4809744" y="3602736"/>
+            <a:ext cx="64008" cy="310896"/>
+          </a:xfrm>
+          <a:prstGeom prst="rect">
+            <a:avLst/>
+          </a:prstGeom>
+          <a:solidFill>
+            <a:srgbClr val="F43F5E"/>
+          </a:solidFill>
+          <a:ln w="12700">
+            <a:solidFill>
+              <a:srgbClr val="F43F5E"/>
+            </a:solidFill>
+            <a:prstDash val="solid"/>
+          </a:ln>
+        </p:spPr>
+      </p:sp>
+      <p:sp>
+        <p:nvSpPr>
+          <p:cNvPr id="21" name="Text 19"/>
+          <p:cNvSpPr/>
+          <p:nvPr/>
+        </p:nvSpPr>
+        <p:spPr>
+          <a:xfrm>
+            <a:off x="4956048" y="3611880"/>
+            <a:ext cx="1234440" cy="182880"/>
+          </a:xfrm>
+          <a:prstGeom prst="rect">
+            <a:avLst/>
+          </a:prstGeom>
+          <a:noFill/>
+          <a:ln/>
+        </p:spPr>
+        <p:txBody>
+          <a:bodyPr wrap="square" lIns="0" tIns="0" rIns="0" bIns="0" rtlCol="0" anchor="ctr"/>
+          <a:lstStyle/>
+          <a:p>
+            <a:pPr indent="0" marL="0">
+              <a:buNone/>
+            </a:pPr>
+            <a:r>
+              <a:rPr lang="en-US" sz="950" b="1" dirty="0">
+                <a:solidFill>
+                  <a:srgbClr val="F43F5E"/>
+                </a:solidFill>
+                <a:latin typeface="Calibri" pitchFamily="34" charset="0"/>
+                <a:ea typeface="Calibri" pitchFamily="34" charset="-122"/>
+                <a:cs typeface="Calibri" pitchFamily="34" charset="-120"/>
+              </a:rPr>
+              <a:t>Always blocked</a:t>
+            </a:r>
+            <a:endParaRPr lang="en-US" sz="950" dirty="0"/>
+          </a:p>
+        </p:txBody>
+      </p:sp>
+      <p:sp>
+        <p:nvSpPr>
+          <p:cNvPr id="22" name="Text 20"/>
+          <p:cNvSpPr/>
+          <p:nvPr/>
+        </p:nvSpPr>
+        <p:spPr>
+          <a:xfrm>
+            <a:off x="4956048" y="3785616"/>
+            <a:ext cx="3749040" cy="182880"/>
+          </a:xfrm>
+          <a:prstGeom prst="rect">
+            <a:avLst/>
+          </a:prstGeom>
+          <a:noFill/>
+          <a:ln/>
+        </p:spPr>
+        <p:txBody>
+          <a:bodyPr wrap="square" lIns="0" tIns="0" rIns="0" bIns="0" rtlCol="0" anchor="ctr"/>
+          <a:lstStyle/>
+          <a:p>
+            <a:pPr indent="0" marL="0">
+              <a:buNone/>
+            </a:pPr>
+            <a:r>
+              <a:rPr lang="en-US" sz="900" dirty="0">
+                <a:solidFill>
+                  <a:srgbClr val="94A3B8"/>
+                </a:solidFill>
+                <a:latin typeface="Calibri" pitchFamily="34" charset="0"/>
+                <a:ea typeface="Calibri" pitchFamily="34" charset="-122"/>
+                <a:cs typeface="Calibri" pitchFamily="34" charset="-120"/>
+              </a:rPr>
+              <a:t>.env, secrets, keys, credentials — regardless of config.</a:t>
+            </a:r>
+            <a:endParaRPr lang="en-US" sz="900" dirty="0"/>
+          </a:p>
+        </p:txBody>
+      </p:sp>
+      <p:sp>
+        <p:nvSpPr>
+          <p:cNvPr id="23" name="Shape 21"/>
+          <p:cNvSpPr/>
+          <p:nvPr/>
+        </p:nvSpPr>
+        <p:spPr>
+          <a:xfrm>
+            <a:off x="4809744" y="4005072"/>
+            <a:ext cx="64008" cy="310896"/>
+          </a:xfrm>
+          <a:prstGeom prst="rect">
+            <a:avLst/>
+          </a:prstGeom>
+          <a:solidFill>
+            <a:srgbClr val="F59E0B"/>
+          </a:solidFill>
+          <a:ln w="12700">
+            <a:solidFill>
+              <a:srgbClr val="F59E0B"/>
+            </a:solidFill>
+            <a:prstDash val="solid"/>
+          </a:ln>
+        </p:spPr>
+      </p:sp>
+      <p:sp>
+        <p:nvSpPr>
+          <p:cNvPr id="24" name="Text 22"/>
+          <p:cNvSpPr/>
+          <p:nvPr/>
+        </p:nvSpPr>
+        <p:spPr>
+          <a:xfrm>
+            <a:off x="4956048" y="4014216"/>
+            <a:ext cx="1234440" cy="182880"/>
+          </a:xfrm>
+          <a:prstGeom prst="rect">
+            <a:avLst/>
+          </a:prstGeom>
+          <a:noFill/>
+          <a:ln/>
+        </p:spPr>
+        <p:txBody>
+          <a:bodyPr wrap="square" lIns="0" tIns="0" rIns="0" bIns="0" rtlCol="0" anchor="ctr"/>
+          <a:lstStyle/>
+          <a:p>
+            <a:pPr indent="0" marL="0">
+              <a:buNone/>
+            </a:pPr>
+            <a:r>
+              <a:rPr lang="en-US" sz="950" b="1" dirty="0">
+                <a:solidFill>
+                  <a:srgbClr val="F59E0B"/>
+                </a:solidFill>
+                <a:latin typeface="Calibri" pitchFamily="34" charset="0"/>
+                <a:ea typeface="Calibri" pitchFamily="34" charset="-122"/>
+                <a:cs typeface="Calibri" pitchFamily="34" charset="-120"/>
+              </a:rPr>
+              <a:t>Opt-in (off)</a:t>
+            </a:r>
+            <a:endParaRPr lang="en-US" sz="950" dirty="0"/>
+          </a:p>
+        </p:txBody>
+      </p:sp>
+      <p:sp>
+        <p:nvSpPr>
+          <p:cNvPr id="25" name="Text 23"/>
+          <p:cNvSpPr/>
+          <p:nvPr/>
+        </p:nvSpPr>
+        <p:spPr>
+          <a:xfrm>
+            <a:off x="4956048" y="4187952"/>
+            <a:ext cx="3749040" cy="182880"/>
+          </a:xfrm>
+          <a:prstGeom prst="rect">
+            <a:avLst/>
+          </a:prstGeom>
+          <a:noFill/>
+          <a:ln/>
+        </p:spPr>
+        <p:txBody>
+          <a:bodyPr wrap="square" lIns="0" tIns="0" rIns="0" bIns="0" rtlCol="0" anchor="ctr"/>
+          <a:lstStyle/>
+          <a:p>
+            <a:pPr indent="0" marL="0">
+              <a:buNone/>
+            </a:pPr>
+            <a:r>
+              <a:rPr lang="en-US" sz="900" dirty="0">
+                <a:solidFill>
+                  <a:srgbClr val="94A3B8"/>
+                </a:solidFill>
+                <a:latin typeface="Calibri" pitchFamily="34" charset="0"/>
+                <a:ea typeface="Calibri" pitchFamily="34" charset="-122"/>
+                <a:cs typeface="Calibri" pitchFamily="34" charset="-120"/>
+              </a:rPr>
+              <a:t>Code snippets (scoped, never full files) — owner enables per twin.</a:t>
+            </a:r>
+            <a:endParaRPr lang="en-US" sz="900" dirty="0"/>
+          </a:p>
+        </p:txBody>
+      </p:sp>
+      <p:sp>
+        <p:nvSpPr>
+          <p:cNvPr id="26" name="Shape 24"/>
+          <p:cNvSpPr/>
+          <p:nvPr/>
+        </p:nvSpPr>
+        <p:spPr>
+          <a:xfrm>
+            <a:off x="4809744" y="4407408"/>
+            <a:ext cx="64008" cy="310896"/>
+          </a:xfrm>
+          <a:prstGeom prst="rect">
+            <a:avLst/>
+          </a:prstGeom>
+          <a:solidFill>
+            <a:srgbClr val="14B8A6"/>
+          </a:solidFill>
+          <a:ln w="12700">
+            <a:solidFill>
+              <a:srgbClr val="14B8A6"/>
+            </a:solidFill>
+            <a:prstDash val="solid"/>
+          </a:ln>
+        </p:spPr>
+      </p:sp>
+      <p:sp>
+        <p:nvSpPr>
+          <p:cNvPr id="27" name="Text 25"/>
+          <p:cNvSpPr/>
+          <p:nvPr/>
+        </p:nvSpPr>
+        <p:spPr>
+          <a:xfrm>
+            <a:off x="4956048" y="4416552"/>
+            <a:ext cx="1234440" cy="182880"/>
+          </a:xfrm>
+          <a:prstGeom prst="rect">
+            <a:avLst/>
+          </a:prstGeom>
+          <a:noFill/>
+          <a:ln/>
+        </p:spPr>
+        <p:txBody>
+          <a:bodyPr wrap="square" lIns="0" tIns="0" rIns="0" bIns="0" rtlCol="0" anchor="ctr"/>
+          <a:lstStyle/>
+          <a:p>
+            <a:pPr indent="0" marL="0">
+              <a:buNone/>
+            </a:pPr>
+            <a:r>
+              <a:rPr lang="en-US" sz="950" b="1" dirty="0">
+                <a:solidFill>
+                  <a:srgbClr val="14B8A6"/>
+                </a:solidFill>
+                <a:latin typeface="Calibri" pitchFamily="34" charset="0"/>
+                <a:ea typeface="Calibri" pitchFamily="34" charset="-122"/>
+                <a:cs typeface="Calibri" pitchFamily="34" charset="-120"/>
+              </a:rPr>
+              <a:t>Always available</a:t>
+            </a:r>
+            <a:endParaRPr lang="en-US" sz="950" dirty="0"/>
+          </a:p>
+        </p:txBody>
+      </p:sp>
+      <p:sp>
+        <p:nvSpPr>
+          <p:cNvPr id="28" name="Text 26"/>
+          <p:cNvSpPr/>
+          <p:nvPr/>
+        </p:nvSpPr>
+        <p:spPr>
+          <a:xfrm>
+            <a:off x="4956048" y="4590288"/>
+            <a:ext cx="3749040" cy="182880"/>
+          </a:xfrm>
+          <a:prstGeom prst="rect">
+            <a:avLst/>
+          </a:prstGeom>
+          <a:noFill/>
+          <a:ln/>
+        </p:spPr>
+        <p:txBody>
+          <a:bodyPr wrap="square" lIns="0" tIns="0" rIns="0" bIns="0" rtlCol="0" anchor="ctr"/>
+          <a:lstStyle/>
+          <a:p>
+            <a:pPr indent="0" marL="0">
+              <a:buNone/>
+            </a:pPr>
+            <a:r>
+              <a:rPr lang="en-US" sz="900" dirty="0">
+                <a:solidFill>
+                  <a:srgbClr val="94A3B8"/>
+                </a:solidFill>
+                <a:latin typeface="Calibri" pitchFamily="34" charset="0"/>
+                <a:ea typeface="Calibri" pitchFamily="34" charset="-122"/>
+                <a:cs typeface="Calibri" pitchFamily="34" charset="-120"/>
+              </a:rPr>
+              <a:t>Docs, summaries, structure, architecture.</a:t>
+            </a:r>
+            <a:endParaRPr lang="en-US" sz="900" dirty="0"/>
+          </a:p>
+        </p:txBody>
+      </p:sp>
+    </p:spTree>
+  </p:cSld>
+  <p:clrMapOvr>
+    <a:masterClrMapping/>
+  </p:clrMapOvr>
+</p:sld>
+</file>
+
+<file path=ppt/slides/slide8.xml><?xml version="1.0" encoding="utf-8"?>
+<p:sld xmlns:a="http://schemas.openxmlformats.org/drawingml/2006/main" xmlns:r="http://schemas.openxmlformats.org/officeDocument/2006/relationships" xmlns:p="http://schemas.openxmlformats.org/presentationml/2006/main">
+  <p:cSld name="Slide 8">
+    <p:bg>
+      <p:bgPr>
+        <a:solidFill>
+          <a:srgbClr val="0A0A0F"/>
+        </a:solidFill>
+      </p:bgPr>
+    </p:bg>
+    <p:spTree>
+      <p:nvGrpSpPr>
+        <p:cNvPr id="1" name=""/>
+        <p:cNvGrpSpPr/>
+        <p:nvPr/>
+      </p:nvGrpSpPr>
+      <p:grpSpPr>
+        <a:xfrm>
+          <a:off x="0" y="0"/>
+          <a:ext cx="0" cy="0"/>
+          <a:chOff x="0" y="0"/>
+          <a:chExt cx="0" cy="0"/>
+        </a:xfrm>
+      </p:grpSpPr>
+      <p:sp>
+        <p:nvSpPr>
+          <p:cNvPr id="2" name="Shape 0"/>
+          <p:cNvSpPr/>
+          <p:nvPr/>
+        </p:nvSpPr>
+        <p:spPr>
+          <a:xfrm>
+            <a:off x="0" y="0"/>
+            <a:ext cx="45720" cy="5143500"/>
+          </a:xfrm>
+          <a:prstGeom prst="rect">
+            <a:avLst/>
+          </a:prstGeom>
+          <a:solidFill>
+            <a:srgbClr val="6366F1"/>
+          </a:solidFill>
+          <a:ln w="12700">
+            <a:solidFill>
+              <a:srgbClr val="6366F1"/>
+            </a:solidFill>
+            <a:prstDash val="solid"/>
+          </a:ln>
+        </p:spPr>
+      </p:sp>
+      <p:sp>
+        <p:nvSpPr>
+          <p:cNvPr id="3" name="Shape 1"/>
+          <p:cNvSpPr/>
+          <p:nvPr/>
+        </p:nvSpPr>
+        <p:spPr>
+          <a:xfrm>
+            <a:off x="5943600" y="365760"/>
+            <a:ext cx="3108960" cy="3108960"/>
+          </a:xfrm>
+          <a:prstGeom prst="ellipse">
+            <a:avLst/>
+          </a:prstGeom>
+          <a:solidFill>
+            <a:srgbClr val="6366F1">
+              <a:alpha val="11000"/>
+            </a:srgbClr>
+          </a:solidFill>
+          <a:ln w="12700">
+            <a:solidFill>
+              <a:srgbClr val="6366F1"/>
+            </a:solidFill>
+            <a:prstDash val="solid"/>
+          </a:ln>
+        </p:spPr>
+      </p:sp>
+      <p:sp>
+        <p:nvSpPr>
+          <p:cNvPr id="4" name="Shape 2"/>
+          <p:cNvSpPr/>
+          <p:nvPr/>
+        </p:nvSpPr>
+        <p:spPr>
+          <a:xfrm>
+            <a:off x="6675120" y="1005840"/>
+            <a:ext cx="2011680" cy="2011680"/>
+          </a:xfrm>
+          <a:prstGeom prst="ellipse">
+            <a:avLst/>
+          </a:prstGeom>
+          <a:solidFill>
+            <a:srgbClr val="14B8A6">
+              <a:alpha val="12000"/>
+            </a:srgbClr>
+          </a:solidFill>
+          <a:ln w="12700">
+            <a:solidFill>
+              <a:srgbClr val="14B8A6"/>
+            </a:solidFill>
+            <a:prstDash val="solid"/>
+          </a:ln>
+        </p:spPr>
+      </p:sp>
+      <p:sp>
+        <p:nvSpPr>
           <p:cNvPr id="5" name="Text 3"/>
           <p:cNvSpPr/>
           <p:nvPr/>
         </p:nvSpPr>
         <p:spPr>
           <a:xfrm>
-            <a:off x="320040" y="502920"/>
-            <a:ext cx="4572000" cy="256032"/>
+            <a:off x="347472" y="457200"/>
+            <a:ext cx="4572000" cy="237744"/>
           </a:xfrm>
           <a:prstGeom prst="rect">
             <a:avLst/>
@@ -7871,8 +8975,8 @@
         </p:nvSpPr>
         <p:spPr>
           <a:xfrm>
-            <a:off x="320040" y="841248"/>
-            <a:ext cx="5303520" cy="1554480"/>
+            <a:off x="347472" y="749808"/>
+            <a:ext cx="5394960" cy="1234440"/>
           </a:xfrm>
           <a:prstGeom prst="rect">
             <a:avLst/>
@@ -7927,8 +9031,8 @@
         </p:nvSpPr>
         <p:spPr>
           <a:xfrm>
-            <a:off x="320040" y="2487168"/>
-            <a:ext cx="5029200" cy="822960"/>
+            <a:off x="347472" y="2057400"/>
+            <a:ext cx="5212080" cy="841248"/>
           </a:xfrm>
           <a:prstGeom prst="rect">
             <a:avLst/>
@@ -7944,7 +9048,7 @@
               <a:buNone/>
             </a:pPr>
             <a:r>
-              <a:rPr lang="en-US" sz="1300" dirty="0">
+              <a:rPr lang="en-US" sz="1100" dirty="0">
                 <a:solidFill>
                   <a:srgbClr val="94A3B8"/>
                 </a:solidFill>
@@ -7952,71 +9056,127 @@
                 <a:ea typeface="Calibri" pitchFamily="34" charset="-122"/>
                 <a:cs typeface="Calibri" pitchFamily="34" charset="-120"/>
               </a:rPr>
-              <a:t>Multi-tenant RAG with explicit guardrails, evidence verification, and a Pydantic-validated LLM judge — closer to production LLM systems than a single-shot demo.</a:t>
-            </a:r>
-            <a:endParaRPr lang="en-US" sz="1300" dirty="0"/>
-          </a:p>
-        </p:txBody>
-      </p:sp>
-      <p:sp>
-        <p:nvSpPr>
-          <p:cNvPr id="8" name="Text 6"/>
-          <p:cNvSpPr/>
-          <p:nvPr/>
-        </p:nvSpPr>
-        <p:spPr>
-          <a:xfrm>
-            <a:off x="320040" y="3401568"/>
-            <a:ext cx="5029200" cy="274320"/>
-          </a:xfrm>
-          <a:prstGeom prst="rect">
-            <a:avLst/>
-          </a:prstGeom>
-          <a:noFill/>
-          <a:ln/>
-        </p:spPr>
-        <p:txBody>
-          <a:bodyPr wrap="square" lIns="0" tIns="0" rIns="0" bIns="0" rtlCol="0" anchor="ctr"/>
-          <a:lstStyle/>
-          <a:p>
-            <a:pPr indent="0" marL="0">
-              <a:buNone/>
-            </a:pPr>
-            <a:r>
-              <a:rPr lang="en-US" sz="1100" b="1" dirty="0">
+              <a:t>A multi-tenant RAG platform with hybrid retrieval, a synchronous LLM-as-judge quality gate, full IaC-managed deployment on AWS, and a content policy that separates what owners choose to share from what visitors can see. Built to be trusted — by the people asking questions and the people whose knowledge is being indexed.</a:t>
+            </a:r>
+            <a:endParaRPr lang="en-US" sz="1100" dirty="0"/>
+          </a:p>
+        </p:txBody>
+      </p:sp>
+      <p:sp>
+        <p:nvSpPr>
+          <p:cNvPr id="8" name="Shape 6"/>
+          <p:cNvSpPr/>
+          <p:nvPr/>
+        </p:nvSpPr>
+        <p:spPr>
+          <a:xfrm>
+            <a:off x="347472" y="2971800"/>
+            <a:ext cx="5212080" cy="530352"/>
+          </a:xfrm>
+          <a:prstGeom prst="rect">
+            <a:avLst/>
+          </a:prstGeom>
+          <a:solidFill>
+            <a:srgbClr val="13131A"/>
+          </a:solidFill>
+          <a:ln w="12700">
+            <a:solidFill>
+              <a:srgbClr val="2D2D3F"/>
+            </a:solidFill>
+            <a:prstDash val="solid"/>
+          </a:ln>
+        </p:spPr>
+      </p:sp>
+      <p:sp>
+        <p:nvSpPr>
+          <p:cNvPr id="9" name="Shape 7"/>
+          <p:cNvSpPr/>
+          <p:nvPr/>
+        </p:nvSpPr>
+        <p:spPr>
+          <a:xfrm>
+            <a:off x="347472" y="2971800"/>
+            <a:ext cx="45720" cy="530352"/>
+          </a:xfrm>
+          <a:prstGeom prst="rect">
+            <a:avLst/>
+          </a:prstGeom>
+          <a:solidFill>
+            <a:srgbClr val="818CF8"/>
+          </a:solidFill>
+          <a:ln w="12700">
+            <a:solidFill>
+              <a:srgbClr val="818CF8"/>
+            </a:solidFill>
+            <a:prstDash val="solid"/>
+          </a:ln>
+        </p:spPr>
+      </p:sp>
+      <p:sp>
+        <p:nvSpPr>
+          <p:cNvPr id="10" name="Text 8"/>
+          <p:cNvSpPr/>
+          <p:nvPr/>
+        </p:nvSpPr>
+        <p:spPr>
+          <a:xfrm>
+            <a:off x="475488" y="3017520"/>
+            <a:ext cx="4974336" cy="182880"/>
+          </a:xfrm>
+          <a:prstGeom prst="rect">
+            <a:avLst/>
+          </a:prstGeom>
+          <a:noFill/>
+          <a:ln/>
+        </p:spPr>
+        <p:txBody>
+          <a:bodyPr wrap="square" lIns="0" tIns="0" rIns="0" bIns="0" rtlCol="0" anchor="ctr"/>
+          <a:lstStyle/>
+          <a:p>
+            <a:pPr indent="0" marL="0">
+              <a:buNone/>
+            </a:pPr>
+            <a:r>
+              <a:rPr lang="en-US" sz="1000" b="1" dirty="0">
                 <a:solidFill>
                   <a:srgbClr val="818CF8"/>
                 </a:solidFill>
-              </a:rPr>
-              <a:t>Live demo surfaces</a:t>
-            </a:r>
-            <a:endParaRPr lang="en-US" sz="1100" dirty="0"/>
-          </a:p>
-        </p:txBody>
-      </p:sp>
-      <p:sp>
-        <p:nvSpPr>
-          <p:cNvPr id="9" name="Text 7"/>
-          <p:cNvSpPr/>
-          <p:nvPr/>
-        </p:nvSpPr>
-        <p:spPr>
-          <a:xfrm>
-            <a:off x="320040" y="3730752"/>
-            <a:ext cx="5029200" cy="320040"/>
-          </a:xfrm>
-          <a:prstGeom prst="rect">
-            <a:avLst/>
-          </a:prstGeom>
-          <a:noFill/>
-          <a:ln/>
-        </p:spPr>
-        <p:txBody>
-          <a:bodyPr wrap="square" lIns="0" tIns="0" rIns="0" bIns="0" rtlCol="0" anchor="ctr"/>
-          <a:lstStyle/>
-          <a:p>
-            <a:r>
-              <a:rPr lang="en-US" sz="1100" dirty="0">
+                <a:latin typeface="Calibri" pitchFamily="34" charset="0"/>
+                <a:ea typeface="Calibri" pitchFamily="34" charset="-122"/>
+                <a:cs typeface="Calibri" pitchFamily="34" charset="-120"/>
+              </a:rPr>
+              <a:t>As an owner</a:t>
+            </a:r>
+            <a:endParaRPr lang="en-US" sz="1000" dirty="0"/>
+          </a:p>
+        </p:txBody>
+      </p:sp>
+      <p:sp>
+        <p:nvSpPr>
+          <p:cNvPr id="11" name="Text 9"/>
+          <p:cNvSpPr/>
+          <p:nvPr/>
+        </p:nvSpPr>
+        <p:spPr>
+          <a:xfrm>
+            <a:off x="475488" y="3227832"/>
+            <a:ext cx="4974336" cy="219456"/>
+          </a:xfrm>
+          <a:prstGeom prst="rect">
+            <a:avLst/>
+          </a:prstGeom>
+          <a:noFill/>
+          <a:ln/>
+        </p:spPr>
+        <p:txBody>
+          <a:bodyPr wrap="square" lIns="0" tIns="0" rIns="0" bIns="0" rtlCol="0" anchor="ctr"/>
+          <a:lstStyle/>
+          <a:p>
+            <a:pPr indent="0" marL="0">
+              <a:buNone/>
+            </a:pPr>
+            <a:r>
+              <a:rPr lang="en-US" sz="880" dirty="0">
                 <a:solidFill>
                   <a:srgbClr val="94A3B8"/>
                 </a:solidFill>
@@ -8024,35 +9184,127 @@
                 <a:ea typeface="Calibri" pitchFamily="34" charset="-122"/>
                 <a:cs typeface="Calibri" pitchFamily="34" charset="-120"/>
               </a:rPr>
-              <a:t>Owner: twin config, source attach, memory brief, share link</a:t>
-            </a:r>
-            <a:endParaRPr lang="en-US" sz="1100" dirty="0"/>
-          </a:p>
-        </p:txBody>
-      </p:sp>
-      <p:sp>
-        <p:nvSpPr>
-          <p:cNvPr id="10" name="Text 8"/>
-          <p:cNvSpPr/>
-          <p:nvPr/>
-        </p:nvSpPr>
-        <p:spPr>
-          <a:xfrm>
-            <a:off x="320040" y="4096512"/>
-            <a:ext cx="5029200" cy="320040"/>
-          </a:xfrm>
-          <a:prstGeom prst="rect">
-            <a:avLst/>
-          </a:prstGeom>
-          <a:noFill/>
-          <a:ln/>
-        </p:spPr>
-        <p:txBody>
-          <a:bodyPr wrap="square" lIns="0" tIns="0" rIns="0" bIns="0" rtlCol="0" anchor="ctr"/>
-          <a:lstStyle/>
-          <a:p>
-            <a:r>
-              <a:rPr lang="en-US" sz="1100" dirty="0">
+              <a:t>Attach a source, watch it ingest  ·  View the auto-generated Memory Brief  ·  Generate a public share link</a:t>
+            </a:r>
+            <a:endParaRPr lang="en-US" sz="880" dirty="0"/>
+          </a:p>
+        </p:txBody>
+      </p:sp>
+      <p:sp>
+        <p:nvSpPr>
+          <p:cNvPr id="12" name="Shape 10"/>
+          <p:cNvSpPr/>
+          <p:nvPr/>
+        </p:nvSpPr>
+        <p:spPr>
+          <a:xfrm>
+            <a:off x="347472" y="3575304"/>
+            <a:ext cx="5212080" cy="530352"/>
+          </a:xfrm>
+          <a:prstGeom prst="rect">
+            <a:avLst/>
+          </a:prstGeom>
+          <a:solidFill>
+            <a:srgbClr val="13131A"/>
+          </a:solidFill>
+          <a:ln w="12700">
+            <a:solidFill>
+              <a:srgbClr val="2D2D3F"/>
+            </a:solidFill>
+            <a:prstDash val="solid"/>
+          </a:ln>
+        </p:spPr>
+      </p:sp>
+      <p:sp>
+        <p:nvSpPr>
+          <p:cNvPr id="13" name="Shape 11"/>
+          <p:cNvSpPr/>
+          <p:nvPr/>
+        </p:nvSpPr>
+        <p:spPr>
+          <a:xfrm>
+            <a:off x="347472" y="3575304"/>
+            <a:ext cx="45720" cy="530352"/>
+          </a:xfrm>
+          <a:prstGeom prst="rect">
+            <a:avLst/>
+          </a:prstGeom>
+          <a:solidFill>
+            <a:srgbClr val="14B8A6"/>
+          </a:solidFill>
+          <a:ln w="12700">
+            <a:solidFill>
+              <a:srgbClr val="14B8A6"/>
+            </a:solidFill>
+            <a:prstDash val="solid"/>
+          </a:ln>
+        </p:spPr>
+      </p:sp>
+      <p:sp>
+        <p:nvSpPr>
+          <p:cNvPr id="14" name="Text 12"/>
+          <p:cNvSpPr/>
+          <p:nvPr/>
+        </p:nvSpPr>
+        <p:spPr>
+          <a:xfrm>
+            <a:off x="475488" y="3621024"/>
+            <a:ext cx="4974336" cy="182880"/>
+          </a:xfrm>
+          <a:prstGeom prst="rect">
+            <a:avLst/>
+          </a:prstGeom>
+          <a:noFill/>
+          <a:ln/>
+        </p:spPr>
+        <p:txBody>
+          <a:bodyPr wrap="square" lIns="0" tIns="0" rIns="0" bIns="0" rtlCol="0" anchor="ctr"/>
+          <a:lstStyle/>
+          <a:p>
+            <a:pPr indent="0" marL="0">
+              <a:buNone/>
+            </a:pPr>
+            <a:r>
+              <a:rPr lang="en-US" sz="1000" b="1" dirty="0">
+                <a:solidFill>
+                  <a:srgbClr val="14B8A6"/>
+                </a:solidFill>
+                <a:latin typeface="Calibri" pitchFamily="34" charset="0"/>
+                <a:ea typeface="Calibri" pitchFamily="34" charset="-122"/>
+                <a:cs typeface="Calibri" pitchFamily="34" charset="-120"/>
+              </a:rPr>
+              <a:t>As a visitor (public URL — no login)</a:t>
+            </a:r>
+            <a:endParaRPr lang="en-US" sz="1000" dirty="0"/>
+          </a:p>
+        </p:txBody>
+      </p:sp>
+      <p:sp>
+        <p:nvSpPr>
+          <p:cNvPr id="15" name="Text 13"/>
+          <p:cNvSpPr/>
+          <p:nvPr/>
+        </p:nvSpPr>
+        <p:spPr>
+          <a:xfrm>
+            <a:off x="475488" y="3831336"/>
+            <a:ext cx="4974336" cy="219456"/>
+          </a:xfrm>
+          <a:prstGeom prst="rect">
+            <a:avLst/>
+          </a:prstGeom>
+          <a:noFill/>
+          <a:ln/>
+        </p:spPr>
+        <p:txBody>
+          <a:bodyPr wrap="square" lIns="0" tIns="0" rIns="0" bIns="0" rtlCol="0" anchor="ctr"/>
+          <a:lstStyle/>
+          <a:p>
+            <a:pPr indent="0" marL="0">
+              <a:buNone/>
+            </a:pPr>
+            <a:r>
+              <a:rPr lang="en-US" sz="880" dirty="0">
                 <a:solidFill>
                   <a:srgbClr val="94A3B8"/>
                 </a:solidFill>
@@ -8060,35 +9312,127 @@
                 <a:ea typeface="Calibri" pitchFamily="34" charset="-122"/>
                 <a:cs typeface="Calibri" pitchFamily="34" charset="-120"/>
               </a:rPr>
-              <a:t>Public: /t/:slug — anonymous chat, grounded answers, no raw leaks</a:t>
-            </a:r>
-            <a:endParaRPr lang="en-US" sz="1100" dirty="0"/>
-          </a:p>
-        </p:txBody>
-      </p:sp>
-      <p:sp>
-        <p:nvSpPr>
-          <p:cNvPr id="11" name="Text 9"/>
-          <p:cNvSpPr/>
-          <p:nvPr/>
-        </p:nvSpPr>
-        <p:spPr>
-          <a:xfrm>
-            <a:off x="320040" y="4462272"/>
-            <a:ext cx="5029200" cy="320040"/>
-          </a:xfrm>
-          <a:prstGeom prst="rect">
-            <a:avLst/>
-          </a:prstGeom>
-          <a:noFill/>
-          <a:ln/>
-        </p:spPr>
-        <p:txBody>
-          <a:bodyPr wrap="square" lIns="0" tIns="0" rIns="0" bIns="0" rtlCol="0" anchor="ctr"/>
-          <a:lstStyle/>
-          <a:p>
-            <a:r>
-              <a:rPr lang="en-US" sz="1100" dirty="0">
+              <a:t>/t/:slug — grounded answers, source attribution, nothing outside the index  ·  /w/:slug — workspace-level routing across twins</a:t>
+            </a:r>
+            <a:endParaRPr lang="en-US" sz="880" dirty="0"/>
+          </a:p>
+        </p:txBody>
+      </p:sp>
+      <p:sp>
+        <p:nvSpPr>
+          <p:cNvPr id="16" name="Shape 14"/>
+          <p:cNvSpPr/>
+          <p:nvPr/>
+        </p:nvSpPr>
+        <p:spPr>
+          <a:xfrm>
+            <a:off x="347472" y="4178808"/>
+            <a:ext cx="5212080" cy="530352"/>
+          </a:xfrm>
+          <a:prstGeom prst="rect">
+            <a:avLst/>
+          </a:prstGeom>
+          <a:solidFill>
+            <a:srgbClr val="13131A"/>
+          </a:solidFill>
+          <a:ln w="12700">
+            <a:solidFill>
+              <a:srgbClr val="2D2D3F"/>
+            </a:solidFill>
+            <a:prstDash val="solid"/>
+          </a:ln>
+        </p:spPr>
+      </p:sp>
+      <p:sp>
+        <p:nvSpPr>
+          <p:cNvPr id="17" name="Shape 15"/>
+          <p:cNvSpPr/>
+          <p:nvPr/>
+        </p:nvSpPr>
+        <p:spPr>
+          <a:xfrm>
+            <a:off x="347472" y="4178808"/>
+            <a:ext cx="45720" cy="530352"/>
+          </a:xfrm>
+          <a:prstGeom prst="rect">
+            <a:avLst/>
+          </a:prstGeom>
+          <a:solidFill>
+            <a:srgbClr val="F59E0B"/>
+          </a:solidFill>
+          <a:ln w="12700">
+            <a:solidFill>
+              <a:srgbClr val="F59E0B"/>
+            </a:solidFill>
+            <a:prstDash val="solid"/>
+          </a:ln>
+        </p:spPr>
+      </p:sp>
+      <p:sp>
+        <p:nvSpPr>
+          <p:cNvPr id="18" name="Text 16"/>
+          <p:cNvSpPr/>
+          <p:nvPr/>
+        </p:nvSpPr>
+        <p:spPr>
+          <a:xfrm>
+            <a:off x="475488" y="4224528"/>
+            <a:ext cx="4974336" cy="182880"/>
+          </a:xfrm>
+          <a:prstGeom prst="rect">
+            <a:avLst/>
+          </a:prstGeom>
+          <a:noFill/>
+          <a:ln/>
+        </p:spPr>
+        <p:txBody>
+          <a:bodyPr wrap="square" lIns="0" tIns="0" rIns="0" bIns="0" rtlCol="0" anchor="ctr"/>
+          <a:lstStyle/>
+          <a:p>
+            <a:pPr indent="0" marL="0">
+              <a:buNone/>
+            </a:pPr>
+            <a:r>
+              <a:rPr lang="en-US" sz="1000" b="1" dirty="0">
+                <a:solidFill>
+                  <a:srgbClr val="F59E0B"/>
+                </a:solidFill>
+                <a:latin typeface="Calibri" pitchFamily="34" charset="0"/>
+                <a:ea typeface="Calibri" pitchFamily="34" charset="-122"/>
+                <a:cs typeface="Calibri" pitchFamily="34" charset="-120"/>
+              </a:rPr>
+              <a:t>As an evaluator</a:t>
+            </a:r>
+            <a:endParaRPr lang="en-US" sz="1000" dirty="0"/>
+          </a:p>
+        </p:txBody>
+      </p:sp>
+      <p:sp>
+        <p:nvSpPr>
+          <p:cNvPr id="19" name="Text 17"/>
+          <p:cNvSpPr/>
+          <p:nvPr/>
+        </p:nvSpPr>
+        <p:spPr>
+          <a:xfrm>
+            <a:off x="475488" y="4434840"/>
+            <a:ext cx="4974336" cy="219456"/>
+          </a:xfrm>
+          <a:prstGeom prst="rect">
+            <a:avLst/>
+          </a:prstGeom>
+          <a:noFill/>
+          <a:ln/>
+        </p:spPr>
+        <p:txBody>
+          <a:bodyPr wrap="square" lIns="0" tIns="0" rIns="0" bIns="0" rtlCol="0" anchor="ctr"/>
+          <a:lstStyle/>
+          <a:p>
+            <a:pPr indent="0" marL="0">
+              <a:buNone/>
+            </a:pPr>
+            <a:r>
+              <a:rPr lang="en-US" sz="880" dirty="0">
                 <a:solidFill>
                   <a:srgbClr val="94A3B8"/>
                 </a:solidFill>
@@ -8096,22 +9440,22 @@
                 <a:ea typeface="Calibri" pitchFamily="34" charset="-122"/>
                 <a:cs typeface="Calibri" pitchFamily="34" charset="-120"/>
               </a:rPr>
-              <a:t>Workspace: /w/:slug — routed or aggregate across all twins</a:t>
-            </a:r>
-            <a:endParaRPr lang="en-US" sz="1100" dirty="0"/>
-          </a:p>
-        </p:txBody>
-      </p:sp>
-      <p:sp>
-        <p:nvSpPr>
-          <p:cNvPr id="12" name="Text 10"/>
-          <p:cNvSpPr/>
-          <p:nvPr/>
-        </p:nvSpPr>
-        <p:spPr>
-          <a:xfrm>
-            <a:off x="320040" y="4754880"/>
-            <a:ext cx="5029200" cy="228600"/>
+              <a:t>Every answer has a Langfuse trace  ·  Every answer was verified + gated before persist  ·  Gate rejections + latency live in CloudWatch dashboard</a:t>
+            </a:r>
+            <a:endParaRPr lang="en-US" sz="880" dirty="0"/>
+          </a:p>
+        </p:txBody>
+      </p:sp>
+      <p:sp>
+        <p:nvSpPr>
+          <p:cNvPr id="20" name="Text 18"/>
+          <p:cNvSpPr/>
+          <p:nvPr/>
+        </p:nvSpPr>
+        <p:spPr>
+          <a:xfrm>
+            <a:off x="347472" y="4809744"/>
+            <a:ext cx="5029200" cy="201168"/>
           </a:xfrm>
           <a:prstGeom prst="rect">
             <a:avLst/>
@@ -8132,7 +9476,7 @@
                   <a:srgbClr val="94A3B8"/>
                 </a:solidFill>
               </a:rPr>
-              <a:t>docbase  •  omovoiye@gmail.com  •  2026</a:t>
+              <a:t>omovoiye@gmail.com  ·  2026</a:t>
             </a:r>
             <a:endParaRPr lang="en-US" sz="850" dirty="0"/>
           </a:p>
